--- a/Proyecto_VetCare__Desarrollo_y_metodolog_a.pptx
+++ b/Proyecto_VetCare__Desarrollo_y_metodolog_a.pptx
@@ -2708,7 +2708,7 @@
         </p:nvSpPr>
         <p:spPr>
           <a:xfrm>
-            <a:off x="952500" y="3339554"/>
+            <a:off x="952500" y="4796284"/>
             <a:ext cx="5308550" cy="938213"/>
           </a:xfrm>
           <a:prstGeom prst="roundRect">
@@ -2730,7 +2730,7 @@
         </p:nvSpPr>
         <p:spPr>
           <a:xfrm>
-            <a:off x="1219200" y="3587204"/>
+            <a:off x="1219200" y="5043934"/>
             <a:ext cx="410319" cy="481012"/>
           </a:xfrm>
           <a:prstGeom prst="rect">
@@ -2774,29 +2774,29 @@
         </p:nvSpPr>
         <p:spPr>
           <a:xfrm>
-            <a:off x="1743819" y="3638848"/>
-            <a:ext cx="4470291" cy="377577"/>
-          </a:xfrm>
-          <a:prstGeom prst="rect">
-            <a:avLst/>
-          </a:prstGeom>
-          <a:noFill/>
-          <a:ln/>
-        </p:spPr>
-        <p:txBody>
-          <a:bodyPr wrap="square" lIns="25400" tIns="25400" rIns="25400" bIns="25400" rtlCol="0" anchor="t">
-            <a:normAutofit/>
-          </a:bodyPr>
-          <a:lstStyle/>
-          <a:p>
-            <a:pPr algn="l" indent="0" marL="0">
-              <a:lnSpc>
-                <a:spcPct val="132037"/>
-              </a:lnSpc>
-              <a:buNone/>
-            </a:pPr>
-            <a:r>
-              <a:rPr lang="en-US" sz="1725" dirty="0">
+            <a:off x="1743819" y="5088285"/>
+            <a:ext cx="4664616" cy="392311"/>
+          </a:xfrm>
+          <a:prstGeom prst="rect">
+            <a:avLst/>
+          </a:prstGeom>
+          <a:noFill/>
+          <a:ln/>
+        </p:spPr>
+        <p:txBody>
+          <a:bodyPr wrap="square" lIns="25400" tIns="25400" rIns="25400" bIns="25400" rtlCol="0" anchor="t">
+            <a:normAutofit/>
+          </a:bodyPr>
+          <a:lstStyle/>
+          <a:p>
+            <a:pPr algn="l" indent="0" marL="0">
+              <a:lnSpc>
+                <a:spcPct val="132857"/>
+              </a:lnSpc>
+              <a:buNone/>
+            </a:pPr>
+            <a:r>
+              <a:rPr lang="en-US" sz="1800" dirty="0">
                 <a:solidFill>
                   <a:srgbClr val="201E1D"/>
                 </a:solidFill>
@@ -2806,7 +2806,7 @@
               </a:rPr>
               <a:t>Especificación de Requisitos de Software</a:t>
             </a:r>
-            <a:endParaRPr lang="en-US" sz="1725" dirty="0"/>
+            <a:endParaRPr lang="en-US" sz="1800" dirty="0"/>
           </a:p>
         </p:txBody>
       </p:sp>
@@ -2818,7 +2818,7 @@
         </p:nvSpPr>
         <p:spPr>
           <a:xfrm>
-            <a:off x="6489650" y="3339554"/>
+            <a:off x="6489650" y="4796284"/>
             <a:ext cx="5308550" cy="938213"/>
           </a:xfrm>
           <a:prstGeom prst="roundRect">
@@ -2840,7 +2840,7 @@
         </p:nvSpPr>
         <p:spPr>
           <a:xfrm>
-            <a:off x="6756350" y="3587204"/>
+            <a:off x="6756350" y="5043934"/>
             <a:ext cx="419249" cy="481012"/>
           </a:xfrm>
           <a:prstGeom prst="rect">
@@ -2884,29 +2884,29 @@
         </p:nvSpPr>
         <p:spPr>
           <a:xfrm>
-            <a:off x="7289899" y="3638848"/>
-            <a:ext cx="4350782" cy="377577"/>
-          </a:xfrm>
-          <a:prstGeom prst="rect">
-            <a:avLst/>
-          </a:prstGeom>
-          <a:noFill/>
-          <a:ln/>
-        </p:spPr>
-        <p:txBody>
-          <a:bodyPr wrap="square" lIns="25400" tIns="25400" rIns="25400" bIns="25400" rtlCol="0" anchor="t">
-            <a:normAutofit/>
-          </a:bodyPr>
-          <a:lstStyle/>
-          <a:p>
-            <a:pPr algn="l" indent="0" marL="0">
-              <a:lnSpc>
-                <a:spcPct val="132037"/>
-              </a:lnSpc>
-              <a:buNone/>
-            </a:pPr>
-            <a:r>
-              <a:rPr lang="en-US" sz="1725" dirty="0">
+            <a:off x="7289899" y="5088285"/>
+            <a:ext cx="4539868" cy="392311"/>
+          </a:xfrm>
+          <a:prstGeom prst="rect">
+            <a:avLst/>
+          </a:prstGeom>
+          <a:noFill/>
+          <a:ln/>
+        </p:spPr>
+        <p:txBody>
+          <a:bodyPr wrap="square" lIns="25400" tIns="25400" rIns="25400" bIns="25400" rtlCol="0" anchor="t">
+            <a:normAutofit/>
+          </a:bodyPr>
+          <a:lstStyle/>
+          <a:p>
+            <a:pPr algn="l" indent="0" marL="0">
+              <a:lnSpc>
+                <a:spcPct val="132857"/>
+              </a:lnSpc>
+              <a:buNone/>
+            </a:pPr>
+            <a:r>
+              <a:rPr lang="en-US" sz="1800" dirty="0">
                 <a:solidFill>
                   <a:srgbClr val="201E1D"/>
                 </a:solidFill>
@@ -2916,7 +2916,7 @@
               </a:rPr>
               <a:t>Diagramas de Casos de Uso (5 módulos)</a:t>
             </a:r>
-            <a:endParaRPr lang="en-US" sz="1725" dirty="0"/>
+            <a:endParaRPr lang="en-US" sz="1800" dirty="0"/>
           </a:p>
         </p:txBody>
       </p:sp>
@@ -2928,7 +2928,7 @@
         </p:nvSpPr>
         <p:spPr>
           <a:xfrm>
-            <a:off x="12026801" y="3339554"/>
+            <a:off x="12026801" y="4796284"/>
             <a:ext cx="5308550" cy="938213"/>
           </a:xfrm>
           <a:prstGeom prst="roundRect">
@@ -2950,7 +2950,7 @@
         </p:nvSpPr>
         <p:spPr>
           <a:xfrm>
-            <a:off x="12293501" y="3587204"/>
+            <a:off x="12293501" y="5043934"/>
             <a:ext cx="419249" cy="481012"/>
           </a:xfrm>
           <a:prstGeom prst="rect">
@@ -2994,29 +2994,29 @@
         </p:nvSpPr>
         <p:spPr>
           <a:xfrm>
-            <a:off x="12827050" y="3638848"/>
-            <a:ext cx="4406607" cy="377577"/>
-          </a:xfrm>
-          <a:prstGeom prst="rect">
-            <a:avLst/>
-          </a:prstGeom>
-          <a:noFill/>
-          <a:ln/>
-        </p:spPr>
-        <p:txBody>
-          <a:bodyPr wrap="square" lIns="25400" tIns="25400" rIns="25400" bIns="25400" rtlCol="0" anchor="t">
-            <a:normAutofit/>
-          </a:bodyPr>
-          <a:lstStyle/>
-          <a:p>
-            <a:pPr algn="l" indent="0" marL="0">
-              <a:lnSpc>
-                <a:spcPct val="132037"/>
-              </a:lnSpc>
-              <a:buNone/>
-            </a:pPr>
-            <a:r>
-              <a:rPr lang="en-US" sz="1725" dirty="0">
+            <a:off x="12827050" y="5088285"/>
+            <a:ext cx="4598313" cy="392311"/>
+          </a:xfrm>
+          <a:prstGeom prst="rect">
+            <a:avLst/>
+          </a:prstGeom>
+          <a:noFill/>
+          <a:ln/>
+        </p:spPr>
+        <p:txBody>
+          <a:bodyPr wrap="square" lIns="25400" tIns="25400" rIns="25400" bIns="25400" rtlCol="0" anchor="t">
+            <a:normAutofit/>
+          </a:bodyPr>
+          <a:lstStyle/>
+          <a:p>
+            <a:pPr algn="l" indent="0" marL="0">
+              <a:lnSpc>
+                <a:spcPct val="132857"/>
+              </a:lnSpc>
+              <a:buNone/>
+            </a:pPr>
+            <a:r>
+              <a:rPr lang="en-US" sz="1800" dirty="0">
                 <a:solidFill>
                   <a:srgbClr val="201E1D"/>
                 </a:solidFill>
@@ -3026,7 +3026,7 @@
               </a:rPr>
               <a:t>Diagramas de Flujo de Datos (Nivel 0 y 1)</a:t>
             </a:r>
-            <a:endParaRPr lang="en-US" sz="1725" dirty="0"/>
+            <a:endParaRPr lang="en-US" sz="1800" dirty="0"/>
           </a:p>
         </p:txBody>
       </p:sp>
@@ -3038,7 +3038,7 @@
         </p:nvSpPr>
         <p:spPr>
           <a:xfrm>
-            <a:off x="952500" y="4506367"/>
+            <a:off x="952500" y="5963096"/>
             <a:ext cx="5308550" cy="938213"/>
           </a:xfrm>
           <a:prstGeom prst="roundRect">
@@ -3060,7 +3060,7 @@
         </p:nvSpPr>
         <p:spPr>
           <a:xfrm>
-            <a:off x="1219200" y="4754017"/>
+            <a:off x="1219200" y="6210746"/>
             <a:ext cx="416719" cy="481012"/>
           </a:xfrm>
           <a:prstGeom prst="rect">
@@ -3104,29 +3104,29 @@
         </p:nvSpPr>
         <p:spPr>
           <a:xfrm>
-            <a:off x="1750219" y="4805660"/>
-            <a:ext cx="3728025" cy="377577"/>
-          </a:xfrm>
-          <a:prstGeom prst="rect">
-            <a:avLst/>
-          </a:prstGeom>
-          <a:noFill/>
-          <a:ln/>
-        </p:spPr>
-        <p:txBody>
-          <a:bodyPr wrap="square" lIns="25400" tIns="25400" rIns="25400" bIns="25400" rtlCol="0" anchor="t">
-            <a:normAutofit/>
-          </a:bodyPr>
-          <a:lstStyle/>
-          <a:p>
-            <a:pPr algn="l" indent="0" marL="0">
-              <a:lnSpc>
-                <a:spcPct val="132037"/>
-              </a:lnSpc>
-              <a:buNone/>
-            </a:pPr>
-            <a:r>
-              <a:rPr lang="en-US" sz="1725" dirty="0">
+            <a:off x="1750219" y="6255097"/>
+            <a:ext cx="3890099" cy="392311"/>
+          </a:xfrm>
+          <a:prstGeom prst="rect">
+            <a:avLst/>
+          </a:prstGeom>
+          <a:noFill/>
+          <a:ln/>
+        </p:spPr>
+        <p:txBody>
+          <a:bodyPr wrap="square" lIns="25400" tIns="25400" rIns="25400" bIns="25400" rtlCol="0" anchor="t">
+            <a:normAutofit/>
+          </a:bodyPr>
+          <a:lstStyle/>
+          <a:p>
+            <a:pPr algn="l" indent="0" marL="0">
+              <a:lnSpc>
+                <a:spcPct val="132857"/>
+              </a:lnSpc>
+              <a:buNone/>
+            </a:pPr>
+            <a:r>
+              <a:rPr lang="en-US" sz="1800" dirty="0">
                 <a:solidFill>
                   <a:srgbClr val="201E1D"/>
                 </a:solidFill>
@@ -3136,7 +3136,7 @@
               </a:rPr>
               <a:t>Diseño Arquitectónico del Sistema</a:t>
             </a:r>
-            <a:endParaRPr lang="en-US" sz="1725" dirty="0"/>
+            <a:endParaRPr lang="en-US" sz="1800" dirty="0"/>
           </a:p>
         </p:txBody>
       </p:sp>
@@ -3148,7 +3148,7 @@
         </p:nvSpPr>
         <p:spPr>
           <a:xfrm>
-            <a:off x="6489650" y="4506367"/>
+            <a:off x="6489650" y="5963096"/>
             <a:ext cx="5308550" cy="938213"/>
           </a:xfrm>
           <a:prstGeom prst="roundRect">
@@ -3170,7 +3170,7 @@
         </p:nvSpPr>
         <p:spPr>
           <a:xfrm>
-            <a:off x="6756350" y="4754017"/>
+            <a:off x="6756350" y="6210746"/>
             <a:ext cx="419249" cy="481012"/>
           </a:xfrm>
           <a:prstGeom prst="rect">
@@ -3214,29 +3214,29 @@
         </p:nvSpPr>
         <p:spPr>
           <a:xfrm>
-            <a:off x="7289899" y="4805660"/>
-            <a:ext cx="4287098" cy="377577"/>
-          </a:xfrm>
-          <a:prstGeom prst="rect">
-            <a:avLst/>
-          </a:prstGeom>
-          <a:noFill/>
-          <a:ln/>
-        </p:spPr>
-        <p:txBody>
-          <a:bodyPr wrap="square" lIns="25400" tIns="25400" rIns="25400" bIns="25400" rtlCol="0" anchor="t">
-            <a:normAutofit/>
-          </a:bodyPr>
-          <a:lstStyle/>
-          <a:p>
-            <a:pPr algn="l" indent="0" marL="0">
-              <a:lnSpc>
-                <a:spcPct val="132037"/>
-              </a:lnSpc>
-              <a:buNone/>
-            </a:pPr>
-            <a:r>
-              <a:rPr lang="en-US" sz="1725" dirty="0">
+            <a:off x="7289899" y="6255097"/>
+            <a:ext cx="4473401" cy="392311"/>
+          </a:xfrm>
+          <a:prstGeom prst="rect">
+            <a:avLst/>
+          </a:prstGeom>
+          <a:noFill/>
+          <a:ln/>
+        </p:spPr>
+        <p:txBody>
+          <a:bodyPr wrap="square" lIns="25400" tIns="25400" rIns="25400" bIns="25400" rtlCol="0" anchor="t">
+            <a:normAutofit/>
+          </a:bodyPr>
+          <a:lstStyle/>
+          <a:p>
+            <a:pPr algn="l" indent="0" marL="0">
+              <a:lnSpc>
+                <a:spcPct val="132857"/>
+              </a:lnSpc>
+              <a:buNone/>
+            </a:pPr>
+            <a:r>
+              <a:rPr lang="en-US" sz="1800" dirty="0">
                 <a:solidFill>
                   <a:srgbClr val="201E1D"/>
                 </a:solidFill>
@@ -3246,7 +3246,7 @@
               </a:rPr>
               <a:t>Modelo Conceptual de la Base de Datos</a:t>
             </a:r>
-            <a:endParaRPr lang="en-US" sz="1725" dirty="0"/>
+            <a:endParaRPr lang="en-US" sz="1800" dirty="0"/>
           </a:p>
         </p:txBody>
       </p:sp>
@@ -3258,7 +3258,7 @@
         </p:nvSpPr>
         <p:spPr>
           <a:xfrm>
-            <a:off x="12026801" y="4506367"/>
+            <a:off x="12026801" y="5963096"/>
             <a:ext cx="5308550" cy="938213"/>
           </a:xfrm>
           <a:prstGeom prst="roundRect">
@@ -3280,7 +3280,7 @@
         </p:nvSpPr>
         <p:spPr>
           <a:xfrm>
-            <a:off x="12293501" y="4754017"/>
+            <a:off x="12293501" y="6210746"/>
             <a:ext cx="419249" cy="481012"/>
           </a:xfrm>
           <a:prstGeom prst="rect">
@@ -3324,29 +3324,29 @@
         </p:nvSpPr>
         <p:spPr>
           <a:xfrm>
-            <a:off x="12827050" y="4805660"/>
-            <a:ext cx="3765843" cy="377577"/>
-          </a:xfrm>
-          <a:prstGeom prst="rect">
-            <a:avLst/>
-          </a:prstGeom>
-          <a:noFill/>
-          <a:ln/>
-        </p:spPr>
-        <p:txBody>
-          <a:bodyPr wrap="square" lIns="25400" tIns="25400" rIns="25400" bIns="25400" rtlCol="0" anchor="t">
-            <a:normAutofit/>
-          </a:bodyPr>
-          <a:lstStyle/>
-          <a:p>
-            <a:pPr algn="l" indent="0" marL="0">
-              <a:lnSpc>
-                <a:spcPct val="132037"/>
-              </a:lnSpc>
-              <a:buNone/>
-            </a:pPr>
-            <a:r>
-              <a:rPr lang="en-US" sz="1725" dirty="0">
+            <a:off x="12827050" y="6255097"/>
+            <a:ext cx="3929554" cy="392311"/>
+          </a:xfrm>
+          <a:prstGeom prst="rect">
+            <a:avLst/>
+          </a:prstGeom>
+          <a:noFill/>
+          <a:ln/>
+        </p:spPr>
+        <p:txBody>
+          <a:bodyPr wrap="square" lIns="25400" tIns="25400" rIns="25400" bIns="25400" rtlCol="0" anchor="t">
+            <a:normAutofit/>
+          </a:bodyPr>
+          <a:lstStyle/>
+          <a:p>
+            <a:pPr algn="l" indent="0" marL="0">
+              <a:lnSpc>
+                <a:spcPct val="132857"/>
+              </a:lnSpc>
+              <a:buNone/>
+            </a:pPr>
+            <a:r>
+              <a:rPr lang="en-US" sz="1800" dirty="0">
                 <a:solidFill>
                   <a:srgbClr val="201E1D"/>
                 </a:solidFill>
@@ -3356,7 +3356,7 @@
               </a:rPr>
               <a:t>Modelo Lógico de la Base de Datos</a:t>
             </a:r>
-            <a:endParaRPr lang="en-US" sz="1725" dirty="0"/>
+            <a:endParaRPr lang="en-US" sz="1800" dirty="0"/>
           </a:p>
         </p:txBody>
       </p:sp>
@@ -3368,7 +3368,7 @@
         </p:nvSpPr>
         <p:spPr>
           <a:xfrm>
-            <a:off x="952500" y="5673179"/>
+            <a:off x="952500" y="7129909"/>
             <a:ext cx="5308550" cy="938213"/>
           </a:xfrm>
           <a:prstGeom prst="roundRect">
@@ -3390,7 +3390,7 @@
         </p:nvSpPr>
         <p:spPr>
           <a:xfrm>
-            <a:off x="1219200" y="5920829"/>
+            <a:off x="1219200" y="7377559"/>
             <a:ext cx="415975" cy="481012"/>
           </a:xfrm>
           <a:prstGeom prst="rect">
@@ -3434,29 +3434,29 @@
         </p:nvSpPr>
         <p:spPr>
           <a:xfrm>
-            <a:off x="1749475" y="5972473"/>
-            <a:ext cx="3658285" cy="377577"/>
-          </a:xfrm>
-          <a:prstGeom prst="rect">
-            <a:avLst/>
-          </a:prstGeom>
-          <a:noFill/>
-          <a:ln/>
-        </p:spPr>
-        <p:txBody>
-          <a:bodyPr wrap="square" lIns="25400" tIns="25400" rIns="25400" bIns="25400" rtlCol="0" anchor="t">
-            <a:normAutofit/>
-          </a:bodyPr>
-          <a:lstStyle/>
-          <a:p>
-            <a:pPr algn="l" indent="0" marL="0">
-              <a:lnSpc>
-                <a:spcPct val="132037"/>
-              </a:lnSpc>
-              <a:buNone/>
-            </a:pPr>
-            <a:r>
-              <a:rPr lang="en-US" sz="1725" dirty="0">
+            <a:off x="1749475" y="7421910"/>
+            <a:ext cx="3817412" cy="392311"/>
+          </a:xfrm>
+          <a:prstGeom prst="rect">
+            <a:avLst/>
+          </a:prstGeom>
+          <a:noFill/>
+          <a:ln/>
+        </p:spPr>
+        <p:txBody>
+          <a:bodyPr wrap="square" lIns="25400" tIns="25400" rIns="25400" bIns="25400" rtlCol="0" anchor="t">
+            <a:normAutofit/>
+          </a:bodyPr>
+          <a:lstStyle/>
+          <a:p>
+            <a:pPr algn="l" indent="0" marL="0">
+              <a:lnSpc>
+                <a:spcPct val="132857"/>
+              </a:lnSpc>
+              <a:buNone/>
+            </a:pPr>
+            <a:r>
+              <a:rPr lang="en-US" sz="1800" dirty="0">
                 <a:solidFill>
                   <a:srgbClr val="201E1D"/>
                 </a:solidFill>
@@ -3466,7 +3466,7 @@
               </a:rPr>
               <a:t>Modelo Físico de la Base de Datos</a:t>
             </a:r>
-            <a:endParaRPr lang="en-US" sz="1725" dirty="0"/>
+            <a:endParaRPr lang="en-US" sz="1800" dirty="0"/>
           </a:p>
         </p:txBody>
       </p:sp>
@@ -3478,7 +3478,7 @@
         </p:nvSpPr>
         <p:spPr>
           <a:xfrm>
-            <a:off x="6489650" y="5673179"/>
+            <a:off x="6489650" y="7129909"/>
             <a:ext cx="5308550" cy="938213"/>
           </a:xfrm>
           <a:prstGeom prst="roundRect">
@@ -3500,7 +3500,7 @@
         </p:nvSpPr>
         <p:spPr>
           <a:xfrm>
-            <a:off x="6756350" y="5920829"/>
+            <a:off x="6756350" y="7377559"/>
             <a:ext cx="419249" cy="481012"/>
           </a:xfrm>
           <a:prstGeom prst="rect">
@@ -3544,29 +3544,29 @@
         </p:nvSpPr>
         <p:spPr>
           <a:xfrm>
-            <a:off x="7289899" y="5972473"/>
-            <a:ext cx="3524369" cy="377577"/>
-          </a:xfrm>
-          <a:prstGeom prst="rect">
-            <a:avLst/>
-          </a:prstGeom>
-          <a:noFill/>
-          <a:ln/>
-        </p:spPr>
-        <p:txBody>
-          <a:bodyPr wrap="square" lIns="25400" tIns="25400" rIns="25400" bIns="25400" rtlCol="0" anchor="t">
-            <a:normAutofit/>
-          </a:bodyPr>
-          <a:lstStyle/>
-          <a:p>
-            <a:pPr algn="l" indent="0" marL="0">
-              <a:lnSpc>
-                <a:spcPct val="132037"/>
-              </a:lnSpc>
-              <a:buNone/>
-            </a:pPr>
-            <a:r>
-              <a:rPr lang="en-US" sz="1725" dirty="0">
+            <a:off x="7289899" y="7421910"/>
+            <a:ext cx="3677602" cy="392311"/>
+          </a:xfrm>
+          <a:prstGeom prst="rect">
+            <a:avLst/>
+          </a:prstGeom>
+          <a:noFill/>
+          <a:ln/>
+        </p:spPr>
+        <p:txBody>
+          <a:bodyPr wrap="square" lIns="25400" tIns="25400" rIns="25400" bIns="25400" rtlCol="0" anchor="t">
+            <a:normAutofit/>
+          </a:bodyPr>
+          <a:lstStyle/>
+          <a:p>
+            <a:pPr algn="l" indent="0" marL="0">
+              <a:lnSpc>
+                <a:spcPct val="132857"/>
+              </a:lnSpc>
+              <a:buNone/>
+            </a:pPr>
+            <a:r>
+              <a:rPr lang="en-US" sz="1800" dirty="0">
                 <a:solidFill>
                   <a:srgbClr val="201E1D"/>
                 </a:solidFill>
@@ -3576,7 +3576,7 @@
               </a:rPr>
               <a:t>Diagramas de Clases por módulo</a:t>
             </a:r>
-            <a:endParaRPr lang="en-US" sz="1725" dirty="0"/>
+            <a:endParaRPr lang="en-US" sz="1800" dirty="0"/>
           </a:p>
         </p:txBody>
       </p:sp>
@@ -3588,7 +3588,7 @@
         </p:nvSpPr>
         <p:spPr>
           <a:xfrm>
-            <a:off x="12026801" y="5673179"/>
+            <a:off x="12026801" y="7129909"/>
             <a:ext cx="5308550" cy="938213"/>
           </a:xfrm>
           <a:prstGeom prst="roundRect">
@@ -3610,7 +3610,7 @@
         </p:nvSpPr>
         <p:spPr>
           <a:xfrm>
-            <a:off x="12293501" y="5920829"/>
+            <a:off x="12293501" y="7377559"/>
             <a:ext cx="419249" cy="481012"/>
           </a:xfrm>
           <a:prstGeom prst="rect">
@@ -3654,29 +3654,29 @@
         </p:nvSpPr>
         <p:spPr>
           <a:xfrm>
-            <a:off x="12827050" y="5972473"/>
-            <a:ext cx="2610371" cy="377577"/>
-          </a:xfrm>
-          <a:prstGeom prst="rect">
-            <a:avLst/>
-          </a:prstGeom>
-          <a:noFill/>
-          <a:ln/>
-        </p:spPr>
-        <p:txBody>
-          <a:bodyPr wrap="square" lIns="25400" tIns="25400" rIns="25400" bIns="25400" rtlCol="0" anchor="t">
-            <a:normAutofit/>
-          </a:bodyPr>
-          <a:lstStyle/>
-          <a:p>
-            <a:pPr algn="l" indent="0" marL="0">
-              <a:lnSpc>
-                <a:spcPct val="132037"/>
-              </a:lnSpc>
-              <a:buNone/>
-            </a:pPr>
-            <a:r>
-              <a:rPr lang="en-US" sz="1725" dirty="0">
+            <a:off x="12827050" y="7421910"/>
+            <a:ext cx="2723823" cy="392311"/>
+          </a:xfrm>
+          <a:prstGeom prst="rect">
+            <a:avLst/>
+          </a:prstGeom>
+          <a:noFill/>
+          <a:ln/>
+        </p:spPr>
+        <p:txBody>
+          <a:bodyPr wrap="square" lIns="25400" tIns="25400" rIns="25400" bIns="25400" rtlCol="0" anchor="t">
+            <a:normAutofit/>
+          </a:bodyPr>
+          <a:lstStyle/>
+          <a:p>
+            <a:pPr algn="l" indent="0" marL="0">
+              <a:lnSpc>
+                <a:spcPct val="132857"/>
+              </a:lnSpc>
+              <a:buNone/>
+            </a:pPr>
+            <a:r>
+              <a:rPr lang="en-US" sz="1800" dirty="0">
                 <a:solidFill>
                   <a:srgbClr val="201E1D"/>
                 </a:solidFill>
@@ -3686,7 +3686,7 @@
               </a:rPr>
               <a:t>Diagrama de Despliegue</a:t>
             </a:r>
-            <a:endParaRPr lang="en-US" sz="1725" dirty="0"/>
+            <a:endParaRPr lang="en-US" sz="1800" dirty="0"/>
           </a:p>
         </p:txBody>
       </p:sp>
@@ -3818,7 +3818,7 @@
         </p:nvSpPr>
         <p:spPr>
           <a:xfrm>
-            <a:off x="952500" y="3359051"/>
+            <a:off x="952500" y="3344317"/>
             <a:ext cx="14287500" cy="1162050"/>
           </a:xfrm>
           <a:prstGeom prst="roundRect">
@@ -3840,7 +3840,7 @@
         </p:nvSpPr>
         <p:spPr>
           <a:xfrm>
-            <a:off x="1333500" y="3644801"/>
+            <a:off x="1333500" y="3630067"/>
             <a:ext cx="2769007" cy="628650"/>
           </a:xfrm>
           <a:prstGeom prst="rect">
@@ -3884,7 +3884,7 @@
         </p:nvSpPr>
         <p:spPr>
           <a:xfrm>
-            <a:off x="10744349" y="3762970"/>
+            <a:off x="10744349" y="3748236"/>
             <a:ext cx="4526116" cy="392311"/>
           </a:xfrm>
           <a:prstGeom prst="rect">
@@ -3928,7 +3928,7 @@
         </p:nvSpPr>
         <p:spPr>
           <a:xfrm>
-            <a:off x="238125" y="4711601"/>
+            <a:off x="238125" y="4696867"/>
             <a:ext cx="15716250" cy="510480"/>
           </a:xfrm>
           <a:prstGeom prst="rect">
@@ -3972,7 +3972,7 @@
         </p:nvSpPr>
         <p:spPr>
           <a:xfrm>
-            <a:off x="952500" y="5374481"/>
+            <a:off x="952500" y="5359747"/>
             <a:ext cx="14287500" cy="1162050"/>
           </a:xfrm>
           <a:prstGeom prst="roundRect">
@@ -3994,7 +3994,7 @@
         </p:nvSpPr>
         <p:spPr>
           <a:xfrm>
-            <a:off x="1333500" y="5660231"/>
+            <a:off x="1333500" y="5645497"/>
             <a:ext cx="1956673" cy="628650"/>
           </a:xfrm>
           <a:prstGeom prst="rect">
@@ -4038,7 +4038,7 @@
         </p:nvSpPr>
         <p:spPr>
           <a:xfrm>
-            <a:off x="9929068" y="5778401"/>
+            <a:off x="9929068" y="5763667"/>
             <a:ext cx="5422925" cy="392311"/>
           </a:xfrm>
           <a:prstGeom prst="rect">
@@ -4082,7 +4082,7 @@
         </p:nvSpPr>
         <p:spPr>
           <a:xfrm>
-            <a:off x="238125" y="6727031"/>
+            <a:off x="238125" y="6712297"/>
             <a:ext cx="15716250" cy="510480"/>
           </a:xfrm>
           <a:prstGeom prst="rect">
@@ -4126,7 +4126,7 @@
         </p:nvSpPr>
         <p:spPr>
           <a:xfrm>
-            <a:off x="952500" y="7389912"/>
+            <a:off x="952500" y="7375178"/>
             <a:ext cx="14287500" cy="1162050"/>
           </a:xfrm>
           <a:prstGeom prst="roundRect">
@@ -4148,7 +4148,7 @@
         </p:nvSpPr>
         <p:spPr>
           <a:xfrm>
-            <a:off x="1333500" y="7675662"/>
+            <a:off x="1333500" y="7660928"/>
             <a:ext cx="1183184" cy="628650"/>
           </a:xfrm>
           <a:prstGeom prst="rect">
@@ -4192,7 +4192,7 @@
         </p:nvSpPr>
         <p:spPr>
           <a:xfrm>
-            <a:off x="10288786" y="7793831"/>
+            <a:off x="10288786" y="7779097"/>
             <a:ext cx="5027235" cy="392311"/>
           </a:xfrm>
           <a:prstGeom prst="rect">
@@ -4236,8 +4236,8 @@
         </p:nvSpPr>
         <p:spPr>
           <a:xfrm>
-            <a:off x="952500" y="8952607"/>
-            <a:ext cx="1004292" cy="572393"/>
+            <a:off x="952500" y="8923139"/>
+            <a:ext cx="1055638" cy="601861"/>
           </a:xfrm>
           <a:prstGeom prst="roundRect">
             <a:avLst>
@@ -4260,8 +4260,8 @@
         </p:nvSpPr>
         <p:spPr>
           <a:xfrm>
-            <a:off x="1171575" y="9076432"/>
-            <a:ext cx="642342" cy="362843"/>
+            <a:off x="1171575" y="9046964"/>
+            <a:ext cx="693688" cy="392311"/>
           </a:xfrm>
           <a:prstGeom prst="rect">
             <a:avLst/>
@@ -4277,12 +4277,12 @@
           <a:p>
             <a:pPr algn="l" indent="0" marL="0">
               <a:lnSpc>
-                <a:spcPct val="131154"/>
-              </a:lnSpc>
-              <a:buNone/>
-            </a:pPr>
-            <a:r>
-              <a:rPr lang="en-US" sz="1650" spc="33" kern="0" dirty="0">
+                <a:spcPct val="132857"/>
+              </a:lnSpc>
+              <a:buNone/>
+            </a:pPr>
+            <a:r>
+              <a:rPr lang="en-US" sz="1800" spc="36" kern="0" dirty="0">
                 <a:solidFill>
                   <a:srgbClr val="C67139"/>
                 </a:solidFill>
@@ -4292,7 +4292,7 @@
               </a:rPr>
               <a:t>React</a:t>
             </a:r>
-            <a:endParaRPr lang="en-US" sz="1650" dirty="0"/>
+            <a:endParaRPr lang="en-US" sz="1800" dirty="0"/>
           </a:p>
         </p:txBody>
       </p:sp>
@@ -4304,8 +4304,8 @@
         </p:nvSpPr>
         <p:spPr>
           <a:xfrm>
-            <a:off x="2109192" y="8952607"/>
-            <a:ext cx="1506438" cy="572393"/>
+            <a:off x="2160538" y="8923139"/>
+            <a:ext cx="1603474" cy="601861"/>
           </a:xfrm>
           <a:prstGeom prst="roundRect">
             <a:avLst>
@@ -4328,8 +4328,8 @@
         </p:nvSpPr>
         <p:spPr>
           <a:xfrm>
-            <a:off x="2328267" y="9076432"/>
-            <a:ext cx="1144488" cy="362843"/>
+            <a:off x="2379613" y="9046964"/>
+            <a:ext cx="1241524" cy="392311"/>
           </a:xfrm>
           <a:prstGeom prst="rect">
             <a:avLst/>
@@ -4345,12 +4345,12 @@
           <a:p>
             <a:pPr algn="l" indent="0" marL="0">
               <a:lnSpc>
-                <a:spcPct val="131154"/>
-              </a:lnSpc>
-              <a:buNone/>
-            </a:pPr>
-            <a:r>
-              <a:rPr lang="en-US" sz="1650" spc="33" kern="0" dirty="0">
+                <a:spcPct val="132857"/>
+              </a:lnSpc>
+              <a:buNone/>
+            </a:pPr>
+            <a:r>
+              <a:rPr lang="en-US" sz="1800" spc="36" kern="0" dirty="0">
                 <a:solidFill>
                   <a:srgbClr val="C67139"/>
                 </a:solidFill>
@@ -4360,7 +4360,7 @@
               </a:rPr>
               <a:t>TypeScript</a:t>
             </a:r>
-            <a:endParaRPr lang="en-US" sz="1650" dirty="0"/>
+            <a:endParaRPr lang="en-US" sz="1800" dirty="0"/>
           </a:p>
         </p:txBody>
       </p:sp>
@@ -4372,8 +4372,8 @@
         </p:nvSpPr>
         <p:spPr>
           <a:xfrm>
-            <a:off x="3768030" y="8952607"/>
-            <a:ext cx="841921" cy="572393"/>
+            <a:off x="3916412" y="8923139"/>
+            <a:ext cx="878681" cy="601861"/>
           </a:xfrm>
           <a:prstGeom prst="roundRect">
             <a:avLst>
@@ -4396,8 +4396,8 @@
         </p:nvSpPr>
         <p:spPr>
           <a:xfrm>
-            <a:off x="3987105" y="9076432"/>
-            <a:ext cx="479971" cy="362843"/>
+            <a:off x="4135487" y="9046964"/>
+            <a:ext cx="516731" cy="392311"/>
           </a:xfrm>
           <a:prstGeom prst="rect">
             <a:avLst/>
@@ -4413,12 +4413,12 @@
           <a:p>
             <a:pPr algn="l" indent="0" marL="0">
               <a:lnSpc>
-                <a:spcPct val="131154"/>
-              </a:lnSpc>
-              <a:buNone/>
-            </a:pPr>
-            <a:r>
-              <a:rPr lang="en-US" sz="1650" spc="33" kern="0" dirty="0">
+                <a:spcPct val="132857"/>
+              </a:lnSpc>
+              <a:buNone/>
+            </a:pPr>
+            <a:r>
+              <a:rPr lang="en-US" sz="1800" spc="36" kern="0" dirty="0">
                 <a:solidFill>
                   <a:srgbClr val="C67139"/>
                 </a:solidFill>
@@ -4428,7 +4428,7 @@
               </a:rPr>
               <a:t>Vite</a:t>
             </a:r>
-            <a:endParaRPr lang="en-US" sz="1650" dirty="0"/>
+            <a:endParaRPr lang="en-US" sz="1800" dirty="0"/>
           </a:p>
         </p:txBody>
       </p:sp>
@@ -4440,8 +4440,8 @@
         </p:nvSpPr>
         <p:spPr>
           <a:xfrm>
-            <a:off x="4762351" y="8952607"/>
-            <a:ext cx="1490663" cy="572393"/>
+            <a:off x="4947493" y="8923139"/>
+            <a:ext cx="1586359" cy="601861"/>
           </a:xfrm>
           <a:prstGeom prst="roundRect">
             <a:avLst>
@@ -4464,8 +4464,8 @@
         </p:nvSpPr>
         <p:spPr>
           <a:xfrm>
-            <a:off x="4981426" y="9076432"/>
-            <a:ext cx="1128712" cy="362843"/>
+            <a:off x="5166568" y="9046964"/>
+            <a:ext cx="1224409" cy="392311"/>
           </a:xfrm>
           <a:prstGeom prst="rect">
             <a:avLst/>
@@ -4481,12 +4481,12 @@
           <a:p>
             <a:pPr algn="l" indent="0" marL="0">
               <a:lnSpc>
-                <a:spcPct val="131154"/>
-              </a:lnSpc>
-              <a:buNone/>
-            </a:pPr>
-            <a:r>
-              <a:rPr lang="en-US" sz="1650" spc="33" kern="0" dirty="0">
+                <a:spcPct val="132857"/>
+              </a:lnSpc>
+              <a:buNone/>
+            </a:pPr>
+            <a:r>
+              <a:rPr lang="en-US" sz="1800" spc="36" kern="0" dirty="0">
                 <a:solidFill>
                   <a:srgbClr val="C67139"/>
                 </a:solidFill>
@@ -4496,7 +4496,7 @@
               </a:rPr>
               <a:t>Material UI</a:t>
             </a:r>
-            <a:endParaRPr lang="en-US" sz="1650" dirty="0"/>
+            <a:endParaRPr lang="en-US" sz="1800" dirty="0"/>
           </a:p>
         </p:txBody>
       </p:sp>
@@ -4508,8 +4508,8 @@
         </p:nvSpPr>
         <p:spPr>
           <a:xfrm>
-            <a:off x="6405414" y="8952607"/>
-            <a:ext cx="1389757" cy="572393"/>
+            <a:off x="6686252" y="8923139"/>
+            <a:ext cx="1476226" cy="601861"/>
           </a:xfrm>
           <a:prstGeom prst="roundRect">
             <a:avLst>
@@ -4532,8 +4532,8 @@
         </p:nvSpPr>
         <p:spPr>
           <a:xfrm>
-            <a:off x="6624489" y="9076432"/>
-            <a:ext cx="1027807" cy="362843"/>
+            <a:off x="6905327" y="9046964"/>
+            <a:ext cx="1114276" cy="392311"/>
           </a:xfrm>
           <a:prstGeom prst="rect">
             <a:avLst/>
@@ -4549,12 +4549,12 @@
           <a:p>
             <a:pPr algn="l" indent="0" marL="0">
               <a:lnSpc>
-                <a:spcPct val="131154"/>
-              </a:lnSpc>
-              <a:buNone/>
-            </a:pPr>
-            <a:r>
-              <a:rPr lang="en-US" sz="1650" spc="33" kern="0" dirty="0">
+                <a:spcPct val="132857"/>
+              </a:lnSpc>
+              <a:buNone/>
+            </a:pPr>
+            <a:r>
+              <a:rPr lang="en-US" sz="1800" spc="36" kern="0" dirty="0">
                 <a:solidFill>
                   <a:srgbClr val="C67139"/>
                 </a:solidFill>
@@ -4564,7 +4564,7 @@
               </a:rPr>
               <a:t>Supabase</a:t>
             </a:r>
-            <a:endParaRPr lang="en-US" sz="1650" dirty="0"/>
+            <a:endParaRPr lang="en-US" sz="1800" dirty="0"/>
           </a:p>
         </p:txBody>
       </p:sp>
@@ -4576,8 +4576,8 @@
         </p:nvSpPr>
         <p:spPr>
           <a:xfrm>
-            <a:off x="7947571" y="8952607"/>
-            <a:ext cx="1606600" cy="572393"/>
+            <a:off x="8314879" y="8923139"/>
+            <a:ext cx="1712714" cy="601861"/>
           </a:xfrm>
           <a:prstGeom prst="roundRect">
             <a:avLst>
@@ -4600,8 +4600,8 @@
         </p:nvSpPr>
         <p:spPr>
           <a:xfrm>
-            <a:off x="8166646" y="9076432"/>
-            <a:ext cx="1244650" cy="362843"/>
+            <a:off x="8533954" y="9046964"/>
+            <a:ext cx="1350764" cy="392311"/>
           </a:xfrm>
           <a:prstGeom prst="rect">
             <a:avLst/>
@@ -4617,12 +4617,12 @@
           <a:p>
             <a:pPr algn="l" indent="0" marL="0">
               <a:lnSpc>
-                <a:spcPct val="131154"/>
-              </a:lnSpc>
-              <a:buNone/>
-            </a:pPr>
-            <a:r>
-              <a:rPr lang="en-US" sz="1650" spc="33" kern="0" dirty="0">
+                <a:spcPct val="132857"/>
+              </a:lnSpc>
+              <a:buNone/>
+            </a:pPr>
+            <a:r>
+              <a:rPr lang="en-US" sz="1800" spc="36" kern="0" dirty="0">
                 <a:solidFill>
                   <a:srgbClr val="C67139"/>
                 </a:solidFill>
@@ -4632,7 +4632,7 @@
               </a:rPr>
               <a:t>PostgreSQL</a:t>
             </a:r>
-            <a:endParaRPr lang="en-US" sz="1650" dirty="0"/>
+            <a:endParaRPr lang="en-US" sz="1800" dirty="0"/>
           </a:p>
         </p:txBody>
       </p:sp>
@@ -4644,8 +4644,8 @@
         </p:nvSpPr>
         <p:spPr>
           <a:xfrm>
-            <a:off x="9706570" y="8952607"/>
-            <a:ext cx="737890" cy="572393"/>
+            <a:off x="10179993" y="8923139"/>
+            <a:ext cx="765125" cy="601861"/>
           </a:xfrm>
           <a:prstGeom prst="ellipse">
             <a:avLst/>
@@ -4666,8 +4666,8 @@
         </p:nvSpPr>
         <p:spPr>
           <a:xfrm>
-            <a:off x="9925645" y="9076432"/>
-            <a:ext cx="375940" cy="362843"/>
+            <a:off x="10399068" y="9046964"/>
+            <a:ext cx="403175" cy="392311"/>
           </a:xfrm>
           <a:prstGeom prst="rect">
             <a:avLst/>
@@ -4683,12 +4683,12 @@
           <a:p>
             <a:pPr algn="l" indent="0" marL="0">
               <a:lnSpc>
-                <a:spcPct val="131154"/>
-              </a:lnSpc>
-              <a:buNone/>
-            </a:pPr>
-            <a:r>
-              <a:rPr lang="en-US" sz="1650" spc="33" kern="0" dirty="0">
+                <a:spcPct val="132857"/>
+              </a:lnSpc>
+              <a:buNone/>
+            </a:pPr>
+            <a:r>
+              <a:rPr lang="en-US" sz="1800" spc="36" kern="0" dirty="0">
                 <a:solidFill>
                   <a:srgbClr val="C67139"/>
                 </a:solidFill>
@@ -4698,7 +4698,7 @@
               </a:rPr>
               <a:t>Git</a:t>
             </a:r>
-            <a:endParaRPr lang="en-US" sz="1650" dirty="0"/>
+            <a:endParaRPr lang="en-US" sz="1800" dirty="0"/>
           </a:p>
         </p:txBody>
       </p:sp>
@@ -5288,7 +5288,7 @@
                 <a:ea typeface="Arial" pitchFamily="34" charset="-122"/>
                 <a:cs typeface="Arial" pitchFamily="34" charset="-120"/>
               </a:rPr>
-              <a:t>El alcance creció módulo por módulo, siguiendo siempre el mismo patrón</a:t>
+              <a:t>Ocho módulos, un solo alcance: el que definió el SRS desde el inicio</a:t>
             </a:r>
             <a:endParaRPr lang="en-US" sz="5100" dirty="0"/>
           </a:p>
@@ -5302,8 +5302,8 @@
         </p:nvSpPr>
         <p:spPr>
           <a:xfrm>
-            <a:off x="952500" y="4206032"/>
-            <a:ext cx="2409825" cy="421928"/>
+            <a:off x="952500" y="4874568"/>
+            <a:ext cx="2933700" cy="421928"/>
           </a:xfrm>
           <a:prstGeom prst="rect">
             <a:avLst/>
@@ -5332,7 +5332,7 @@
                 <a:ea typeface="Arial" pitchFamily="34" charset="-122"/>
                 <a:cs typeface="Arial" pitchFamily="34" charset="-120"/>
               </a:rPr>
-              <a:t>Núcleo del SRS</a:t>
+              <a:t>Operación clínica</a:t>
             </a:r>
             <a:endParaRPr lang="en-US" sz="1950" dirty="0"/>
           </a:p>
@@ -5346,8 +5346,8 @@
         </p:nvSpPr>
         <p:spPr>
           <a:xfrm>
-            <a:off x="3429000" y="4011364"/>
-            <a:ext cx="13906500" cy="773311"/>
+            <a:off x="3905250" y="4679900"/>
+            <a:ext cx="13430250" cy="773311"/>
           </a:xfrm>
           <a:prstGeom prst="roundRect">
             <a:avLst>
@@ -5368,8 +5368,8 @@
         </p:nvSpPr>
         <p:spPr>
           <a:xfrm>
-            <a:off x="3714750" y="4220914"/>
-            <a:ext cx="13752195" cy="392311"/>
+            <a:off x="4191000" y="4889450"/>
+            <a:ext cx="13261658" cy="392311"/>
           </a:xfrm>
           <a:prstGeom prst="rect">
             <a:avLst/>
@@ -5412,8 +5412,8 @@
         </p:nvSpPr>
         <p:spPr>
           <a:xfrm>
-            <a:off x="952500" y="5188893"/>
-            <a:ext cx="2409825" cy="421928"/>
+            <a:off x="952500" y="5857429"/>
+            <a:ext cx="2933700" cy="421928"/>
           </a:xfrm>
           <a:prstGeom prst="rect">
             <a:avLst/>
@@ -5442,7 +5442,7 @@
                 <a:ea typeface="Arial" pitchFamily="34" charset="-122"/>
                 <a:cs typeface="Arial" pitchFamily="34" charset="-120"/>
               </a:rPr>
-              <a:t>Ampliación 1</a:t>
+              <a:t>Gestión interna</a:t>
             </a:r>
             <a:endParaRPr lang="en-US" sz="1950" dirty="0"/>
           </a:p>
@@ -5456,8 +5456,8 @@
         </p:nvSpPr>
         <p:spPr>
           <a:xfrm>
-            <a:off x="3429000" y="4994225"/>
-            <a:ext cx="13906500" cy="773311"/>
+            <a:off x="3905250" y="5662761"/>
+            <a:ext cx="13430250" cy="773311"/>
           </a:xfrm>
           <a:prstGeom prst="roundRect">
             <a:avLst>
@@ -5465,7 +5465,7 @@
             </a:avLst>
           </a:prstGeom>
           <a:solidFill>
-            <a:srgbClr val="FFF2EB"/>
+            <a:srgbClr val="EBDDC5"/>
           </a:solidFill>
           <a:ln/>
         </p:spPr>
@@ -5478,8 +5478,8 @@
         </p:nvSpPr>
         <p:spPr>
           <a:xfrm>
-            <a:off x="3714750" y="5203775"/>
-            <a:ext cx="13752195" cy="392311"/>
+            <a:off x="4191000" y="5872311"/>
+            <a:ext cx="13261658" cy="392311"/>
           </a:xfrm>
           <a:prstGeom prst="rect">
             <a:avLst/>
@@ -5508,7 +5508,7 @@
                 <a:ea typeface="Arial" pitchFamily="34" charset="-122"/>
                 <a:cs typeface="Arial" pitchFamily="34" charset="-120"/>
               </a:rPr>
-              <a:t>Módulo 6 — Administración del sistema: usuarios, roles y catálogos</a:t>
+              <a:t>Módulos 6–7 — Administración del sistema, Compras y Proveedores</a:t>
             </a:r>
             <a:endParaRPr lang="en-US" sz="1800" dirty="0"/>
           </a:p>
@@ -5522,8 +5522,8 @@
         </p:nvSpPr>
         <p:spPr>
           <a:xfrm>
-            <a:off x="952500" y="6171754"/>
-            <a:ext cx="2409825" cy="421928"/>
+            <a:off x="952500" y="6840289"/>
+            <a:ext cx="2933700" cy="421928"/>
           </a:xfrm>
           <a:prstGeom prst="rect">
             <a:avLst/>
@@ -5552,7 +5552,7 @@
                 <a:ea typeface="Arial" pitchFamily="34" charset="-122"/>
                 <a:cs typeface="Arial" pitchFamily="34" charset="-120"/>
               </a:rPr>
-              <a:t>Ampliación 2</a:t>
+              <a:t>Acceso externo</a:t>
             </a:r>
             <a:endParaRPr lang="en-US" sz="1950" dirty="0"/>
           </a:p>
@@ -5566,8 +5566,8 @@
         </p:nvSpPr>
         <p:spPr>
           <a:xfrm>
-            <a:off x="3429000" y="5977086"/>
-            <a:ext cx="13906500" cy="773311"/>
+            <a:off x="3905250" y="6645622"/>
+            <a:ext cx="13430250" cy="773311"/>
           </a:xfrm>
           <a:prstGeom prst="roundRect">
             <a:avLst>
@@ -5575,7 +5575,7 @@
             </a:avLst>
           </a:prstGeom>
           <a:solidFill>
-            <a:srgbClr val="FFF2EB"/>
+            <a:srgbClr val="EBDDC5"/>
           </a:solidFill>
           <a:ln/>
         </p:spPr>
@@ -5588,8 +5588,8 @@
         </p:nvSpPr>
         <p:spPr>
           <a:xfrm>
-            <a:off x="3714750" y="6186636"/>
-            <a:ext cx="13752195" cy="392311"/>
+            <a:off x="4191000" y="6855172"/>
+            <a:ext cx="13261658" cy="392311"/>
           </a:xfrm>
           <a:prstGeom prst="rect">
             <a:avLst/>
@@ -5618,7 +5618,7 @@
                 <a:ea typeface="Arial" pitchFamily="34" charset="-122"/>
                 <a:cs typeface="Arial" pitchFamily="34" charset="-120"/>
               </a:rPr>
-              <a:t>Módulo 7 — Compras y Proveedores</a:t>
+              <a:t>Módulo 8 — Portal del Propietario, con autenticación separada</a:t>
             </a:r>
             <a:endParaRPr lang="en-US" sz="1800" dirty="0"/>
           </a:p>
@@ -5632,74 +5632,8 @@
         </p:nvSpPr>
         <p:spPr>
           <a:xfrm>
-            <a:off x="952500" y="7154614"/>
-            <a:ext cx="2409825" cy="421928"/>
-          </a:xfrm>
-          <a:prstGeom prst="rect">
-            <a:avLst/>
-          </a:prstGeom>
-          <a:noFill/>
-          <a:ln/>
-        </p:spPr>
-        <p:txBody>
-          <a:bodyPr wrap="square" lIns="25400" tIns="25400" rIns="25400" bIns="25400" rtlCol="0" anchor="t">
-            <a:normAutofit/>
-          </a:bodyPr>
-          <a:lstStyle/>
-          <a:p>
-            <a:pPr algn="l" indent="0" marL="0">
-              <a:lnSpc>
-                <a:spcPct val="130000"/>
-              </a:lnSpc>
-              <a:buNone/>
-            </a:pPr>
-            <a:r>
-              <a:rPr lang="en-US" sz="1950" dirty="0">
-                <a:solidFill>
-                  <a:srgbClr val="8C491A"/>
-                </a:solidFill>
-                <a:latin typeface="Arial" pitchFamily="34" charset="0"/>
-                <a:ea typeface="Arial" pitchFamily="34" charset="-122"/>
-                <a:cs typeface="Arial" pitchFamily="34" charset="-120"/>
-              </a:rPr>
-              <a:t>Ampliación 3</a:t>
-            </a:r>
-            <a:endParaRPr lang="en-US" sz="1950" dirty="0"/>
-          </a:p>
-        </p:txBody>
-      </p:sp>
-      <p:sp>
-        <p:nvSpPr>
-          <p:cNvPr id="14" name="Shape 12"/>
-          <p:cNvSpPr/>
-          <p:nvPr/>
-        </p:nvSpPr>
-        <p:spPr>
-          <a:xfrm>
-            <a:off x="3429000" y="6959947"/>
-            <a:ext cx="13906500" cy="773311"/>
-          </a:xfrm>
-          <a:prstGeom prst="roundRect">
-            <a:avLst>
-              <a:gd name="adj" fmla="val 19707"/>
-            </a:avLst>
-          </a:prstGeom>
-          <a:solidFill>
-            <a:srgbClr val="FFF2EB"/>
-          </a:solidFill>
-          <a:ln/>
-        </p:spPr>
-      </p:sp>
-      <p:sp>
-        <p:nvSpPr>
-          <p:cNvPr id="15" name="Text 13"/>
-          <p:cNvSpPr/>
-          <p:nvPr/>
-        </p:nvSpPr>
-        <p:spPr>
-          <a:xfrm>
-            <a:off x="3714750" y="7169497"/>
-            <a:ext cx="13752195" cy="392311"/>
+            <a:off x="952500" y="9045178"/>
+            <a:ext cx="18021300" cy="392311"/>
           </a:xfrm>
           <a:prstGeom prst="rect">
             <a:avLst/>
@@ -5722,57 +5656,13 @@
             <a:r>
               <a:rPr lang="en-US" sz="1800" dirty="0">
                 <a:solidFill>
-                  <a:srgbClr val="201E1D"/>
-                </a:solidFill>
-                <a:latin typeface="Arial" pitchFamily="34" charset="0"/>
-                <a:ea typeface="Arial" pitchFamily="34" charset="-122"/>
-                <a:cs typeface="Arial" pitchFamily="34" charset="-120"/>
-              </a:rPr>
-              <a:t>Módulo 8 — Portal del Propietario, con autenticación separada</a:t>
-            </a:r>
-            <a:endParaRPr lang="en-US" sz="1800" dirty="0"/>
-          </a:p>
-        </p:txBody>
-      </p:sp>
-      <p:sp>
-        <p:nvSpPr>
-          <p:cNvPr id="16" name="Text 14"/>
-          <p:cNvSpPr/>
-          <p:nvPr/>
-        </p:nvSpPr>
-        <p:spPr>
-          <a:xfrm>
-            <a:off x="952500" y="8690967"/>
-            <a:ext cx="16874490" cy="746522"/>
-          </a:xfrm>
-          <a:prstGeom prst="rect">
-            <a:avLst/>
-          </a:prstGeom>
-          <a:noFill/>
-          <a:ln/>
-        </p:spPr>
-        <p:txBody>
-          <a:bodyPr wrap="square" lIns="25400" tIns="25400" rIns="25400" bIns="25400" rtlCol="0" anchor="t">
-            <a:normAutofit/>
-          </a:bodyPr>
-          <a:lstStyle/>
-          <a:p>
-            <a:pPr algn="l" indent="0" marL="0">
-              <a:lnSpc>
-                <a:spcPct val="132857"/>
-              </a:lnSpc>
-              <a:buNone/>
-            </a:pPr>
-            <a:r>
-              <a:rPr lang="en-US" sz="1800" dirty="0">
-                <a:solidFill>
                   <a:srgbClr val="82796A"/>
                 </a:solidFill>
                 <a:latin typeface="Arial" pitchFamily="34" charset="0"/>
                 <a:ea typeface="Arial" pitchFamily="34" charset="-122"/>
                 <a:cs typeface="Arial" pitchFamily="34" charset="-120"/>
               </a:rPr>
-              <a:t>Cada ampliación fue instruida explícitamente por el cliente del proyecto y documentada citando la línea de "Fuera de alcance" que modifica — nunca una reinterpretación libre del SRS.</a:t>
+              <a:t>Los ocho módulos quedaron especificados en el SRS durante la fase de Investigación, antes de iniciar el diseño de arquitectura y base de datos.</a:t>
             </a:r>
             <a:endParaRPr lang="en-US" sz="1800" dirty="0"/>
           </a:p>
@@ -5907,11 +5797,11 @@
         <p:spPr>
           <a:xfrm>
             <a:off x="952500" y="2614166"/>
-            <a:ext cx="3938588" cy="827484"/>
+            <a:ext cx="3910013" cy="3331518"/>
           </a:xfrm>
           <a:prstGeom prst="roundRect">
             <a:avLst>
-              <a:gd name="adj" fmla="val 18417"/>
+              <a:gd name="adj" fmla="val 8005"/>
             </a:avLst>
           </a:prstGeom>
           <a:solidFill>
@@ -5928,29 +5818,29 @@
         </p:nvSpPr>
         <p:spPr>
           <a:xfrm>
-            <a:off x="1181100" y="2899916"/>
-            <a:ext cx="3829526" cy="294084"/>
-          </a:xfrm>
-          <a:prstGeom prst="rect">
-            <a:avLst/>
-          </a:prstGeom>
-          <a:noFill/>
-          <a:ln/>
-        </p:spPr>
-        <p:txBody>
-          <a:bodyPr wrap="square" lIns="25400" tIns="25400" rIns="25400" bIns="25400" rtlCol="0" anchor="t">
-            <a:normAutofit/>
-          </a:bodyPr>
-          <a:lstStyle/>
-          <a:p>
-            <a:pPr algn="l" indent="0" marL="0">
-              <a:lnSpc>
-                <a:spcPct val="96000"/>
-              </a:lnSpc>
-              <a:buNone/>
-            </a:pPr>
-            <a:r>
-              <a:rPr lang="en-US" sz="1800" spc="-27" kern="0" dirty="0">
+            <a:off x="1219200" y="3902720"/>
+            <a:ext cx="3714274" cy="304800"/>
+          </a:xfrm>
+          <a:prstGeom prst="rect">
+            <a:avLst/>
+          </a:prstGeom>
+          <a:noFill/>
+          <a:ln/>
+        </p:spPr>
+        <p:txBody>
+          <a:bodyPr wrap="square" lIns="25400" tIns="25400" rIns="25400" bIns="25400" rtlCol="0" anchor="t">
+            <a:normAutofit/>
+          </a:bodyPr>
+          <a:lstStyle/>
+          <a:p>
+            <a:pPr algn="l" indent="0" marL="0">
+              <a:lnSpc>
+                <a:spcPct val="96552"/>
+              </a:lnSpc>
+              <a:buNone/>
+            </a:pPr>
+            <a:r>
+              <a:rPr lang="en-US" sz="1875" spc="-28" kern="0" dirty="0">
                 <a:solidFill>
                   <a:srgbClr val="201E1D"/>
                 </a:solidFill>
@@ -5960,24 +5850,68 @@
               </a:rPr>
               <a:t>Pacientes y Propietarios</a:t>
             </a:r>
+            <a:endParaRPr lang="en-US" sz="1875" dirty="0"/>
+          </a:p>
+        </p:txBody>
+      </p:sp>
+      <p:sp>
+        <p:nvSpPr>
+          <p:cNvPr id="6" name="Text 4"/>
+          <p:cNvSpPr/>
+          <p:nvPr/>
+        </p:nvSpPr>
+        <p:spPr>
+          <a:xfrm>
+            <a:off x="1219200" y="4302770"/>
+            <a:ext cx="3714274" cy="392311"/>
+          </a:xfrm>
+          <a:prstGeom prst="rect">
+            <a:avLst/>
+          </a:prstGeom>
+          <a:noFill/>
+          <a:ln/>
+        </p:spPr>
+        <p:txBody>
+          <a:bodyPr wrap="square" lIns="25400" tIns="25400" rIns="25400" bIns="25400" rtlCol="0" anchor="t">
+            <a:normAutofit/>
+          </a:bodyPr>
+          <a:lstStyle/>
+          <a:p>
+            <a:pPr algn="l" indent="0" marL="0">
+              <a:lnSpc>
+                <a:spcPct val="132857"/>
+              </a:lnSpc>
+              <a:buNone/>
+            </a:pPr>
+            <a:r>
+              <a:rPr lang="en-US" sz="1800" dirty="0">
+                <a:solidFill>
+                  <a:srgbClr val="645C50"/>
+                </a:solidFill>
+                <a:latin typeface="Arial" pitchFamily="34" charset="0"/>
+                <a:ea typeface="Arial" pitchFamily="34" charset="-122"/>
+                <a:cs typeface="Arial" pitchFamily="34" charset="-120"/>
+              </a:rPr>
+              <a:t>Fase 1 · Núcleo clínico</a:t>
+            </a:r>
             <a:endParaRPr lang="en-US" sz="1800" dirty="0"/>
           </a:p>
         </p:txBody>
       </p:sp>
       <p:sp>
         <p:nvSpPr>
-          <p:cNvPr id="6" name="Shape 4"/>
-          <p:cNvSpPr/>
-          <p:nvPr/>
-        </p:nvSpPr>
-        <p:spPr>
-          <a:xfrm>
-            <a:off x="5100638" y="2614166"/>
-            <a:ext cx="3938588" cy="827484"/>
+          <p:cNvPr id="7" name="Shape 5"/>
+          <p:cNvSpPr/>
+          <p:nvPr/>
+        </p:nvSpPr>
+        <p:spPr>
+          <a:xfrm>
+            <a:off x="5110163" y="2614166"/>
+            <a:ext cx="3910013" cy="3331518"/>
           </a:xfrm>
           <a:prstGeom prst="roundRect">
             <a:avLst>
-              <a:gd name="adj" fmla="val 18417"/>
+              <a:gd name="adj" fmla="val 8005"/>
             </a:avLst>
           </a:prstGeom>
           <a:solidFill>
@@ -5988,35 +5922,35 @@
       </p:sp>
       <p:sp>
         <p:nvSpPr>
-          <p:cNvPr id="7" name="Text 5"/>
-          <p:cNvSpPr/>
-          <p:nvPr/>
-        </p:nvSpPr>
-        <p:spPr>
-          <a:xfrm>
-            <a:off x="5329238" y="2899916"/>
-            <a:ext cx="3829526" cy="294084"/>
-          </a:xfrm>
-          <a:prstGeom prst="rect">
-            <a:avLst/>
-          </a:prstGeom>
-          <a:noFill/>
-          <a:ln/>
-        </p:spPr>
-        <p:txBody>
-          <a:bodyPr wrap="square" lIns="25400" tIns="25400" rIns="25400" bIns="25400" rtlCol="0" anchor="t">
-            <a:normAutofit/>
-          </a:bodyPr>
-          <a:lstStyle/>
-          <a:p>
-            <a:pPr algn="l" indent="0" marL="0">
-              <a:lnSpc>
-                <a:spcPct val="96000"/>
-              </a:lnSpc>
-              <a:buNone/>
-            </a:pPr>
-            <a:r>
-              <a:rPr lang="en-US" sz="1800" spc="-27" kern="0" dirty="0">
+          <p:cNvPr id="8" name="Text 6"/>
+          <p:cNvSpPr/>
+          <p:nvPr/>
+        </p:nvSpPr>
+        <p:spPr>
+          <a:xfrm>
+            <a:off x="5376863" y="3902720"/>
+            <a:ext cx="3714274" cy="304800"/>
+          </a:xfrm>
+          <a:prstGeom prst="rect">
+            <a:avLst/>
+          </a:prstGeom>
+          <a:noFill/>
+          <a:ln/>
+        </p:spPr>
+        <p:txBody>
+          <a:bodyPr wrap="square" lIns="25400" tIns="25400" rIns="25400" bIns="25400" rtlCol="0" anchor="t">
+            <a:normAutofit/>
+          </a:bodyPr>
+          <a:lstStyle/>
+          <a:p>
+            <a:pPr algn="l" indent="0" marL="0">
+              <a:lnSpc>
+                <a:spcPct val="96552"/>
+              </a:lnSpc>
+              <a:buNone/>
+            </a:pPr>
+            <a:r>
+              <a:rPr lang="en-US" sz="1875" spc="-28" kern="0" dirty="0">
                 <a:solidFill>
                   <a:srgbClr val="201E1D"/>
                 </a:solidFill>
@@ -6026,24 +5960,68 @@
               </a:rPr>
               <a:t>Agenda y Citas</a:t>
             </a:r>
+            <a:endParaRPr lang="en-US" sz="1875" dirty="0"/>
+          </a:p>
+        </p:txBody>
+      </p:sp>
+      <p:sp>
+        <p:nvSpPr>
+          <p:cNvPr id="9" name="Text 7"/>
+          <p:cNvSpPr/>
+          <p:nvPr/>
+        </p:nvSpPr>
+        <p:spPr>
+          <a:xfrm>
+            <a:off x="5376863" y="4302770"/>
+            <a:ext cx="3714274" cy="392311"/>
+          </a:xfrm>
+          <a:prstGeom prst="rect">
+            <a:avLst/>
+          </a:prstGeom>
+          <a:noFill/>
+          <a:ln/>
+        </p:spPr>
+        <p:txBody>
+          <a:bodyPr wrap="square" lIns="25400" tIns="25400" rIns="25400" bIns="25400" rtlCol="0" anchor="t">
+            <a:normAutofit/>
+          </a:bodyPr>
+          <a:lstStyle/>
+          <a:p>
+            <a:pPr algn="l" indent="0" marL="0">
+              <a:lnSpc>
+                <a:spcPct val="132857"/>
+              </a:lnSpc>
+              <a:buNone/>
+            </a:pPr>
+            <a:r>
+              <a:rPr lang="en-US" sz="1800" dirty="0">
+                <a:solidFill>
+                  <a:srgbClr val="645C50"/>
+                </a:solidFill>
+                <a:latin typeface="Arial" pitchFamily="34" charset="0"/>
+                <a:ea typeface="Arial" pitchFamily="34" charset="-122"/>
+                <a:cs typeface="Arial" pitchFamily="34" charset="-120"/>
+              </a:rPr>
+              <a:t>Fase 1 · Núcleo clínico</a:t>
+            </a:r>
             <a:endParaRPr lang="en-US" sz="1800" dirty="0"/>
           </a:p>
         </p:txBody>
       </p:sp>
       <p:sp>
         <p:nvSpPr>
-          <p:cNvPr id="8" name="Shape 6"/>
-          <p:cNvSpPr/>
-          <p:nvPr/>
-        </p:nvSpPr>
-        <p:spPr>
-          <a:xfrm>
-            <a:off x="9248775" y="2614166"/>
-            <a:ext cx="3938588" cy="827484"/>
+          <p:cNvPr id="10" name="Shape 8"/>
+          <p:cNvSpPr/>
+          <p:nvPr/>
+        </p:nvSpPr>
+        <p:spPr>
+          <a:xfrm>
+            <a:off x="9267825" y="2614166"/>
+            <a:ext cx="3910013" cy="3331518"/>
           </a:xfrm>
           <a:prstGeom prst="roundRect">
             <a:avLst>
-              <a:gd name="adj" fmla="val 18417"/>
+              <a:gd name="adj" fmla="val 8005"/>
             </a:avLst>
           </a:prstGeom>
           <a:solidFill>
@@ -6054,35 +6032,35 @@
       </p:sp>
       <p:sp>
         <p:nvSpPr>
-          <p:cNvPr id="9" name="Text 7"/>
-          <p:cNvSpPr/>
-          <p:nvPr/>
-        </p:nvSpPr>
-        <p:spPr>
-          <a:xfrm>
-            <a:off x="9477375" y="2899916"/>
-            <a:ext cx="3829526" cy="294084"/>
-          </a:xfrm>
-          <a:prstGeom prst="rect">
-            <a:avLst/>
-          </a:prstGeom>
-          <a:noFill/>
-          <a:ln/>
-        </p:spPr>
-        <p:txBody>
-          <a:bodyPr wrap="square" lIns="25400" tIns="25400" rIns="25400" bIns="25400" rtlCol="0" anchor="t">
-            <a:normAutofit/>
-          </a:bodyPr>
-          <a:lstStyle/>
-          <a:p>
-            <a:pPr algn="l" indent="0" marL="0">
-              <a:lnSpc>
-                <a:spcPct val="96000"/>
-              </a:lnSpc>
-              <a:buNone/>
-            </a:pPr>
-            <a:r>
-              <a:rPr lang="en-US" sz="1800" spc="-27" kern="0" dirty="0">
+          <p:cNvPr id="11" name="Text 9"/>
+          <p:cNvSpPr/>
+          <p:nvPr/>
+        </p:nvSpPr>
+        <p:spPr>
+          <a:xfrm>
+            <a:off x="9534525" y="3902720"/>
+            <a:ext cx="3714274" cy="304800"/>
+          </a:xfrm>
+          <a:prstGeom prst="rect">
+            <a:avLst/>
+          </a:prstGeom>
+          <a:noFill/>
+          <a:ln/>
+        </p:spPr>
+        <p:txBody>
+          <a:bodyPr wrap="square" lIns="25400" tIns="25400" rIns="25400" bIns="25400" rtlCol="0" anchor="t">
+            <a:normAutofit/>
+          </a:bodyPr>
+          <a:lstStyle/>
+          <a:p>
+            <a:pPr algn="l" indent="0" marL="0">
+              <a:lnSpc>
+                <a:spcPct val="96552"/>
+              </a:lnSpc>
+              <a:buNone/>
+            </a:pPr>
+            <a:r>
+              <a:rPr lang="en-US" sz="1875" spc="-28" kern="0" dirty="0">
                 <a:solidFill>
                   <a:srgbClr val="201E1D"/>
                 </a:solidFill>
@@ -6092,24 +6070,68 @@
               </a:rPr>
               <a:t>Historial Clínico</a:t>
             </a:r>
+            <a:endParaRPr lang="en-US" sz="1875" dirty="0"/>
+          </a:p>
+        </p:txBody>
+      </p:sp>
+      <p:sp>
+        <p:nvSpPr>
+          <p:cNvPr id="12" name="Text 10"/>
+          <p:cNvSpPr/>
+          <p:nvPr/>
+        </p:nvSpPr>
+        <p:spPr>
+          <a:xfrm>
+            <a:off x="9534525" y="4302770"/>
+            <a:ext cx="3714274" cy="392311"/>
+          </a:xfrm>
+          <a:prstGeom prst="rect">
+            <a:avLst/>
+          </a:prstGeom>
+          <a:noFill/>
+          <a:ln/>
+        </p:spPr>
+        <p:txBody>
+          <a:bodyPr wrap="square" lIns="25400" tIns="25400" rIns="25400" bIns="25400" rtlCol="0" anchor="t">
+            <a:normAutofit/>
+          </a:bodyPr>
+          <a:lstStyle/>
+          <a:p>
+            <a:pPr algn="l" indent="0" marL="0">
+              <a:lnSpc>
+                <a:spcPct val="132857"/>
+              </a:lnSpc>
+              <a:buNone/>
+            </a:pPr>
+            <a:r>
+              <a:rPr lang="en-US" sz="1800" dirty="0">
+                <a:solidFill>
+                  <a:srgbClr val="645C50"/>
+                </a:solidFill>
+                <a:latin typeface="Arial" pitchFamily="34" charset="0"/>
+                <a:ea typeface="Arial" pitchFamily="34" charset="-122"/>
+                <a:cs typeface="Arial" pitchFamily="34" charset="-120"/>
+              </a:rPr>
+              <a:t>Fase 1 · Núcleo clínico</a:t>
+            </a:r>
             <a:endParaRPr lang="en-US" sz="1800" dirty="0"/>
           </a:p>
         </p:txBody>
       </p:sp>
       <p:sp>
         <p:nvSpPr>
-          <p:cNvPr id="10" name="Shape 8"/>
-          <p:cNvSpPr/>
-          <p:nvPr/>
-        </p:nvSpPr>
-        <p:spPr>
-          <a:xfrm>
-            <a:off x="13396913" y="2614166"/>
-            <a:ext cx="3938588" cy="827484"/>
+          <p:cNvPr id="13" name="Shape 11"/>
+          <p:cNvSpPr/>
+          <p:nvPr/>
+        </p:nvSpPr>
+        <p:spPr>
+          <a:xfrm>
+            <a:off x="13425488" y="2614166"/>
+            <a:ext cx="3910013" cy="3331518"/>
           </a:xfrm>
           <a:prstGeom prst="roundRect">
             <a:avLst>
-              <a:gd name="adj" fmla="val 18417"/>
+              <a:gd name="adj" fmla="val 8005"/>
             </a:avLst>
           </a:prstGeom>
           <a:solidFill>
@@ -6120,35 +6142,35 @@
       </p:sp>
       <p:sp>
         <p:nvSpPr>
-          <p:cNvPr id="11" name="Text 9"/>
-          <p:cNvSpPr/>
-          <p:nvPr/>
-        </p:nvSpPr>
-        <p:spPr>
-          <a:xfrm>
-            <a:off x="13625513" y="2899916"/>
-            <a:ext cx="3829526" cy="294084"/>
-          </a:xfrm>
-          <a:prstGeom prst="rect">
-            <a:avLst/>
-          </a:prstGeom>
-          <a:noFill/>
-          <a:ln/>
-        </p:spPr>
-        <p:txBody>
-          <a:bodyPr wrap="square" lIns="25400" tIns="25400" rIns="25400" bIns="25400" rtlCol="0" anchor="t">
-            <a:normAutofit/>
-          </a:bodyPr>
-          <a:lstStyle/>
-          <a:p>
-            <a:pPr algn="l" indent="0" marL="0">
-              <a:lnSpc>
-                <a:spcPct val="96000"/>
-              </a:lnSpc>
-              <a:buNone/>
-            </a:pPr>
-            <a:r>
-              <a:rPr lang="en-US" sz="1800" spc="-27" kern="0" dirty="0">
+          <p:cNvPr id="14" name="Text 12"/>
+          <p:cNvSpPr/>
+          <p:nvPr/>
+        </p:nvSpPr>
+        <p:spPr>
+          <a:xfrm>
+            <a:off x="13692188" y="3902720"/>
+            <a:ext cx="3714274" cy="304800"/>
+          </a:xfrm>
+          <a:prstGeom prst="rect">
+            <a:avLst/>
+          </a:prstGeom>
+          <a:noFill/>
+          <a:ln/>
+        </p:spPr>
+        <p:txBody>
+          <a:bodyPr wrap="square" lIns="25400" tIns="25400" rIns="25400" bIns="25400" rtlCol="0" anchor="t">
+            <a:normAutofit/>
+          </a:bodyPr>
+          <a:lstStyle/>
+          <a:p>
+            <a:pPr algn="l" indent="0" marL="0">
+              <a:lnSpc>
+                <a:spcPct val="96552"/>
+              </a:lnSpc>
+              <a:buNone/>
+            </a:pPr>
+            <a:r>
+              <a:rPr lang="en-US" sz="1875" spc="-28" kern="0" dirty="0">
                 <a:solidFill>
                   <a:srgbClr val="201E1D"/>
                 </a:solidFill>
@@ -6158,24 +6180,68 @@
               </a:rPr>
               <a:t>Inventario y Medicamentos</a:t>
             </a:r>
+            <a:endParaRPr lang="en-US" sz="1875" dirty="0"/>
+          </a:p>
+        </p:txBody>
+      </p:sp>
+      <p:sp>
+        <p:nvSpPr>
+          <p:cNvPr id="15" name="Text 13"/>
+          <p:cNvSpPr/>
+          <p:nvPr/>
+        </p:nvSpPr>
+        <p:spPr>
+          <a:xfrm>
+            <a:off x="13692188" y="4302770"/>
+            <a:ext cx="3714274" cy="392311"/>
+          </a:xfrm>
+          <a:prstGeom prst="rect">
+            <a:avLst/>
+          </a:prstGeom>
+          <a:noFill/>
+          <a:ln/>
+        </p:spPr>
+        <p:txBody>
+          <a:bodyPr wrap="square" lIns="25400" tIns="25400" rIns="25400" bIns="25400" rtlCol="0" anchor="t">
+            <a:normAutofit/>
+          </a:bodyPr>
+          <a:lstStyle/>
+          <a:p>
+            <a:pPr algn="l" indent="0" marL="0">
+              <a:lnSpc>
+                <a:spcPct val="132857"/>
+              </a:lnSpc>
+              <a:buNone/>
+            </a:pPr>
+            <a:r>
+              <a:rPr lang="en-US" sz="1800" dirty="0">
+                <a:solidFill>
+                  <a:srgbClr val="645C50"/>
+                </a:solidFill>
+                <a:latin typeface="Arial" pitchFamily="34" charset="0"/>
+                <a:ea typeface="Arial" pitchFamily="34" charset="-122"/>
+                <a:cs typeface="Arial" pitchFamily="34" charset="-120"/>
+              </a:rPr>
+              <a:t>Fase 1 · Núcleo clínico</a:t>
+            </a:r>
             <a:endParaRPr lang="en-US" sz="1800" dirty="0"/>
           </a:p>
         </p:txBody>
       </p:sp>
       <p:sp>
         <p:nvSpPr>
-          <p:cNvPr id="12" name="Shape 10"/>
-          <p:cNvSpPr/>
-          <p:nvPr/>
-        </p:nvSpPr>
-        <p:spPr>
-          <a:xfrm>
-            <a:off x="952500" y="3651200"/>
-            <a:ext cx="3938588" cy="827484"/>
+          <p:cNvPr id="16" name="Shape 14"/>
+          <p:cNvSpPr/>
+          <p:nvPr/>
+        </p:nvSpPr>
+        <p:spPr>
+          <a:xfrm>
+            <a:off x="952500" y="6193334"/>
+            <a:ext cx="3910013" cy="3331666"/>
           </a:xfrm>
           <a:prstGeom prst="roundRect">
             <a:avLst>
-              <a:gd name="adj" fmla="val 18417"/>
+              <a:gd name="adj" fmla="val 8005"/>
             </a:avLst>
           </a:prstGeom>
           <a:solidFill>
@@ -6186,35 +6252,35 @@
       </p:sp>
       <p:sp>
         <p:nvSpPr>
-          <p:cNvPr id="13" name="Text 11"/>
-          <p:cNvSpPr/>
-          <p:nvPr/>
-        </p:nvSpPr>
-        <p:spPr>
-          <a:xfrm>
-            <a:off x="1181100" y="3936950"/>
-            <a:ext cx="3829526" cy="294084"/>
-          </a:xfrm>
-          <a:prstGeom prst="rect">
-            <a:avLst/>
-          </a:prstGeom>
-          <a:noFill/>
-          <a:ln/>
-        </p:spPr>
-        <p:txBody>
-          <a:bodyPr wrap="square" lIns="25400" tIns="25400" rIns="25400" bIns="25400" rtlCol="0" anchor="t">
-            <a:normAutofit/>
-          </a:bodyPr>
-          <a:lstStyle/>
-          <a:p>
-            <a:pPr algn="l" indent="0" marL="0">
-              <a:lnSpc>
-                <a:spcPct val="96000"/>
-              </a:lnSpc>
-              <a:buNone/>
-            </a:pPr>
-            <a:r>
-              <a:rPr lang="en-US" sz="1800" spc="-27" kern="0" dirty="0">
+          <p:cNvPr id="17" name="Text 15"/>
+          <p:cNvSpPr/>
+          <p:nvPr/>
+        </p:nvSpPr>
+        <p:spPr>
+          <a:xfrm>
+            <a:off x="1219200" y="7482036"/>
+            <a:ext cx="3714274" cy="304800"/>
+          </a:xfrm>
+          <a:prstGeom prst="rect">
+            <a:avLst/>
+          </a:prstGeom>
+          <a:noFill/>
+          <a:ln/>
+        </p:spPr>
+        <p:txBody>
+          <a:bodyPr wrap="square" lIns="25400" tIns="25400" rIns="25400" bIns="25400" rtlCol="0" anchor="t">
+            <a:normAutofit/>
+          </a:bodyPr>
+          <a:lstStyle/>
+          <a:p>
+            <a:pPr algn="l" indent="0" marL="0">
+              <a:lnSpc>
+                <a:spcPct val="96552"/>
+              </a:lnSpc>
+              <a:buNone/>
+            </a:pPr>
+            <a:r>
+              <a:rPr lang="en-US" sz="1875" spc="-28" kern="0" dirty="0">
                 <a:solidFill>
                   <a:srgbClr val="201E1D"/>
                 </a:solidFill>
@@ -6224,65 +6290,109 @@
               </a:rPr>
               <a:t>Facturación y Reportes</a:t>
             </a:r>
+            <a:endParaRPr lang="en-US" sz="1875" dirty="0"/>
+          </a:p>
+        </p:txBody>
+      </p:sp>
+      <p:sp>
+        <p:nvSpPr>
+          <p:cNvPr id="18" name="Text 16"/>
+          <p:cNvSpPr/>
+          <p:nvPr/>
+        </p:nvSpPr>
+        <p:spPr>
+          <a:xfrm>
+            <a:off x="1219200" y="7882086"/>
+            <a:ext cx="3714274" cy="392311"/>
+          </a:xfrm>
+          <a:prstGeom prst="rect">
+            <a:avLst/>
+          </a:prstGeom>
+          <a:noFill/>
+          <a:ln/>
+        </p:spPr>
+        <p:txBody>
+          <a:bodyPr wrap="square" lIns="25400" tIns="25400" rIns="25400" bIns="25400" rtlCol="0" anchor="t">
+            <a:normAutofit/>
+          </a:bodyPr>
+          <a:lstStyle/>
+          <a:p>
+            <a:pPr algn="l" indent="0" marL="0">
+              <a:lnSpc>
+                <a:spcPct val="132857"/>
+              </a:lnSpc>
+              <a:buNone/>
+            </a:pPr>
+            <a:r>
+              <a:rPr lang="en-US" sz="1800" dirty="0">
+                <a:solidFill>
+                  <a:srgbClr val="645C50"/>
+                </a:solidFill>
+                <a:latin typeface="Arial" pitchFamily="34" charset="0"/>
+                <a:ea typeface="Arial" pitchFamily="34" charset="-122"/>
+                <a:cs typeface="Arial" pitchFamily="34" charset="-120"/>
+              </a:rPr>
+              <a:t>Fase 1 · Núcleo clínico</a:t>
+            </a:r>
             <a:endParaRPr lang="en-US" sz="1800" dirty="0"/>
           </a:p>
         </p:txBody>
       </p:sp>
       <p:sp>
         <p:nvSpPr>
-          <p:cNvPr id="14" name="Shape 12"/>
-          <p:cNvSpPr/>
-          <p:nvPr/>
-        </p:nvSpPr>
-        <p:spPr>
-          <a:xfrm>
-            <a:off x="5100638" y="3651200"/>
-            <a:ext cx="3938588" cy="827484"/>
+          <p:cNvPr id="19" name="Shape 17"/>
+          <p:cNvSpPr/>
+          <p:nvPr/>
+        </p:nvSpPr>
+        <p:spPr>
+          <a:xfrm>
+            <a:off x="5110163" y="6193334"/>
+            <a:ext cx="3910013" cy="3331666"/>
           </a:xfrm>
           <a:prstGeom prst="roundRect">
             <a:avLst>
-              <a:gd name="adj" fmla="val 18417"/>
+              <a:gd name="adj" fmla="val 8005"/>
             </a:avLst>
           </a:prstGeom>
           <a:solidFill>
-            <a:srgbClr val="FFF2EB"/>
+            <a:srgbClr val="EBDDC5"/>
           </a:solidFill>
           <a:ln/>
         </p:spPr>
       </p:sp>
       <p:sp>
         <p:nvSpPr>
-          <p:cNvPr id="15" name="Text 13"/>
-          <p:cNvSpPr/>
-          <p:nvPr/>
-        </p:nvSpPr>
-        <p:spPr>
-          <a:xfrm>
-            <a:off x="5329238" y="3936950"/>
-            <a:ext cx="3829526" cy="294084"/>
-          </a:xfrm>
-          <a:prstGeom prst="rect">
-            <a:avLst/>
-          </a:prstGeom>
-          <a:noFill/>
-          <a:ln/>
-        </p:spPr>
-        <p:txBody>
-          <a:bodyPr wrap="square" lIns="25400" tIns="25400" rIns="25400" bIns="25400" rtlCol="0" anchor="t">
-            <a:normAutofit/>
-          </a:bodyPr>
-          <a:lstStyle/>
-          <a:p>
-            <a:pPr algn="l" indent="0" marL="0">
-              <a:lnSpc>
-                <a:spcPct val="96000"/>
-              </a:lnSpc>
-              <a:buNone/>
-            </a:pPr>
-            <a:r>
-              <a:rPr lang="en-US" sz="1800" spc="-27" kern="0" dirty="0">
-                <a:solidFill>
-                  <a:srgbClr val="8C491A"/>
+          <p:cNvPr id="20" name="Text 18"/>
+          <p:cNvSpPr/>
+          <p:nvPr/>
+        </p:nvSpPr>
+        <p:spPr>
+          <a:xfrm>
+            <a:off x="5376863" y="7482036"/>
+            <a:ext cx="3714274" cy="304800"/>
+          </a:xfrm>
+          <a:prstGeom prst="rect">
+            <a:avLst/>
+          </a:prstGeom>
+          <a:noFill/>
+          <a:ln/>
+        </p:spPr>
+        <p:txBody>
+          <a:bodyPr wrap="square" lIns="25400" tIns="25400" rIns="25400" bIns="25400" rtlCol="0" anchor="t">
+            <a:normAutofit/>
+          </a:bodyPr>
+          <a:lstStyle/>
+          <a:p>
+            <a:pPr algn="l" indent="0" marL="0">
+              <a:lnSpc>
+                <a:spcPct val="96552"/>
+              </a:lnSpc>
+              <a:buNone/>
+            </a:pPr>
+            <a:r>
+              <a:rPr lang="en-US" sz="1875" spc="-28" kern="0" dirty="0">
+                <a:solidFill>
+                  <a:srgbClr val="201E1D"/>
                 </a:solidFill>
                 <a:latin typeface="Arial" pitchFamily="34" charset="0"/>
                 <a:ea typeface="Arial" pitchFamily="34" charset="-122"/>
@@ -6290,65 +6400,109 @@
               </a:rPr>
               <a:t>Administración</a:t>
             </a:r>
+            <a:endParaRPr lang="en-US" sz="1875" dirty="0"/>
+          </a:p>
+        </p:txBody>
+      </p:sp>
+      <p:sp>
+        <p:nvSpPr>
+          <p:cNvPr id="21" name="Text 19"/>
+          <p:cNvSpPr/>
+          <p:nvPr/>
+        </p:nvSpPr>
+        <p:spPr>
+          <a:xfrm>
+            <a:off x="5376863" y="7882086"/>
+            <a:ext cx="3714274" cy="392311"/>
+          </a:xfrm>
+          <a:prstGeom prst="rect">
+            <a:avLst/>
+          </a:prstGeom>
+          <a:noFill/>
+          <a:ln/>
+        </p:spPr>
+        <p:txBody>
+          <a:bodyPr wrap="square" lIns="25400" tIns="25400" rIns="25400" bIns="25400" rtlCol="0" anchor="t">
+            <a:normAutofit/>
+          </a:bodyPr>
+          <a:lstStyle/>
+          <a:p>
+            <a:pPr algn="l" indent="0" marL="0">
+              <a:lnSpc>
+                <a:spcPct val="132857"/>
+              </a:lnSpc>
+              <a:buNone/>
+            </a:pPr>
+            <a:r>
+              <a:rPr lang="en-US" sz="1800" dirty="0">
+                <a:solidFill>
+                  <a:srgbClr val="645C50"/>
+                </a:solidFill>
+                <a:latin typeface="Arial" pitchFamily="34" charset="0"/>
+                <a:ea typeface="Arial" pitchFamily="34" charset="-122"/>
+                <a:cs typeface="Arial" pitchFamily="34" charset="-120"/>
+              </a:rPr>
+              <a:t>Gestión interna</a:t>
+            </a:r>
             <a:endParaRPr lang="en-US" sz="1800" dirty="0"/>
           </a:p>
         </p:txBody>
       </p:sp>
       <p:sp>
         <p:nvSpPr>
-          <p:cNvPr id="16" name="Shape 14"/>
-          <p:cNvSpPr/>
-          <p:nvPr/>
-        </p:nvSpPr>
-        <p:spPr>
-          <a:xfrm>
-            <a:off x="9248775" y="3651200"/>
-            <a:ext cx="3938588" cy="827484"/>
+          <p:cNvPr id="22" name="Shape 20"/>
+          <p:cNvSpPr/>
+          <p:nvPr/>
+        </p:nvSpPr>
+        <p:spPr>
+          <a:xfrm>
+            <a:off x="9267825" y="6193334"/>
+            <a:ext cx="3910013" cy="3331666"/>
           </a:xfrm>
           <a:prstGeom prst="roundRect">
             <a:avLst>
-              <a:gd name="adj" fmla="val 18417"/>
+              <a:gd name="adj" fmla="val 8005"/>
             </a:avLst>
           </a:prstGeom>
           <a:solidFill>
-            <a:srgbClr val="FFF2EB"/>
+            <a:srgbClr val="EBDDC5"/>
           </a:solidFill>
           <a:ln/>
         </p:spPr>
       </p:sp>
       <p:sp>
         <p:nvSpPr>
-          <p:cNvPr id="17" name="Text 15"/>
-          <p:cNvSpPr/>
-          <p:nvPr/>
-        </p:nvSpPr>
-        <p:spPr>
-          <a:xfrm>
-            <a:off x="9477375" y="3936950"/>
-            <a:ext cx="3829526" cy="294084"/>
-          </a:xfrm>
-          <a:prstGeom prst="rect">
-            <a:avLst/>
-          </a:prstGeom>
-          <a:noFill/>
-          <a:ln/>
-        </p:spPr>
-        <p:txBody>
-          <a:bodyPr wrap="square" lIns="25400" tIns="25400" rIns="25400" bIns="25400" rtlCol="0" anchor="t">
-            <a:normAutofit/>
-          </a:bodyPr>
-          <a:lstStyle/>
-          <a:p>
-            <a:pPr algn="l" indent="0" marL="0">
-              <a:lnSpc>
-                <a:spcPct val="96000"/>
-              </a:lnSpc>
-              <a:buNone/>
-            </a:pPr>
-            <a:r>
-              <a:rPr lang="en-US" sz="1800" spc="-27" kern="0" dirty="0">
-                <a:solidFill>
-                  <a:srgbClr val="8C491A"/>
+          <p:cNvPr id="23" name="Text 21"/>
+          <p:cNvSpPr/>
+          <p:nvPr/>
+        </p:nvSpPr>
+        <p:spPr>
+          <a:xfrm>
+            <a:off x="9534525" y="7482036"/>
+            <a:ext cx="3714274" cy="304800"/>
+          </a:xfrm>
+          <a:prstGeom prst="rect">
+            <a:avLst/>
+          </a:prstGeom>
+          <a:noFill/>
+          <a:ln/>
+        </p:spPr>
+        <p:txBody>
+          <a:bodyPr wrap="square" lIns="25400" tIns="25400" rIns="25400" bIns="25400" rtlCol="0" anchor="t">
+            <a:normAutofit/>
+          </a:bodyPr>
+          <a:lstStyle/>
+          <a:p>
+            <a:pPr algn="l" indent="0" marL="0">
+              <a:lnSpc>
+                <a:spcPct val="96552"/>
+              </a:lnSpc>
+              <a:buNone/>
+            </a:pPr>
+            <a:r>
+              <a:rPr lang="en-US" sz="1875" spc="-28" kern="0" dirty="0">
+                <a:solidFill>
+                  <a:srgbClr val="201E1D"/>
                 </a:solidFill>
                 <a:latin typeface="Arial" pitchFamily="34" charset="0"/>
                 <a:ea typeface="Arial" pitchFamily="34" charset="-122"/>
@@ -6356,65 +6510,109 @@
               </a:rPr>
               <a:t>Compras y Proveedores</a:t>
             </a:r>
+            <a:endParaRPr lang="en-US" sz="1875" dirty="0"/>
+          </a:p>
+        </p:txBody>
+      </p:sp>
+      <p:sp>
+        <p:nvSpPr>
+          <p:cNvPr id="24" name="Text 22"/>
+          <p:cNvSpPr/>
+          <p:nvPr/>
+        </p:nvSpPr>
+        <p:spPr>
+          <a:xfrm>
+            <a:off x="9534525" y="7882086"/>
+            <a:ext cx="3714274" cy="392311"/>
+          </a:xfrm>
+          <a:prstGeom prst="rect">
+            <a:avLst/>
+          </a:prstGeom>
+          <a:noFill/>
+          <a:ln/>
+        </p:spPr>
+        <p:txBody>
+          <a:bodyPr wrap="square" lIns="25400" tIns="25400" rIns="25400" bIns="25400" rtlCol="0" anchor="t">
+            <a:normAutofit/>
+          </a:bodyPr>
+          <a:lstStyle/>
+          <a:p>
+            <a:pPr algn="l" indent="0" marL="0">
+              <a:lnSpc>
+                <a:spcPct val="132857"/>
+              </a:lnSpc>
+              <a:buNone/>
+            </a:pPr>
+            <a:r>
+              <a:rPr lang="en-US" sz="1800" dirty="0">
+                <a:solidFill>
+                  <a:srgbClr val="645C50"/>
+                </a:solidFill>
+                <a:latin typeface="Arial" pitchFamily="34" charset="0"/>
+                <a:ea typeface="Arial" pitchFamily="34" charset="-122"/>
+                <a:cs typeface="Arial" pitchFamily="34" charset="-120"/>
+              </a:rPr>
+              <a:t>Gestión interna</a:t>
+            </a:r>
             <a:endParaRPr lang="en-US" sz="1800" dirty="0"/>
           </a:p>
         </p:txBody>
       </p:sp>
       <p:sp>
         <p:nvSpPr>
-          <p:cNvPr id="18" name="Shape 16"/>
-          <p:cNvSpPr/>
-          <p:nvPr/>
-        </p:nvSpPr>
-        <p:spPr>
-          <a:xfrm>
-            <a:off x="13396913" y="3651200"/>
-            <a:ext cx="3938588" cy="827484"/>
+          <p:cNvPr id="25" name="Shape 23"/>
+          <p:cNvSpPr/>
+          <p:nvPr/>
+        </p:nvSpPr>
+        <p:spPr>
+          <a:xfrm>
+            <a:off x="13425488" y="6193334"/>
+            <a:ext cx="3910013" cy="3331666"/>
           </a:xfrm>
           <a:prstGeom prst="roundRect">
             <a:avLst>
-              <a:gd name="adj" fmla="val 18417"/>
+              <a:gd name="adj" fmla="val 8005"/>
             </a:avLst>
           </a:prstGeom>
           <a:solidFill>
-            <a:srgbClr val="FFF2EB"/>
+            <a:srgbClr val="EBDDC5"/>
           </a:solidFill>
           <a:ln/>
         </p:spPr>
       </p:sp>
       <p:sp>
         <p:nvSpPr>
-          <p:cNvPr id="19" name="Text 17"/>
-          <p:cNvSpPr/>
-          <p:nvPr/>
-        </p:nvSpPr>
-        <p:spPr>
-          <a:xfrm>
-            <a:off x="13625513" y="3936950"/>
-            <a:ext cx="3829526" cy="294084"/>
-          </a:xfrm>
-          <a:prstGeom prst="rect">
-            <a:avLst/>
-          </a:prstGeom>
-          <a:noFill/>
-          <a:ln/>
-        </p:spPr>
-        <p:txBody>
-          <a:bodyPr wrap="square" lIns="25400" tIns="25400" rIns="25400" bIns="25400" rtlCol="0" anchor="t">
-            <a:normAutofit/>
-          </a:bodyPr>
-          <a:lstStyle/>
-          <a:p>
-            <a:pPr algn="l" indent="0" marL="0">
-              <a:lnSpc>
-                <a:spcPct val="96000"/>
-              </a:lnSpc>
-              <a:buNone/>
-            </a:pPr>
-            <a:r>
-              <a:rPr lang="en-US" sz="1800" spc="-27" kern="0" dirty="0">
-                <a:solidFill>
-                  <a:srgbClr val="8C491A"/>
+          <p:cNvPr id="26" name="Text 24"/>
+          <p:cNvSpPr/>
+          <p:nvPr/>
+        </p:nvSpPr>
+        <p:spPr>
+          <a:xfrm>
+            <a:off x="13692188" y="7482036"/>
+            <a:ext cx="3714274" cy="304800"/>
+          </a:xfrm>
+          <a:prstGeom prst="rect">
+            <a:avLst/>
+          </a:prstGeom>
+          <a:noFill/>
+          <a:ln/>
+        </p:spPr>
+        <p:txBody>
+          <a:bodyPr wrap="square" lIns="25400" tIns="25400" rIns="25400" bIns="25400" rtlCol="0" anchor="t">
+            <a:normAutofit/>
+          </a:bodyPr>
+          <a:lstStyle/>
+          <a:p>
+            <a:pPr algn="l" indent="0" marL="0">
+              <a:lnSpc>
+                <a:spcPct val="96552"/>
+              </a:lnSpc>
+              <a:buNone/>
+            </a:pPr>
+            <a:r>
+              <a:rPr lang="en-US" sz="1875" spc="-28" kern="0" dirty="0">
+                <a:solidFill>
+                  <a:srgbClr val="201E1D"/>
                 </a:solidFill>
                 <a:latin typeface="Arial" pitchFamily="34" charset="0"/>
                 <a:ea typeface="Arial" pitchFamily="34" charset="-122"/>
@@ -6422,139 +6620,51 @@
               </a:rPr>
               <a:t>Portal del Propietario</a:t>
             </a:r>
+            <a:endParaRPr lang="en-US" sz="1875" dirty="0"/>
+          </a:p>
+        </p:txBody>
+      </p:sp>
+      <p:sp>
+        <p:nvSpPr>
+          <p:cNvPr id="27" name="Text 25"/>
+          <p:cNvSpPr/>
+          <p:nvPr/>
+        </p:nvSpPr>
+        <p:spPr>
+          <a:xfrm>
+            <a:off x="13692188" y="7882086"/>
+            <a:ext cx="3714274" cy="392311"/>
+          </a:xfrm>
+          <a:prstGeom prst="rect">
+            <a:avLst/>
+          </a:prstGeom>
+          <a:noFill/>
+          <a:ln/>
+        </p:spPr>
+        <p:txBody>
+          <a:bodyPr wrap="square" lIns="25400" tIns="25400" rIns="25400" bIns="25400" rtlCol="0" anchor="t">
+            <a:normAutofit/>
+          </a:bodyPr>
+          <a:lstStyle/>
+          <a:p>
+            <a:pPr algn="l" indent="0" marL="0">
+              <a:lnSpc>
+                <a:spcPct val="132857"/>
+              </a:lnSpc>
+              <a:buNone/>
+            </a:pPr>
+            <a:r>
+              <a:rPr lang="en-US" sz="1800" dirty="0">
+                <a:solidFill>
+                  <a:srgbClr val="645C50"/>
+                </a:solidFill>
+                <a:latin typeface="Arial" pitchFamily="34" charset="0"/>
+                <a:ea typeface="Arial" pitchFamily="34" charset="-122"/>
+                <a:cs typeface="Arial" pitchFamily="34" charset="-120"/>
+              </a:rPr>
+              <a:t>Acceso externo</a:t>
+            </a:r>
             <a:endParaRPr lang="en-US" sz="1800" dirty="0"/>
-          </a:p>
-        </p:txBody>
-      </p:sp>
-      <p:sp>
-        <p:nvSpPr>
-          <p:cNvPr id="20" name="Shape 18"/>
-          <p:cNvSpPr/>
-          <p:nvPr/>
-        </p:nvSpPr>
-        <p:spPr>
-          <a:xfrm>
-            <a:off x="952500" y="9024491"/>
-            <a:ext cx="1485156" cy="500509"/>
-          </a:xfrm>
-          <a:prstGeom prst="roundRect">
-            <a:avLst>
-              <a:gd name="adj" fmla="val 50000"/>
-            </a:avLst>
-          </a:prstGeom>
-          <a:solidFill>
-            <a:srgbClr val="F9F4ED"/>
-          </a:solidFill>
-          <a:ln/>
-        </p:spPr>
-      </p:sp>
-      <p:sp>
-        <p:nvSpPr>
-          <p:cNvPr id="21" name="Text 19"/>
-          <p:cNvSpPr/>
-          <p:nvPr/>
-        </p:nvSpPr>
-        <p:spPr>
-          <a:xfrm>
-            <a:off x="1143000" y="9119741"/>
-            <a:ext cx="1180356" cy="348109"/>
-          </a:xfrm>
-          <a:prstGeom prst="rect">
-            <a:avLst/>
-          </a:prstGeom>
-          <a:noFill/>
-          <a:ln/>
-        </p:spPr>
-        <p:txBody>
-          <a:bodyPr wrap="square" lIns="25400" tIns="25400" rIns="25400" bIns="25400" rtlCol="0" anchor="ctr">
-            <a:normAutofit/>
-          </a:bodyPr>
-          <a:lstStyle/>
-          <a:p>
-            <a:pPr algn="l" indent="0" marL="0">
-              <a:lnSpc>
-                <a:spcPct val="135625"/>
-              </a:lnSpc>
-              <a:buNone/>
-            </a:pPr>
-            <a:r>
-              <a:rPr lang="en-US" sz="1575" spc="32" kern="0" dirty="0">
-                <a:solidFill>
-                  <a:srgbClr val="474238"/>
-                </a:solidFill>
-                <a:latin typeface="Arial" pitchFamily="34" charset="0"/>
-                <a:ea typeface="Arial" pitchFamily="34" charset="-122"/>
-                <a:cs typeface="Arial" pitchFamily="34" charset="-120"/>
-              </a:rPr>
-              <a:t>Núcleo SRS</a:t>
-            </a:r>
-            <a:endParaRPr lang="en-US" sz="1575" dirty="0"/>
-          </a:p>
-        </p:txBody>
-      </p:sp>
-      <p:sp>
-        <p:nvSpPr>
-          <p:cNvPr id="22" name="Shape 20"/>
-          <p:cNvSpPr/>
-          <p:nvPr/>
-        </p:nvSpPr>
-        <p:spPr>
-          <a:xfrm>
-            <a:off x="2704356" y="9024491"/>
-            <a:ext cx="2474119" cy="500509"/>
-          </a:xfrm>
-          <a:prstGeom prst="roundRect">
-            <a:avLst>
-              <a:gd name="adj" fmla="val 50000"/>
-            </a:avLst>
-          </a:prstGeom>
-          <a:solidFill>
-            <a:srgbClr val="FFF2EB"/>
-          </a:solidFill>
-          <a:ln/>
-        </p:spPr>
-      </p:sp>
-      <p:sp>
-        <p:nvSpPr>
-          <p:cNvPr id="23" name="Text 21"/>
-          <p:cNvSpPr/>
-          <p:nvPr/>
-        </p:nvSpPr>
-        <p:spPr>
-          <a:xfrm>
-            <a:off x="2894856" y="9119741"/>
-            <a:ext cx="2169319" cy="348109"/>
-          </a:xfrm>
-          <a:prstGeom prst="rect">
-            <a:avLst/>
-          </a:prstGeom>
-          <a:noFill/>
-          <a:ln/>
-        </p:spPr>
-        <p:txBody>
-          <a:bodyPr wrap="square" lIns="25400" tIns="25400" rIns="25400" bIns="25400" rtlCol="0" anchor="ctr">
-            <a:normAutofit/>
-          </a:bodyPr>
-          <a:lstStyle/>
-          <a:p>
-            <a:pPr algn="l" indent="0" marL="0">
-              <a:lnSpc>
-                <a:spcPct val="135625"/>
-              </a:lnSpc>
-              <a:buNone/>
-            </a:pPr>
-            <a:r>
-              <a:rPr lang="en-US" sz="1575" spc="32" kern="0" dirty="0">
-                <a:solidFill>
-                  <a:srgbClr val="643312"/>
-                </a:solidFill>
-                <a:latin typeface="Arial" pitchFamily="34" charset="0"/>
-                <a:ea typeface="Arial" pitchFamily="34" charset="-122"/>
-                <a:cs typeface="Arial" pitchFamily="34" charset="-120"/>
-              </a:rPr>
-              <a:t>Ampliación de alcance</a:t>
-            </a:r>
-            <a:endParaRPr lang="en-US" sz="1575" dirty="0"/>
           </a:p>
         </p:txBody>
       </p:sp>
@@ -6862,7 +6972,7 @@
         <p:spPr>
           <a:xfrm>
             <a:off x="1295400" y="7065764"/>
-            <a:ext cx="10042193" cy="392311"/>
+            <a:ext cx="9832806" cy="392311"/>
           </a:xfrm>
           <a:prstGeom prst="rect">
             <a:avLst/>
@@ -6891,7 +7001,7 @@
                 <a:ea typeface="Arial" pitchFamily="34" charset="-122"/>
                 <a:cs typeface="Arial" pitchFamily="34" charset="-120"/>
               </a:rPr>
-              <a:t>Las siete fases del rediseño y ampliación del sistema quedaron completadas y verificadas.</a:t>
+              <a:t>Las cinco fases del desarrollo de los ocho módulos quedaron completadas y verificadas.</a:t>
             </a:r>
             <a:endParaRPr lang="en-US" sz="1800" dirty="0"/>
           </a:p>
@@ -8352,7 +8462,7 @@
                 <a:ea typeface="Arial" pitchFamily="34" charset="-122"/>
                 <a:cs typeface="Arial" pitchFamily="34" charset="-120"/>
               </a:rPr>
-              <a:t>Cinco módulos funcionales para el ciclo completo de atención</a:t>
+              <a:t>Ocho módulos funcionales, especificados en el SRS desde el inicio</a:t>
             </a:r>
             <a:endParaRPr lang="en-US" sz="5100" dirty="0"/>
           </a:p>
@@ -8367,11 +8477,11 @@
         <p:spPr>
           <a:xfrm>
             <a:off x="952500" y="3339554"/>
-            <a:ext cx="3078361" cy="3439269"/>
+            <a:ext cx="3924300" cy="2978348"/>
           </a:xfrm>
           <a:prstGeom prst="roundRect">
             <a:avLst>
-              <a:gd name="adj" fmla="val 8664"/>
+              <a:gd name="adj" fmla="val 8955"/>
             </a:avLst>
           </a:prstGeom>
           <a:solidFill>
@@ -8388,29 +8498,29 @@
         </p:nvSpPr>
         <p:spPr>
           <a:xfrm>
-            <a:off x="1200150" y="3663404"/>
-            <a:ext cx="2841367" cy="717203"/>
-          </a:xfrm>
-          <a:prstGeom prst="rect">
-            <a:avLst/>
-          </a:prstGeom>
-          <a:noFill/>
-          <a:ln/>
-        </p:spPr>
-        <p:txBody>
-          <a:bodyPr wrap="square" lIns="25400" tIns="25400" rIns="25400" bIns="25400" rtlCol="0" anchor="t">
-            <a:normAutofit/>
-          </a:bodyPr>
-          <a:lstStyle/>
-          <a:p>
-            <a:pPr algn="l" indent="0" marL="0">
-              <a:lnSpc>
-                <a:spcPct val="132037"/>
-              </a:lnSpc>
-              <a:buNone/>
-            </a:pPr>
-            <a:r>
-              <a:rPr lang="en-US" sz="3450" dirty="0">
+            <a:off x="1200150" y="3958233"/>
+            <a:ext cx="3771900" cy="628650"/>
+          </a:xfrm>
+          <a:prstGeom prst="rect">
+            <a:avLst/>
+          </a:prstGeom>
+          <a:noFill/>
+          <a:ln/>
+        </p:spPr>
+        <p:txBody>
+          <a:bodyPr wrap="square" lIns="25400" tIns="25400" rIns="25400" bIns="25400" rtlCol="0" anchor="t">
+            <a:normAutofit/>
+          </a:bodyPr>
+          <a:lstStyle/>
+          <a:p>
+            <a:pPr algn="l" indent="0" marL="0">
+              <a:lnSpc>
+                <a:spcPct val="137778"/>
+              </a:lnSpc>
+              <a:buNone/>
+            </a:pPr>
+            <a:r>
+              <a:rPr lang="en-US" sz="3000" dirty="0">
                 <a:solidFill>
                   <a:srgbClr val="C67139"/>
                 </a:solidFill>
@@ -8420,7 +8530,7 @@
               </a:rPr>
               <a:t>01</a:t>
             </a:r>
-            <a:endParaRPr lang="en-US" sz="3450" dirty="0"/>
+            <a:endParaRPr lang="en-US" sz="3000" dirty="0"/>
           </a:p>
         </p:txBody>
       </p:sp>
@@ -8432,29 +8542,29 @@
         </p:nvSpPr>
         <p:spPr>
           <a:xfrm>
-            <a:off x="1200150" y="4513957"/>
-            <a:ext cx="2660553" cy="592634"/>
-          </a:xfrm>
-          <a:prstGeom prst="rect">
-            <a:avLst/>
-          </a:prstGeom>
-          <a:noFill/>
-          <a:ln/>
-        </p:spPr>
-        <p:txBody>
-          <a:bodyPr wrap="square" lIns="25400" tIns="25400" rIns="25400" bIns="25400" rtlCol="0" anchor="t">
-            <a:normAutofit/>
-          </a:bodyPr>
-          <a:lstStyle/>
-          <a:p>
-            <a:pPr algn="l" indent="0" marL="0">
-              <a:lnSpc>
-                <a:spcPct val="93935"/>
-              </a:lnSpc>
-              <a:buNone/>
-            </a:pPr>
-            <a:r>
-              <a:rPr lang="en-US" sz="1950" spc="-29" kern="0" dirty="0">
+            <a:off x="1200150" y="4682133"/>
+            <a:ext cx="3771900" cy="304800"/>
+          </a:xfrm>
+          <a:prstGeom prst="rect">
+            <a:avLst/>
+          </a:prstGeom>
+          <a:noFill/>
+          <a:ln/>
+        </p:spPr>
+        <p:txBody>
+          <a:bodyPr wrap="square" lIns="25400" tIns="25400" rIns="25400" bIns="25400" rtlCol="0" anchor="t">
+            <a:normAutofit/>
+          </a:bodyPr>
+          <a:lstStyle/>
+          <a:p>
+            <a:pPr algn="l" indent="0" marL="0">
+              <a:lnSpc>
+                <a:spcPct val="96552"/>
+              </a:lnSpc>
+              <a:buNone/>
+            </a:pPr>
+            <a:r>
+              <a:rPr lang="en-US" sz="1875" spc="-28" kern="0" dirty="0">
                 <a:solidFill>
                   <a:srgbClr val="201E1D"/>
                 </a:solidFill>
@@ -8464,7 +8574,7 @@
               </a:rPr>
               <a:t>Pacientes y Propietarios</a:t>
             </a:r>
-            <a:endParaRPr lang="en-US" sz="1950" dirty="0"/>
+            <a:endParaRPr lang="en-US" sz="1875" dirty="0"/>
           </a:p>
         </p:txBody>
       </p:sp>
@@ -8476,29 +8586,29 @@
         </p:nvSpPr>
         <p:spPr>
           <a:xfrm>
-            <a:off x="1200150" y="5239941"/>
-            <a:ext cx="2660553" cy="949375"/>
-          </a:xfrm>
-          <a:prstGeom prst="rect">
-            <a:avLst/>
-          </a:prstGeom>
-          <a:noFill/>
-          <a:ln/>
-        </p:spPr>
-        <p:txBody>
-          <a:bodyPr wrap="square" lIns="25400" tIns="25400" rIns="25400" bIns="25400" rtlCol="0" anchor="t">
-            <a:normAutofit/>
-          </a:bodyPr>
-          <a:lstStyle/>
-          <a:p>
-            <a:pPr algn="l" indent="0" marL="0">
-              <a:lnSpc>
-                <a:spcPct val="122692"/>
-              </a:lnSpc>
-              <a:buNone/>
-            </a:pPr>
-            <a:r>
-              <a:rPr lang="en-US" sz="1650" dirty="0">
+            <a:off x="1200150" y="5082183"/>
+            <a:ext cx="3531870" cy="655141"/>
+          </a:xfrm>
+          <a:prstGeom prst="rect">
+            <a:avLst/>
+          </a:prstGeom>
+          <a:noFill/>
+          <a:ln/>
+        </p:spPr>
+        <p:txBody>
+          <a:bodyPr wrap="square" lIns="25400" tIns="25400" rIns="25400" bIns="25400" rtlCol="0" anchor="t">
+            <a:normAutofit/>
+          </a:bodyPr>
+          <a:lstStyle/>
+          <a:p>
+            <a:pPr algn="l" indent="0" marL="0">
+              <a:lnSpc>
+                <a:spcPct val="115714"/>
+              </a:lnSpc>
+              <a:buNone/>
+            </a:pPr>
+            <a:r>
+              <a:rPr lang="en-US" sz="1800" dirty="0">
                 <a:solidFill>
                   <a:srgbClr val="645C50"/>
                 </a:solidFill>
@@ -8506,9 +8616,9 @@
                 <a:ea typeface="Arial" pitchFamily="34" charset="-122"/>
                 <a:cs typeface="Arial" pitchFamily="34" charset="-120"/>
               </a:rPr>
-              <a:t>Registro, consulta y actualización de mascotas y dueños.</a:t>
-            </a:r>
-            <a:endParaRPr lang="en-US" sz="1650" dirty="0"/>
+              <a:t>Registro y consulta de mascotas y dueños.</a:t>
+            </a:r>
+            <a:endParaRPr lang="en-US" sz="1800" dirty="0"/>
           </a:p>
         </p:txBody>
       </p:sp>
@@ -8520,12 +8630,12 @@
         </p:nvSpPr>
         <p:spPr>
           <a:xfrm>
-            <a:off x="4278511" y="3339554"/>
-            <a:ext cx="3078510" cy="3439269"/>
+            <a:off x="5105400" y="3339554"/>
+            <a:ext cx="3924300" cy="2978348"/>
           </a:xfrm>
           <a:prstGeom prst="roundRect">
             <a:avLst>
-              <a:gd name="adj" fmla="val 8663"/>
+              <a:gd name="adj" fmla="val 8955"/>
             </a:avLst>
           </a:prstGeom>
           <a:solidFill>
@@ -8542,29 +8652,29 @@
         </p:nvSpPr>
         <p:spPr>
           <a:xfrm>
-            <a:off x="4526161" y="3663404"/>
-            <a:ext cx="2841531" cy="717203"/>
-          </a:xfrm>
-          <a:prstGeom prst="rect">
-            <a:avLst/>
-          </a:prstGeom>
-          <a:noFill/>
-          <a:ln/>
-        </p:spPr>
-        <p:txBody>
-          <a:bodyPr wrap="square" lIns="25400" tIns="25400" rIns="25400" bIns="25400" rtlCol="0" anchor="t">
-            <a:normAutofit/>
-          </a:bodyPr>
-          <a:lstStyle/>
-          <a:p>
-            <a:pPr algn="l" indent="0" marL="0">
-              <a:lnSpc>
-                <a:spcPct val="132037"/>
-              </a:lnSpc>
-              <a:buNone/>
-            </a:pPr>
-            <a:r>
-              <a:rPr lang="en-US" sz="3450" dirty="0">
+            <a:off x="5353050" y="3958233"/>
+            <a:ext cx="3771900" cy="628650"/>
+          </a:xfrm>
+          <a:prstGeom prst="rect">
+            <a:avLst/>
+          </a:prstGeom>
+          <a:noFill/>
+          <a:ln/>
+        </p:spPr>
+        <p:txBody>
+          <a:bodyPr wrap="square" lIns="25400" tIns="25400" rIns="25400" bIns="25400" rtlCol="0" anchor="t">
+            <a:normAutofit/>
+          </a:bodyPr>
+          <a:lstStyle/>
+          <a:p>
+            <a:pPr algn="l" indent="0" marL="0">
+              <a:lnSpc>
+                <a:spcPct val="137778"/>
+              </a:lnSpc>
+              <a:buNone/>
+            </a:pPr>
+            <a:r>
+              <a:rPr lang="en-US" sz="3000" dirty="0">
                 <a:solidFill>
                   <a:srgbClr val="C67139"/>
                 </a:solidFill>
@@ -8574,7 +8684,7 @@
               </a:rPr>
               <a:t>02</a:t>
             </a:r>
-            <a:endParaRPr lang="en-US" sz="3450" dirty="0"/>
+            <a:endParaRPr lang="en-US" sz="3000" dirty="0"/>
           </a:p>
         </p:txBody>
       </p:sp>
@@ -8586,29 +8696,29 @@
         </p:nvSpPr>
         <p:spPr>
           <a:xfrm>
-            <a:off x="4526161" y="4513957"/>
-            <a:ext cx="2841531" cy="315367"/>
-          </a:xfrm>
-          <a:prstGeom prst="rect">
-            <a:avLst/>
-          </a:prstGeom>
-          <a:noFill/>
-          <a:ln/>
-        </p:spPr>
-        <p:txBody>
-          <a:bodyPr wrap="square" lIns="25400" tIns="25400" rIns="25400" bIns="25400" rtlCol="0" anchor="t">
-            <a:normAutofit/>
-          </a:bodyPr>
-          <a:lstStyle/>
-          <a:p>
-            <a:pPr algn="l" indent="0" marL="0">
-              <a:lnSpc>
-                <a:spcPct val="93935"/>
-              </a:lnSpc>
-              <a:buNone/>
-            </a:pPr>
-            <a:r>
-              <a:rPr lang="en-US" sz="1950" spc="-29" kern="0" dirty="0">
+            <a:off x="5353050" y="4682133"/>
+            <a:ext cx="3771900" cy="304800"/>
+          </a:xfrm>
+          <a:prstGeom prst="rect">
+            <a:avLst/>
+          </a:prstGeom>
+          <a:noFill/>
+          <a:ln/>
+        </p:spPr>
+        <p:txBody>
+          <a:bodyPr wrap="square" lIns="25400" tIns="25400" rIns="25400" bIns="25400" rtlCol="0" anchor="t">
+            <a:normAutofit/>
+          </a:bodyPr>
+          <a:lstStyle/>
+          <a:p>
+            <a:pPr algn="l" indent="0" marL="0">
+              <a:lnSpc>
+                <a:spcPct val="96552"/>
+              </a:lnSpc>
+              <a:buNone/>
+            </a:pPr>
+            <a:r>
+              <a:rPr lang="en-US" sz="1875" spc="-28" kern="0" dirty="0">
                 <a:solidFill>
                   <a:srgbClr val="201E1D"/>
                 </a:solidFill>
@@ -8618,7 +8728,7 @@
               </a:rPr>
               <a:t>Agenda y Citas</a:t>
             </a:r>
-            <a:endParaRPr lang="en-US" sz="1950" dirty="0"/>
+            <a:endParaRPr lang="en-US" sz="1875" dirty="0"/>
           </a:p>
         </p:txBody>
       </p:sp>
@@ -8630,29 +8740,29 @@
         </p:nvSpPr>
         <p:spPr>
           <a:xfrm>
-            <a:off x="4526161" y="4962674"/>
-            <a:ext cx="2660706" cy="1253133"/>
-          </a:xfrm>
-          <a:prstGeom prst="rect">
-            <a:avLst/>
-          </a:prstGeom>
-          <a:noFill/>
-          <a:ln/>
-        </p:spPr>
-        <p:txBody>
-          <a:bodyPr wrap="square" lIns="25400" tIns="25400" rIns="25400" bIns="25400" rtlCol="0" anchor="t">
-            <a:normAutofit/>
-          </a:bodyPr>
-          <a:lstStyle/>
-          <a:p>
-            <a:pPr algn="l" indent="0" marL="0">
-              <a:lnSpc>
-                <a:spcPct val="122692"/>
-              </a:lnSpc>
-              <a:buNone/>
-            </a:pPr>
-            <a:r>
-              <a:rPr lang="en-US" sz="1650" dirty="0">
+            <a:off x="5353050" y="5082183"/>
+            <a:ext cx="3531870" cy="655141"/>
+          </a:xfrm>
+          <a:prstGeom prst="rect">
+            <a:avLst/>
+          </a:prstGeom>
+          <a:noFill/>
+          <a:ln/>
+        </p:spPr>
+        <p:txBody>
+          <a:bodyPr wrap="square" lIns="25400" tIns="25400" rIns="25400" bIns="25400" rtlCol="0" anchor="t">
+            <a:normAutofit/>
+          </a:bodyPr>
+          <a:lstStyle/>
+          <a:p>
+            <a:pPr algn="l" indent="0" marL="0">
+              <a:lnSpc>
+                <a:spcPct val="115714"/>
+              </a:lnSpc>
+              <a:buNone/>
+            </a:pPr>
+            <a:r>
+              <a:rPr lang="en-US" sz="1800" dirty="0">
                 <a:solidFill>
                   <a:srgbClr val="645C50"/>
                 </a:solidFill>
@@ -8660,9 +8770,9 @@
                 <a:ea typeface="Arial" pitchFamily="34" charset="-122"/>
                 <a:cs typeface="Arial" pitchFamily="34" charset="-120"/>
               </a:rPr>
-              <a:t>Programación, modificación y cancelación con verificación de disponibilidad.</a:t>
-            </a:r>
-            <a:endParaRPr lang="en-US" sz="1650" dirty="0"/>
+              <a:t>Programación con verificación de disponibilidad.</a:t>
+            </a:r>
+            <a:endParaRPr lang="en-US" sz="1800" dirty="0"/>
           </a:p>
         </p:txBody>
       </p:sp>
@@ -8674,12 +8784,12 @@
         </p:nvSpPr>
         <p:spPr>
           <a:xfrm>
-            <a:off x="7604671" y="3339554"/>
-            <a:ext cx="3078510" cy="3439269"/>
+            <a:off x="9258300" y="3339554"/>
+            <a:ext cx="3924300" cy="2978348"/>
           </a:xfrm>
           <a:prstGeom prst="roundRect">
             <a:avLst>
-              <a:gd name="adj" fmla="val 8663"/>
+              <a:gd name="adj" fmla="val 8955"/>
             </a:avLst>
           </a:prstGeom>
           <a:solidFill>
@@ -8696,29 +8806,29 @@
         </p:nvSpPr>
         <p:spPr>
           <a:xfrm>
-            <a:off x="7852321" y="3663404"/>
-            <a:ext cx="2841531" cy="717203"/>
-          </a:xfrm>
-          <a:prstGeom prst="rect">
-            <a:avLst/>
-          </a:prstGeom>
-          <a:noFill/>
-          <a:ln/>
-        </p:spPr>
-        <p:txBody>
-          <a:bodyPr wrap="square" lIns="25400" tIns="25400" rIns="25400" bIns="25400" rtlCol="0" anchor="t">
-            <a:normAutofit/>
-          </a:bodyPr>
-          <a:lstStyle/>
-          <a:p>
-            <a:pPr algn="l" indent="0" marL="0">
-              <a:lnSpc>
-                <a:spcPct val="132037"/>
-              </a:lnSpc>
-              <a:buNone/>
-            </a:pPr>
-            <a:r>
-              <a:rPr lang="en-US" sz="3450" dirty="0">
+            <a:off x="9505950" y="3958233"/>
+            <a:ext cx="3771900" cy="628650"/>
+          </a:xfrm>
+          <a:prstGeom prst="rect">
+            <a:avLst/>
+          </a:prstGeom>
+          <a:noFill/>
+          <a:ln/>
+        </p:spPr>
+        <p:txBody>
+          <a:bodyPr wrap="square" lIns="25400" tIns="25400" rIns="25400" bIns="25400" rtlCol="0" anchor="t">
+            <a:normAutofit/>
+          </a:bodyPr>
+          <a:lstStyle/>
+          <a:p>
+            <a:pPr algn="l" indent="0" marL="0">
+              <a:lnSpc>
+                <a:spcPct val="137778"/>
+              </a:lnSpc>
+              <a:buNone/>
+            </a:pPr>
+            <a:r>
+              <a:rPr lang="en-US" sz="3000" dirty="0">
                 <a:solidFill>
                   <a:srgbClr val="C67139"/>
                 </a:solidFill>
@@ -8728,7 +8838,7 @@
               </a:rPr>
               <a:t>03</a:t>
             </a:r>
-            <a:endParaRPr lang="en-US" sz="3450" dirty="0"/>
+            <a:endParaRPr lang="en-US" sz="3000" dirty="0"/>
           </a:p>
         </p:txBody>
       </p:sp>
@@ -8740,29 +8850,29 @@
         </p:nvSpPr>
         <p:spPr>
           <a:xfrm>
-            <a:off x="7852321" y="4513957"/>
-            <a:ext cx="2841531" cy="315367"/>
-          </a:xfrm>
-          <a:prstGeom prst="rect">
-            <a:avLst/>
-          </a:prstGeom>
-          <a:noFill/>
-          <a:ln/>
-        </p:spPr>
-        <p:txBody>
-          <a:bodyPr wrap="square" lIns="25400" tIns="25400" rIns="25400" bIns="25400" rtlCol="0" anchor="t">
-            <a:normAutofit/>
-          </a:bodyPr>
-          <a:lstStyle/>
-          <a:p>
-            <a:pPr algn="l" indent="0" marL="0">
-              <a:lnSpc>
-                <a:spcPct val="93935"/>
-              </a:lnSpc>
-              <a:buNone/>
-            </a:pPr>
-            <a:r>
-              <a:rPr lang="en-US" sz="1950" spc="-29" kern="0" dirty="0">
+            <a:off x="9505950" y="4682133"/>
+            <a:ext cx="3771900" cy="304800"/>
+          </a:xfrm>
+          <a:prstGeom prst="rect">
+            <a:avLst/>
+          </a:prstGeom>
+          <a:noFill/>
+          <a:ln/>
+        </p:spPr>
+        <p:txBody>
+          <a:bodyPr wrap="square" lIns="25400" tIns="25400" rIns="25400" bIns="25400" rtlCol="0" anchor="t">
+            <a:normAutofit/>
+          </a:bodyPr>
+          <a:lstStyle/>
+          <a:p>
+            <a:pPr algn="l" indent="0" marL="0">
+              <a:lnSpc>
+                <a:spcPct val="96552"/>
+              </a:lnSpc>
+              <a:buNone/>
+            </a:pPr>
+            <a:r>
+              <a:rPr lang="en-US" sz="1875" spc="-28" kern="0" dirty="0">
                 <a:solidFill>
                   <a:srgbClr val="201E1D"/>
                 </a:solidFill>
@@ -8772,7 +8882,7 @@
               </a:rPr>
               <a:t>Historial Clínico</a:t>
             </a:r>
-            <a:endParaRPr lang="en-US" sz="1950" dirty="0"/>
+            <a:endParaRPr lang="en-US" sz="1875" dirty="0"/>
           </a:p>
         </p:txBody>
       </p:sp>
@@ -8784,29 +8894,29 @@
         </p:nvSpPr>
         <p:spPr>
           <a:xfrm>
-            <a:off x="7852321" y="4962674"/>
-            <a:ext cx="2660706" cy="949375"/>
-          </a:xfrm>
-          <a:prstGeom prst="rect">
-            <a:avLst/>
-          </a:prstGeom>
-          <a:noFill/>
-          <a:ln/>
-        </p:spPr>
-        <p:txBody>
-          <a:bodyPr wrap="square" lIns="25400" tIns="25400" rIns="25400" bIns="25400" rtlCol="0" anchor="t">
-            <a:normAutofit/>
-          </a:bodyPr>
-          <a:lstStyle/>
-          <a:p>
-            <a:pPr algn="l" indent="0" marL="0">
-              <a:lnSpc>
-                <a:spcPct val="122692"/>
-              </a:lnSpc>
-              <a:buNone/>
-            </a:pPr>
-            <a:r>
-              <a:rPr lang="en-US" sz="1650" dirty="0">
+            <a:off x="9505950" y="5082183"/>
+            <a:ext cx="3531870" cy="655141"/>
+          </a:xfrm>
+          <a:prstGeom prst="rect">
+            <a:avLst/>
+          </a:prstGeom>
+          <a:noFill/>
+          <a:ln/>
+        </p:spPr>
+        <p:txBody>
+          <a:bodyPr wrap="square" lIns="25400" tIns="25400" rIns="25400" bIns="25400" rtlCol="0" anchor="t">
+            <a:normAutofit/>
+          </a:bodyPr>
+          <a:lstStyle/>
+          <a:p>
+            <a:pPr algn="l" indent="0" marL="0">
+              <a:lnSpc>
+                <a:spcPct val="115714"/>
+              </a:lnSpc>
+              <a:buNone/>
+            </a:pPr>
+            <a:r>
+              <a:rPr lang="en-US" sz="1800" dirty="0">
                 <a:solidFill>
                   <a:srgbClr val="645C50"/>
                 </a:solidFill>
@@ -8814,9 +8924,9 @@
                 <a:ea typeface="Arial" pitchFamily="34" charset="-122"/>
                 <a:cs typeface="Arial" pitchFamily="34" charset="-120"/>
               </a:rPr>
-              <a:t>Consultas, diagnósticos, tratamientos, vacunas y exámenes por paciente.</a:t>
-            </a:r>
-            <a:endParaRPr lang="en-US" sz="1650" dirty="0"/>
+              <a:t>Consultas, diagnósticos y vacunas.</a:t>
+            </a:r>
+            <a:endParaRPr lang="en-US" sz="1800" dirty="0"/>
           </a:p>
         </p:txBody>
       </p:sp>
@@ -8828,12 +8938,12 @@
         </p:nvSpPr>
         <p:spPr>
           <a:xfrm>
-            <a:off x="10930830" y="3339554"/>
-            <a:ext cx="3078510" cy="3439269"/>
+            <a:off x="13411200" y="3339554"/>
+            <a:ext cx="3924300" cy="2978348"/>
           </a:xfrm>
           <a:prstGeom prst="roundRect">
             <a:avLst>
-              <a:gd name="adj" fmla="val 8663"/>
+              <a:gd name="adj" fmla="val 8955"/>
             </a:avLst>
           </a:prstGeom>
           <a:solidFill>
@@ -8850,29 +8960,29 @@
         </p:nvSpPr>
         <p:spPr>
           <a:xfrm>
-            <a:off x="11178480" y="3663404"/>
-            <a:ext cx="2841531" cy="717203"/>
-          </a:xfrm>
-          <a:prstGeom prst="rect">
-            <a:avLst/>
-          </a:prstGeom>
-          <a:noFill/>
-          <a:ln/>
-        </p:spPr>
-        <p:txBody>
-          <a:bodyPr wrap="square" lIns="25400" tIns="25400" rIns="25400" bIns="25400" rtlCol="0" anchor="t">
-            <a:normAutofit/>
-          </a:bodyPr>
-          <a:lstStyle/>
-          <a:p>
-            <a:pPr algn="l" indent="0" marL="0">
-              <a:lnSpc>
-                <a:spcPct val="132037"/>
-              </a:lnSpc>
-              <a:buNone/>
-            </a:pPr>
-            <a:r>
-              <a:rPr lang="en-US" sz="3450" dirty="0">
+            <a:off x="13658850" y="3958233"/>
+            <a:ext cx="3771900" cy="628650"/>
+          </a:xfrm>
+          <a:prstGeom prst="rect">
+            <a:avLst/>
+          </a:prstGeom>
+          <a:noFill/>
+          <a:ln/>
+        </p:spPr>
+        <p:txBody>
+          <a:bodyPr wrap="square" lIns="25400" tIns="25400" rIns="25400" bIns="25400" rtlCol="0" anchor="t">
+            <a:normAutofit/>
+          </a:bodyPr>
+          <a:lstStyle/>
+          <a:p>
+            <a:pPr algn="l" indent="0" marL="0">
+              <a:lnSpc>
+                <a:spcPct val="137778"/>
+              </a:lnSpc>
+              <a:buNone/>
+            </a:pPr>
+            <a:r>
+              <a:rPr lang="en-US" sz="3000" dirty="0">
                 <a:solidFill>
                   <a:srgbClr val="C67139"/>
                 </a:solidFill>
@@ -8882,7 +8992,7 @@
               </a:rPr>
               <a:t>04</a:t>
             </a:r>
-            <a:endParaRPr lang="en-US" sz="3450" dirty="0"/>
+            <a:endParaRPr lang="en-US" sz="3000" dirty="0"/>
           </a:p>
         </p:txBody>
       </p:sp>
@@ -8894,29 +9004,29 @@
         </p:nvSpPr>
         <p:spPr>
           <a:xfrm>
-            <a:off x="11178480" y="4513957"/>
-            <a:ext cx="2660706" cy="592634"/>
-          </a:xfrm>
-          <a:prstGeom prst="rect">
-            <a:avLst/>
-          </a:prstGeom>
-          <a:noFill/>
-          <a:ln/>
-        </p:spPr>
-        <p:txBody>
-          <a:bodyPr wrap="square" lIns="25400" tIns="25400" rIns="25400" bIns="25400" rtlCol="0" anchor="t">
-            <a:normAutofit/>
-          </a:bodyPr>
-          <a:lstStyle/>
-          <a:p>
-            <a:pPr algn="l" indent="0" marL="0">
-              <a:lnSpc>
-                <a:spcPct val="93935"/>
-              </a:lnSpc>
-              <a:buNone/>
-            </a:pPr>
-            <a:r>
-              <a:rPr lang="en-US" sz="1950" spc="-29" kern="0" dirty="0">
+            <a:off x="13658850" y="4682133"/>
+            <a:ext cx="3771900" cy="304800"/>
+          </a:xfrm>
+          <a:prstGeom prst="rect">
+            <a:avLst/>
+          </a:prstGeom>
+          <a:noFill/>
+          <a:ln/>
+        </p:spPr>
+        <p:txBody>
+          <a:bodyPr wrap="square" lIns="25400" tIns="25400" rIns="25400" bIns="25400" rtlCol="0" anchor="t">
+            <a:normAutofit/>
+          </a:bodyPr>
+          <a:lstStyle/>
+          <a:p>
+            <a:pPr algn="l" indent="0" marL="0">
+              <a:lnSpc>
+                <a:spcPct val="96552"/>
+              </a:lnSpc>
+              <a:buNone/>
+            </a:pPr>
+            <a:r>
+              <a:rPr lang="en-US" sz="1875" spc="-28" kern="0" dirty="0">
                 <a:solidFill>
                   <a:srgbClr val="201E1D"/>
                 </a:solidFill>
@@ -8926,7 +9036,7 @@
               </a:rPr>
               <a:t>Inventario y Medicamentos</a:t>
             </a:r>
-            <a:endParaRPr lang="en-US" sz="1950" dirty="0"/>
+            <a:endParaRPr lang="en-US" sz="1875" dirty="0"/>
           </a:p>
         </p:txBody>
       </p:sp>
@@ -8938,29 +9048,29 @@
         </p:nvSpPr>
         <p:spPr>
           <a:xfrm>
-            <a:off x="11178480" y="5239941"/>
-            <a:ext cx="2660706" cy="1253133"/>
-          </a:xfrm>
-          <a:prstGeom prst="rect">
-            <a:avLst/>
-          </a:prstGeom>
-          <a:noFill/>
-          <a:ln/>
-        </p:spPr>
-        <p:txBody>
-          <a:bodyPr wrap="square" lIns="25400" tIns="25400" rIns="25400" bIns="25400" rtlCol="0" anchor="t">
-            <a:normAutofit/>
-          </a:bodyPr>
-          <a:lstStyle/>
-          <a:p>
-            <a:pPr algn="l" indent="0" marL="0">
-              <a:lnSpc>
-                <a:spcPct val="122692"/>
-              </a:lnSpc>
-              <a:buNone/>
-            </a:pPr>
-            <a:r>
-              <a:rPr lang="en-US" sz="1650" dirty="0">
+            <a:off x="13658850" y="5082183"/>
+            <a:ext cx="3531870" cy="655141"/>
+          </a:xfrm>
+          <a:prstGeom prst="rect">
+            <a:avLst/>
+          </a:prstGeom>
+          <a:noFill/>
+          <a:ln/>
+        </p:spPr>
+        <p:txBody>
+          <a:bodyPr wrap="square" lIns="25400" tIns="25400" rIns="25400" bIns="25400" rtlCol="0" anchor="t">
+            <a:normAutofit/>
+          </a:bodyPr>
+          <a:lstStyle/>
+          <a:p>
+            <a:pPr algn="l" indent="0" marL="0">
+              <a:lnSpc>
+                <a:spcPct val="115714"/>
+              </a:lnSpc>
+              <a:buNone/>
+            </a:pPr>
+            <a:r>
+              <a:rPr lang="en-US" sz="1800" dirty="0">
                 <a:solidFill>
                   <a:srgbClr val="645C50"/>
                 </a:solidFill>
@@ -8968,9 +9078,9 @@
                 <a:ea typeface="Arial" pitchFamily="34" charset="-122"/>
                 <a:cs typeface="Arial" pitchFamily="34" charset="-120"/>
               </a:rPr>
-              <a:t>Control de stock de medicamentos, insumos y vacunas con alertas de nivel mínimo.</a:t>
-            </a:r>
-            <a:endParaRPr lang="en-US" sz="1650" dirty="0"/>
+              <a:t>Stock con alertas de nivel mínimo.</a:t>
+            </a:r>
+            <a:endParaRPr lang="en-US" sz="1800" dirty="0"/>
           </a:p>
         </p:txBody>
       </p:sp>
@@ -8982,12 +9092,12 @@
         </p:nvSpPr>
         <p:spPr>
           <a:xfrm>
-            <a:off x="14256990" y="3339554"/>
-            <a:ext cx="3078510" cy="3439269"/>
+            <a:off x="952500" y="6546503"/>
+            <a:ext cx="3924300" cy="2978497"/>
           </a:xfrm>
           <a:prstGeom prst="roundRect">
             <a:avLst>
-              <a:gd name="adj" fmla="val 8663"/>
+              <a:gd name="adj" fmla="val 8954"/>
             </a:avLst>
           </a:prstGeom>
           <a:solidFill>
@@ -9004,29 +9114,29 @@
         </p:nvSpPr>
         <p:spPr>
           <a:xfrm>
-            <a:off x="14504640" y="3663404"/>
-            <a:ext cx="2841531" cy="717203"/>
-          </a:xfrm>
-          <a:prstGeom prst="rect">
-            <a:avLst/>
-          </a:prstGeom>
-          <a:noFill/>
-          <a:ln/>
-        </p:spPr>
-        <p:txBody>
-          <a:bodyPr wrap="square" lIns="25400" tIns="25400" rIns="25400" bIns="25400" rtlCol="0" anchor="t">
-            <a:normAutofit/>
-          </a:bodyPr>
-          <a:lstStyle/>
-          <a:p>
-            <a:pPr algn="l" indent="0" marL="0">
-              <a:lnSpc>
-                <a:spcPct val="132037"/>
-              </a:lnSpc>
-              <a:buNone/>
-            </a:pPr>
-            <a:r>
-              <a:rPr lang="en-US" sz="3450" dirty="0">
+            <a:off x="1200150" y="7165181"/>
+            <a:ext cx="3771900" cy="628650"/>
+          </a:xfrm>
+          <a:prstGeom prst="rect">
+            <a:avLst/>
+          </a:prstGeom>
+          <a:noFill/>
+          <a:ln/>
+        </p:spPr>
+        <p:txBody>
+          <a:bodyPr wrap="square" lIns="25400" tIns="25400" rIns="25400" bIns="25400" rtlCol="0" anchor="t">
+            <a:normAutofit/>
+          </a:bodyPr>
+          <a:lstStyle/>
+          <a:p>
+            <a:pPr algn="l" indent="0" marL="0">
+              <a:lnSpc>
+                <a:spcPct val="137778"/>
+              </a:lnSpc>
+              <a:buNone/>
+            </a:pPr>
+            <a:r>
+              <a:rPr lang="en-US" sz="3000" dirty="0">
                 <a:solidFill>
                   <a:srgbClr val="C67139"/>
                 </a:solidFill>
@@ -9036,7 +9146,7 @@
               </a:rPr>
               <a:t>05</a:t>
             </a:r>
-            <a:endParaRPr lang="en-US" sz="3450" dirty="0"/>
+            <a:endParaRPr lang="en-US" sz="3000" dirty="0"/>
           </a:p>
         </p:txBody>
       </p:sp>
@@ -9048,29 +9158,29 @@
         </p:nvSpPr>
         <p:spPr>
           <a:xfrm>
-            <a:off x="14504640" y="4513957"/>
-            <a:ext cx="2660706" cy="592634"/>
-          </a:xfrm>
-          <a:prstGeom prst="rect">
-            <a:avLst/>
-          </a:prstGeom>
-          <a:noFill/>
-          <a:ln/>
-        </p:spPr>
-        <p:txBody>
-          <a:bodyPr wrap="square" lIns="25400" tIns="25400" rIns="25400" bIns="25400" rtlCol="0" anchor="t">
-            <a:normAutofit/>
-          </a:bodyPr>
-          <a:lstStyle/>
-          <a:p>
-            <a:pPr algn="l" indent="0" marL="0">
-              <a:lnSpc>
-                <a:spcPct val="93935"/>
-              </a:lnSpc>
-              <a:buNone/>
-            </a:pPr>
-            <a:r>
-              <a:rPr lang="en-US" sz="1950" spc="-29" kern="0" dirty="0">
+            <a:off x="1200150" y="7889081"/>
+            <a:ext cx="3771900" cy="304800"/>
+          </a:xfrm>
+          <a:prstGeom prst="rect">
+            <a:avLst/>
+          </a:prstGeom>
+          <a:noFill/>
+          <a:ln/>
+        </p:spPr>
+        <p:txBody>
+          <a:bodyPr wrap="square" lIns="25400" tIns="25400" rIns="25400" bIns="25400" rtlCol="0" anchor="t">
+            <a:normAutofit/>
+          </a:bodyPr>
+          <a:lstStyle/>
+          <a:p>
+            <a:pPr algn="l" indent="0" marL="0">
+              <a:lnSpc>
+                <a:spcPct val="96552"/>
+              </a:lnSpc>
+              <a:buNone/>
+            </a:pPr>
+            <a:r>
+              <a:rPr lang="en-US" sz="1875" spc="-28" kern="0" dirty="0">
                 <a:solidFill>
                   <a:srgbClr val="201E1D"/>
                 </a:solidFill>
@@ -9080,7 +9190,7 @@
               </a:rPr>
               <a:t>Facturación y Reportes</a:t>
             </a:r>
-            <a:endParaRPr lang="en-US" sz="1950" dirty="0"/>
+            <a:endParaRPr lang="en-US" sz="1875" dirty="0"/>
           </a:p>
         </p:txBody>
       </p:sp>
@@ -9092,29 +9202,29 @@
         </p:nvSpPr>
         <p:spPr>
           <a:xfrm>
-            <a:off x="14504640" y="5239941"/>
-            <a:ext cx="2660706" cy="1253133"/>
-          </a:xfrm>
-          <a:prstGeom prst="rect">
-            <a:avLst/>
-          </a:prstGeom>
-          <a:noFill/>
-          <a:ln/>
-        </p:spPr>
-        <p:txBody>
-          <a:bodyPr wrap="square" lIns="25400" tIns="25400" rIns="25400" bIns="25400" rtlCol="0" anchor="t">
-            <a:normAutofit/>
-          </a:bodyPr>
-          <a:lstStyle/>
-          <a:p>
-            <a:pPr algn="l" indent="0" marL="0">
-              <a:lnSpc>
-                <a:spcPct val="122692"/>
-              </a:lnSpc>
-              <a:buNone/>
-            </a:pPr>
-            <a:r>
-              <a:rPr lang="en-US" sz="1650" dirty="0">
+            <a:off x="1200150" y="8289131"/>
+            <a:ext cx="3531870" cy="655141"/>
+          </a:xfrm>
+          <a:prstGeom prst="rect">
+            <a:avLst/>
+          </a:prstGeom>
+          <a:noFill/>
+          <a:ln/>
+        </p:spPr>
+        <p:txBody>
+          <a:bodyPr wrap="square" lIns="25400" tIns="25400" rIns="25400" bIns="25400" rtlCol="0" anchor="t">
+            <a:normAutofit/>
+          </a:bodyPr>
+          <a:lstStyle/>
+          <a:p>
+            <a:pPr algn="l" indent="0" marL="0">
+              <a:lnSpc>
+                <a:spcPct val="115714"/>
+              </a:lnSpc>
+              <a:buNone/>
+            </a:pPr>
+            <a:r>
+              <a:rPr lang="en-US" sz="1800" dirty="0">
                 <a:solidFill>
                   <a:srgbClr val="645C50"/>
                 </a:solidFill>
@@ -9122,9 +9232,471 @@
                 <a:ea typeface="Arial" pitchFamily="34" charset="-122"/>
                 <a:cs typeface="Arial" pitchFamily="34" charset="-120"/>
               </a:rPr>
-              <a:t>Generación de facturas, registro de pagos y reportes de ingresos por período.</a:t>
-            </a:r>
-            <a:endParaRPr lang="en-US" sz="1650" dirty="0"/>
+              <a:t>Facturas, pagos y reportes de ingresos.</a:t>
+            </a:r>
+            <a:endParaRPr lang="en-US" sz="1800" dirty="0"/>
+          </a:p>
+        </p:txBody>
+      </p:sp>
+      <p:sp>
+        <p:nvSpPr>
+          <p:cNvPr id="24" name="Shape 22"/>
+          <p:cNvSpPr/>
+          <p:nvPr/>
+        </p:nvSpPr>
+        <p:spPr>
+          <a:xfrm>
+            <a:off x="5105400" y="6546503"/>
+            <a:ext cx="3924300" cy="2978497"/>
+          </a:xfrm>
+          <a:prstGeom prst="roundRect">
+            <a:avLst>
+              <a:gd name="adj" fmla="val 8954"/>
+            </a:avLst>
+          </a:prstGeom>
+          <a:solidFill>
+            <a:srgbClr val="EBDDC5"/>
+          </a:solidFill>
+          <a:ln/>
+        </p:spPr>
+      </p:sp>
+      <p:sp>
+        <p:nvSpPr>
+          <p:cNvPr id="25" name="Text 23"/>
+          <p:cNvSpPr/>
+          <p:nvPr/>
+        </p:nvSpPr>
+        <p:spPr>
+          <a:xfrm>
+            <a:off x="5353050" y="7319516"/>
+            <a:ext cx="3771900" cy="628650"/>
+          </a:xfrm>
+          <a:prstGeom prst="rect">
+            <a:avLst/>
+          </a:prstGeom>
+          <a:noFill/>
+          <a:ln/>
+        </p:spPr>
+        <p:txBody>
+          <a:bodyPr wrap="square" lIns="25400" tIns="25400" rIns="25400" bIns="25400" rtlCol="0" anchor="t">
+            <a:normAutofit/>
+          </a:bodyPr>
+          <a:lstStyle/>
+          <a:p>
+            <a:pPr algn="l" indent="0" marL="0">
+              <a:lnSpc>
+                <a:spcPct val="137778"/>
+              </a:lnSpc>
+              <a:buNone/>
+            </a:pPr>
+            <a:r>
+              <a:rPr lang="en-US" sz="3000" dirty="0">
+                <a:solidFill>
+                  <a:srgbClr val="C67139"/>
+                </a:solidFill>
+                <a:latin typeface="Arial" pitchFamily="34" charset="0"/>
+                <a:ea typeface="Arial" pitchFamily="34" charset="-122"/>
+                <a:cs typeface="Arial" pitchFamily="34" charset="-120"/>
+              </a:rPr>
+              <a:t>06</a:t>
+            </a:r>
+            <a:endParaRPr lang="en-US" sz="3000" dirty="0"/>
+          </a:p>
+        </p:txBody>
+      </p:sp>
+      <p:sp>
+        <p:nvSpPr>
+          <p:cNvPr id="26" name="Text 24"/>
+          <p:cNvSpPr/>
+          <p:nvPr/>
+        </p:nvSpPr>
+        <p:spPr>
+          <a:xfrm>
+            <a:off x="5353050" y="8043416"/>
+            <a:ext cx="3771900" cy="304800"/>
+          </a:xfrm>
+          <a:prstGeom prst="rect">
+            <a:avLst/>
+          </a:prstGeom>
+          <a:noFill/>
+          <a:ln/>
+        </p:spPr>
+        <p:txBody>
+          <a:bodyPr wrap="square" lIns="25400" tIns="25400" rIns="25400" bIns="25400" rtlCol="0" anchor="t">
+            <a:normAutofit/>
+          </a:bodyPr>
+          <a:lstStyle/>
+          <a:p>
+            <a:pPr algn="l" indent="0" marL="0">
+              <a:lnSpc>
+                <a:spcPct val="96552"/>
+              </a:lnSpc>
+              <a:buNone/>
+            </a:pPr>
+            <a:r>
+              <a:rPr lang="en-US" sz="1875" spc="-28" kern="0" dirty="0">
+                <a:solidFill>
+                  <a:srgbClr val="201E1D"/>
+                </a:solidFill>
+                <a:latin typeface="Arial" pitchFamily="34" charset="0"/>
+                <a:ea typeface="Arial" pitchFamily="34" charset="-122"/>
+                <a:cs typeface="Arial" pitchFamily="34" charset="-120"/>
+              </a:rPr>
+              <a:t>Administración</a:t>
+            </a:r>
+            <a:endParaRPr lang="en-US" sz="1875" dirty="0"/>
+          </a:p>
+        </p:txBody>
+      </p:sp>
+      <p:sp>
+        <p:nvSpPr>
+          <p:cNvPr id="27" name="Text 25"/>
+          <p:cNvSpPr/>
+          <p:nvPr/>
+        </p:nvSpPr>
+        <p:spPr>
+          <a:xfrm>
+            <a:off x="5353050" y="8443466"/>
+            <a:ext cx="3771900" cy="346621"/>
+          </a:xfrm>
+          <a:prstGeom prst="rect">
+            <a:avLst/>
+          </a:prstGeom>
+          <a:noFill/>
+          <a:ln/>
+        </p:spPr>
+        <p:txBody>
+          <a:bodyPr wrap="square" lIns="25400" tIns="25400" rIns="25400" bIns="25400" rtlCol="0" anchor="t">
+            <a:normAutofit/>
+          </a:bodyPr>
+          <a:lstStyle/>
+          <a:p>
+            <a:pPr algn="l" indent="0" marL="0">
+              <a:lnSpc>
+                <a:spcPct val="115714"/>
+              </a:lnSpc>
+              <a:buNone/>
+            </a:pPr>
+            <a:r>
+              <a:rPr lang="en-US" sz="1800" dirty="0">
+                <a:solidFill>
+                  <a:srgbClr val="645C50"/>
+                </a:solidFill>
+                <a:latin typeface="Arial" pitchFamily="34" charset="0"/>
+                <a:ea typeface="Arial" pitchFamily="34" charset="-122"/>
+                <a:cs typeface="Arial" pitchFamily="34" charset="-120"/>
+              </a:rPr>
+              <a:t>Usuarios, roles y catálogos.</a:t>
+            </a:r>
+            <a:endParaRPr lang="en-US" sz="1800" dirty="0"/>
+          </a:p>
+        </p:txBody>
+      </p:sp>
+      <p:sp>
+        <p:nvSpPr>
+          <p:cNvPr id="28" name="Shape 26"/>
+          <p:cNvSpPr/>
+          <p:nvPr/>
+        </p:nvSpPr>
+        <p:spPr>
+          <a:xfrm>
+            <a:off x="9258300" y="6546503"/>
+            <a:ext cx="3924300" cy="2978497"/>
+          </a:xfrm>
+          <a:prstGeom prst="roundRect">
+            <a:avLst>
+              <a:gd name="adj" fmla="val 8954"/>
+            </a:avLst>
+          </a:prstGeom>
+          <a:solidFill>
+            <a:srgbClr val="EBDDC5"/>
+          </a:solidFill>
+          <a:ln/>
+        </p:spPr>
+      </p:sp>
+      <p:sp>
+        <p:nvSpPr>
+          <p:cNvPr id="29" name="Text 27"/>
+          <p:cNvSpPr/>
+          <p:nvPr/>
+        </p:nvSpPr>
+        <p:spPr>
+          <a:xfrm>
+            <a:off x="9505950" y="7165181"/>
+            <a:ext cx="3771900" cy="628650"/>
+          </a:xfrm>
+          <a:prstGeom prst="rect">
+            <a:avLst/>
+          </a:prstGeom>
+          <a:noFill/>
+          <a:ln/>
+        </p:spPr>
+        <p:txBody>
+          <a:bodyPr wrap="square" lIns="25400" tIns="25400" rIns="25400" bIns="25400" rtlCol="0" anchor="t">
+            <a:normAutofit/>
+          </a:bodyPr>
+          <a:lstStyle/>
+          <a:p>
+            <a:pPr algn="l" indent="0" marL="0">
+              <a:lnSpc>
+                <a:spcPct val="137778"/>
+              </a:lnSpc>
+              <a:buNone/>
+            </a:pPr>
+            <a:r>
+              <a:rPr lang="en-US" sz="3000" dirty="0">
+                <a:solidFill>
+                  <a:srgbClr val="C67139"/>
+                </a:solidFill>
+                <a:latin typeface="Arial" pitchFamily="34" charset="0"/>
+                <a:ea typeface="Arial" pitchFamily="34" charset="-122"/>
+                <a:cs typeface="Arial" pitchFamily="34" charset="-120"/>
+              </a:rPr>
+              <a:t>07</a:t>
+            </a:r>
+            <a:endParaRPr lang="en-US" sz="3000" dirty="0"/>
+          </a:p>
+        </p:txBody>
+      </p:sp>
+      <p:sp>
+        <p:nvSpPr>
+          <p:cNvPr id="30" name="Text 28"/>
+          <p:cNvSpPr/>
+          <p:nvPr/>
+        </p:nvSpPr>
+        <p:spPr>
+          <a:xfrm>
+            <a:off x="9505950" y="7889081"/>
+            <a:ext cx="3771900" cy="304800"/>
+          </a:xfrm>
+          <a:prstGeom prst="rect">
+            <a:avLst/>
+          </a:prstGeom>
+          <a:noFill/>
+          <a:ln/>
+        </p:spPr>
+        <p:txBody>
+          <a:bodyPr wrap="square" lIns="25400" tIns="25400" rIns="25400" bIns="25400" rtlCol="0" anchor="t">
+            <a:normAutofit/>
+          </a:bodyPr>
+          <a:lstStyle/>
+          <a:p>
+            <a:pPr algn="l" indent="0" marL="0">
+              <a:lnSpc>
+                <a:spcPct val="96552"/>
+              </a:lnSpc>
+              <a:buNone/>
+            </a:pPr>
+            <a:r>
+              <a:rPr lang="en-US" sz="1875" spc="-28" kern="0" dirty="0">
+                <a:solidFill>
+                  <a:srgbClr val="201E1D"/>
+                </a:solidFill>
+                <a:latin typeface="Arial" pitchFamily="34" charset="0"/>
+                <a:ea typeface="Arial" pitchFamily="34" charset="-122"/>
+                <a:cs typeface="Arial" pitchFamily="34" charset="-120"/>
+              </a:rPr>
+              <a:t>Compras y Proveedores</a:t>
+            </a:r>
+            <a:endParaRPr lang="en-US" sz="1875" dirty="0"/>
+          </a:p>
+        </p:txBody>
+      </p:sp>
+      <p:sp>
+        <p:nvSpPr>
+          <p:cNvPr id="31" name="Text 29"/>
+          <p:cNvSpPr/>
+          <p:nvPr/>
+        </p:nvSpPr>
+        <p:spPr>
+          <a:xfrm>
+            <a:off x="9505950" y="8289131"/>
+            <a:ext cx="3531870" cy="655141"/>
+          </a:xfrm>
+          <a:prstGeom prst="rect">
+            <a:avLst/>
+          </a:prstGeom>
+          <a:noFill/>
+          <a:ln/>
+        </p:spPr>
+        <p:txBody>
+          <a:bodyPr wrap="square" lIns="25400" tIns="25400" rIns="25400" bIns="25400" rtlCol="0" anchor="t">
+            <a:normAutofit/>
+          </a:bodyPr>
+          <a:lstStyle/>
+          <a:p>
+            <a:pPr algn="l" indent="0" marL="0">
+              <a:lnSpc>
+                <a:spcPct val="115714"/>
+              </a:lnSpc>
+              <a:buNone/>
+            </a:pPr>
+            <a:r>
+              <a:rPr lang="en-US" sz="1800" dirty="0">
+                <a:solidFill>
+                  <a:srgbClr val="645C50"/>
+                </a:solidFill>
+                <a:latin typeface="Arial" pitchFamily="34" charset="0"/>
+                <a:ea typeface="Arial" pitchFamily="34" charset="-122"/>
+                <a:cs typeface="Arial" pitchFamily="34" charset="-120"/>
+              </a:rPr>
+              <a:t>Órdenes de compra y proveedores.</a:t>
+            </a:r>
+            <a:endParaRPr lang="en-US" sz="1800" dirty="0"/>
+          </a:p>
+        </p:txBody>
+      </p:sp>
+      <p:sp>
+        <p:nvSpPr>
+          <p:cNvPr id="32" name="Shape 30"/>
+          <p:cNvSpPr/>
+          <p:nvPr/>
+        </p:nvSpPr>
+        <p:spPr>
+          <a:xfrm>
+            <a:off x="13411200" y="6546503"/>
+            <a:ext cx="3924300" cy="2978497"/>
+          </a:xfrm>
+          <a:prstGeom prst="roundRect">
+            <a:avLst>
+              <a:gd name="adj" fmla="val 8954"/>
+            </a:avLst>
+          </a:prstGeom>
+          <a:solidFill>
+            <a:srgbClr val="EBDDC5"/>
+          </a:solidFill>
+          <a:ln/>
+        </p:spPr>
+      </p:sp>
+      <p:sp>
+        <p:nvSpPr>
+          <p:cNvPr id="33" name="Text 31"/>
+          <p:cNvSpPr/>
+          <p:nvPr/>
+        </p:nvSpPr>
+        <p:spPr>
+          <a:xfrm>
+            <a:off x="13658850" y="7165181"/>
+            <a:ext cx="3771900" cy="628650"/>
+          </a:xfrm>
+          <a:prstGeom prst="rect">
+            <a:avLst/>
+          </a:prstGeom>
+          <a:noFill/>
+          <a:ln/>
+        </p:spPr>
+        <p:txBody>
+          <a:bodyPr wrap="square" lIns="25400" tIns="25400" rIns="25400" bIns="25400" rtlCol="0" anchor="t">
+            <a:normAutofit/>
+          </a:bodyPr>
+          <a:lstStyle/>
+          <a:p>
+            <a:pPr algn="l" indent="0" marL="0">
+              <a:lnSpc>
+                <a:spcPct val="137778"/>
+              </a:lnSpc>
+              <a:buNone/>
+            </a:pPr>
+            <a:r>
+              <a:rPr lang="en-US" sz="3000" dirty="0">
+                <a:solidFill>
+                  <a:srgbClr val="C67139"/>
+                </a:solidFill>
+                <a:latin typeface="Arial" pitchFamily="34" charset="0"/>
+                <a:ea typeface="Arial" pitchFamily="34" charset="-122"/>
+                <a:cs typeface="Arial" pitchFamily="34" charset="-120"/>
+              </a:rPr>
+              <a:t>08</a:t>
+            </a:r>
+            <a:endParaRPr lang="en-US" sz="3000" dirty="0"/>
+          </a:p>
+        </p:txBody>
+      </p:sp>
+      <p:sp>
+        <p:nvSpPr>
+          <p:cNvPr id="34" name="Text 32"/>
+          <p:cNvSpPr/>
+          <p:nvPr/>
+        </p:nvSpPr>
+        <p:spPr>
+          <a:xfrm>
+            <a:off x="13658850" y="7889081"/>
+            <a:ext cx="3771900" cy="304800"/>
+          </a:xfrm>
+          <a:prstGeom prst="rect">
+            <a:avLst/>
+          </a:prstGeom>
+          <a:noFill/>
+          <a:ln/>
+        </p:spPr>
+        <p:txBody>
+          <a:bodyPr wrap="square" lIns="25400" tIns="25400" rIns="25400" bIns="25400" rtlCol="0" anchor="t">
+            <a:normAutofit/>
+          </a:bodyPr>
+          <a:lstStyle/>
+          <a:p>
+            <a:pPr algn="l" indent="0" marL="0">
+              <a:lnSpc>
+                <a:spcPct val="96552"/>
+              </a:lnSpc>
+              <a:buNone/>
+            </a:pPr>
+            <a:r>
+              <a:rPr lang="en-US" sz="1875" spc="-28" kern="0" dirty="0">
+                <a:solidFill>
+                  <a:srgbClr val="201E1D"/>
+                </a:solidFill>
+                <a:latin typeface="Arial" pitchFamily="34" charset="0"/>
+                <a:ea typeface="Arial" pitchFamily="34" charset="-122"/>
+                <a:cs typeface="Arial" pitchFamily="34" charset="-120"/>
+              </a:rPr>
+              <a:t>Portal del Propietario</a:t>
+            </a:r>
+            <a:endParaRPr lang="en-US" sz="1875" dirty="0"/>
+          </a:p>
+        </p:txBody>
+      </p:sp>
+      <p:sp>
+        <p:nvSpPr>
+          <p:cNvPr id="35" name="Text 33"/>
+          <p:cNvSpPr/>
+          <p:nvPr/>
+        </p:nvSpPr>
+        <p:spPr>
+          <a:xfrm>
+            <a:off x="13658850" y="8289131"/>
+            <a:ext cx="3531870" cy="655141"/>
+          </a:xfrm>
+          <a:prstGeom prst="rect">
+            <a:avLst/>
+          </a:prstGeom>
+          <a:noFill/>
+          <a:ln/>
+        </p:spPr>
+        <p:txBody>
+          <a:bodyPr wrap="square" lIns="25400" tIns="25400" rIns="25400" bIns="25400" rtlCol="0" anchor="t">
+            <a:normAutofit/>
+          </a:bodyPr>
+          <a:lstStyle/>
+          <a:p>
+            <a:pPr algn="l" indent="0" marL="0">
+              <a:lnSpc>
+                <a:spcPct val="115714"/>
+              </a:lnSpc>
+              <a:buNone/>
+            </a:pPr>
+            <a:r>
+              <a:rPr lang="en-US" sz="1800" dirty="0">
+                <a:solidFill>
+                  <a:srgbClr val="645C50"/>
+                </a:solidFill>
+                <a:latin typeface="Arial" pitchFamily="34" charset="0"/>
+                <a:ea typeface="Arial" pitchFamily="34" charset="-122"/>
+                <a:cs typeface="Arial" pitchFamily="34" charset="-120"/>
+              </a:rPr>
+              <a:t>Acceso externo, autenticación separada.</a:t>
+            </a:r>
+            <a:endParaRPr lang="en-US" sz="1800" dirty="0"/>
           </a:p>
         </p:txBody>
       </p:sp>
@@ -9257,11 +9829,11 @@
         <p:spPr>
           <a:xfrm>
             <a:off x="952500" y="3339554"/>
-            <a:ext cx="5206901" cy="2103090"/>
+            <a:ext cx="5206901" cy="4897785"/>
           </a:xfrm>
           <a:prstGeom prst="roundRect">
             <a:avLst>
-              <a:gd name="adj" fmla="val 12681"/>
+              <a:gd name="adj" fmla="val 5445"/>
             </a:avLst>
           </a:prstGeom>
           <a:solidFill>
@@ -9270,15 +9842,45 @@
           <a:ln/>
         </p:spPr>
       </p:sp>
-      <p:sp>
-        <p:nvSpPr>
-          <p:cNvPr id="5" name="Text 3"/>
-          <p:cNvSpPr/>
-          <p:nvPr/>
-        </p:nvSpPr>
-        <p:spPr>
-          <a:xfrm>
-            <a:off x="1314450" y="3758654"/>
+      <p:pic>
+        <p:nvPicPr>
+          <p:cNvPr id="5" name="Image 0" descr="preencoded.png">    </p:cNvPr>
+          <p:cNvPicPr>
+            <a:picLocks noChangeAspect="1"/>
+          </p:cNvPicPr>
+          <p:nvPr/>
+        </p:nvPicPr>
+        <p:blipFill>
+          <a:blip r:embed="rId1">
+            <a:extLst>
+              <a:ext uri="{96DAC541-7B7A-43D3-8B79-37D633B846F1}">
+                <asvg:svgBlip xmlns:asvg="http://schemas.microsoft.com/office/drawing/2016/SVG/main" r:embed="rId2"/>
+              </a:ext>
+            </a:extLst>
+          </a:blip>
+          <a:stretch>
+            <a:fillRect/>
+          </a:stretch>
+        </p:blipFill>
+        <p:spPr>
+          <a:xfrm>
+            <a:off x="1314450" y="4755952"/>
+            <a:ext cx="495300" cy="495300"/>
+          </a:xfrm>
+          <a:prstGeom prst="rect">
+            <a:avLst/>
+          </a:prstGeom>
+        </p:spPr>
+      </p:pic>
+      <p:sp>
+        <p:nvSpPr>
+          <p:cNvPr id="6" name="Text 3"/>
+          <p:cNvSpPr/>
+          <p:nvPr/>
+        </p:nvSpPr>
+        <p:spPr>
+          <a:xfrm>
+            <a:off x="1314450" y="5479852"/>
             <a:ext cx="4931301" cy="464790"/>
           </a:xfrm>
           <a:prstGeom prst="rect">
@@ -9316,13 +9918,13 @@
       </p:sp>
       <p:sp>
         <p:nvSpPr>
-          <p:cNvPr id="6" name="Text 4"/>
-          <p:cNvSpPr/>
-          <p:nvPr/>
-        </p:nvSpPr>
-        <p:spPr>
-          <a:xfrm>
-            <a:off x="1314450" y="4337745"/>
+          <p:cNvPr id="7" name="Text 4"/>
+          <p:cNvSpPr/>
+          <p:nvPr/>
+        </p:nvSpPr>
+        <p:spPr>
+          <a:xfrm>
+            <a:off x="1314450" y="6135142"/>
             <a:ext cx="4617491" cy="723900"/>
           </a:xfrm>
           <a:prstGeom prst="rect">
@@ -9360,18 +9962,18 @@
       </p:sp>
       <p:sp>
         <p:nvSpPr>
-          <p:cNvPr id="7" name="Shape 5"/>
+          <p:cNvPr id="8" name="Shape 5"/>
           <p:cNvSpPr/>
           <p:nvPr/>
         </p:nvSpPr>
         <p:spPr>
           <a:xfrm>
             <a:off x="6540401" y="3339554"/>
-            <a:ext cx="5207050" cy="2103090"/>
+            <a:ext cx="5207050" cy="4897785"/>
           </a:xfrm>
           <a:prstGeom prst="roundRect">
             <a:avLst>
-              <a:gd name="adj" fmla="val 12681"/>
+              <a:gd name="adj" fmla="val 5445"/>
             </a:avLst>
           </a:prstGeom>
           <a:solidFill>
@@ -9380,15 +9982,45 @@
           <a:ln/>
         </p:spPr>
       </p:sp>
-      <p:sp>
-        <p:nvSpPr>
-          <p:cNvPr id="8" name="Text 6"/>
-          <p:cNvSpPr/>
-          <p:nvPr/>
-        </p:nvSpPr>
-        <p:spPr>
-          <a:xfrm>
-            <a:off x="6902351" y="3758654"/>
+      <p:pic>
+        <p:nvPicPr>
+          <p:cNvPr id="9" name="Image 1" descr="preencoded.png">    </p:cNvPr>
+          <p:cNvPicPr>
+            <a:picLocks noChangeAspect="1"/>
+          </p:cNvPicPr>
+          <p:nvPr/>
+        </p:nvPicPr>
+        <p:blipFill>
+          <a:blip r:embed="rId3">
+            <a:extLst>
+              <a:ext uri="{96DAC541-7B7A-43D3-8B79-37D633B846F1}">
+                <asvg:svgBlip xmlns:asvg="http://schemas.microsoft.com/office/drawing/2016/SVG/main" r:embed="rId4"/>
+              </a:ext>
+            </a:extLst>
+          </a:blip>
+          <a:stretch>
+            <a:fillRect/>
+          </a:stretch>
+        </p:blipFill>
+        <p:spPr>
+          <a:xfrm>
+            <a:off x="6902351" y="4755952"/>
+            <a:ext cx="495300" cy="495300"/>
+          </a:xfrm>
+          <a:prstGeom prst="rect">
+            <a:avLst/>
+          </a:prstGeom>
+        </p:spPr>
+      </p:pic>
+      <p:sp>
+        <p:nvSpPr>
+          <p:cNvPr id="10" name="Text 6"/>
+          <p:cNvSpPr/>
+          <p:nvPr/>
+        </p:nvSpPr>
+        <p:spPr>
+          <a:xfrm>
+            <a:off x="6902351" y="5479852"/>
             <a:ext cx="4931465" cy="464790"/>
           </a:xfrm>
           <a:prstGeom prst="rect">
@@ -9426,13 +10058,13 @@
       </p:sp>
       <p:sp>
         <p:nvSpPr>
-          <p:cNvPr id="9" name="Text 7"/>
-          <p:cNvSpPr/>
-          <p:nvPr/>
-        </p:nvSpPr>
-        <p:spPr>
-          <a:xfrm>
-            <a:off x="6902351" y="4337745"/>
+          <p:cNvPr id="11" name="Text 7"/>
+          <p:cNvSpPr/>
+          <p:nvPr/>
+        </p:nvSpPr>
+        <p:spPr>
+          <a:xfrm>
+            <a:off x="6902351" y="6135142"/>
             <a:ext cx="4617644" cy="723900"/>
           </a:xfrm>
           <a:prstGeom prst="rect">
@@ -9470,18 +10102,18 @@
       </p:sp>
       <p:sp>
         <p:nvSpPr>
-          <p:cNvPr id="10" name="Shape 8"/>
+          <p:cNvPr id="12" name="Shape 8"/>
           <p:cNvSpPr/>
           <p:nvPr/>
         </p:nvSpPr>
         <p:spPr>
           <a:xfrm>
             <a:off x="12128450" y="3339554"/>
-            <a:ext cx="5207050" cy="2103090"/>
+            <a:ext cx="5207050" cy="4897785"/>
           </a:xfrm>
           <a:prstGeom prst="roundRect">
             <a:avLst>
-              <a:gd name="adj" fmla="val 12681"/>
+              <a:gd name="adj" fmla="val 5445"/>
             </a:avLst>
           </a:prstGeom>
           <a:solidFill>
@@ -9490,15 +10122,45 @@
           <a:ln/>
         </p:spPr>
       </p:sp>
-      <p:sp>
-        <p:nvSpPr>
-          <p:cNvPr id="11" name="Text 9"/>
-          <p:cNvSpPr/>
-          <p:nvPr/>
-        </p:nvSpPr>
-        <p:spPr>
-          <a:xfrm>
-            <a:off x="12490400" y="3758654"/>
+      <p:pic>
+        <p:nvPicPr>
+          <p:cNvPr id="13" name="Image 2" descr="preencoded.png">    </p:cNvPr>
+          <p:cNvPicPr>
+            <a:picLocks noChangeAspect="1"/>
+          </p:cNvPicPr>
+          <p:nvPr/>
+        </p:nvPicPr>
+        <p:blipFill>
+          <a:blip r:embed="rId5">
+            <a:extLst>
+              <a:ext uri="{96DAC541-7B7A-43D3-8B79-37D633B846F1}">
+                <asvg:svgBlip xmlns:asvg="http://schemas.microsoft.com/office/drawing/2016/SVG/main" r:embed="rId6"/>
+              </a:ext>
+            </a:extLst>
+          </a:blip>
+          <a:stretch>
+            <a:fillRect/>
+          </a:stretch>
+        </p:blipFill>
+        <p:spPr>
+          <a:xfrm>
+            <a:off x="12490400" y="4584502"/>
+            <a:ext cx="495300" cy="495300"/>
+          </a:xfrm>
+          <a:prstGeom prst="rect">
+            <a:avLst/>
+          </a:prstGeom>
+        </p:spPr>
+      </p:pic>
+      <p:sp>
+        <p:nvSpPr>
+          <p:cNvPr id="14" name="Text 9"/>
+          <p:cNvSpPr/>
+          <p:nvPr/>
+        </p:nvSpPr>
+        <p:spPr>
+          <a:xfrm>
+            <a:off x="12490400" y="5308402"/>
             <a:ext cx="4931465" cy="464790"/>
           </a:xfrm>
           <a:prstGeom prst="rect">
@@ -9536,14 +10198,14 @@
       </p:sp>
       <p:sp>
         <p:nvSpPr>
-          <p:cNvPr id="12" name="Text 10"/>
-          <p:cNvSpPr/>
-          <p:nvPr/>
-        </p:nvSpPr>
-        <p:spPr>
-          <a:xfrm>
-            <a:off x="12490400" y="4337745"/>
-            <a:ext cx="4617644" cy="723900"/>
+          <p:cNvPr id="15" name="Text 10"/>
+          <p:cNvSpPr/>
+          <p:nvPr/>
+        </p:nvSpPr>
+        <p:spPr>
+          <a:xfrm>
+            <a:off x="12490400" y="5963692"/>
+            <a:ext cx="4617644" cy="1066800"/>
           </a:xfrm>
           <a:prstGeom prst="rect">
             <a:avLst/>
@@ -9572,7 +10234,7 @@
                 <a:ea typeface="Arial" pitchFamily="34" charset="-122"/>
                 <a:cs typeface="Arial" pitchFamily="34" charset="-120"/>
               </a:rPr>
-              <a:t>Inventario, reportes y, con la ampliación de alcance, cuentas de usuario.</a:t>
+              <a:t>Inventario, reportes, compras a proveedores y cuentas de usuario del sistema.</a:t>
             </a:r>
             <a:endParaRPr lang="en-US" sz="1800" dirty="0"/>
           </a:p>
@@ -9580,14 +10242,56 @@
       </p:sp>
       <p:sp>
         <p:nvSpPr>
-          <p:cNvPr id="13" name="Text 11"/>
-          <p:cNvSpPr/>
-          <p:nvPr/>
-        </p:nvSpPr>
-        <p:spPr>
-          <a:xfrm>
-            <a:off x="952500" y="9045178"/>
-            <a:ext cx="18021300" cy="392311"/>
+          <p:cNvPr id="16" name="Shape 11"/>
+          <p:cNvSpPr/>
+          <p:nvPr/>
+        </p:nvSpPr>
+        <p:spPr>
+          <a:xfrm>
+            <a:off x="952500" y="8675489"/>
+            <a:ext cx="16383000" cy="849511"/>
+          </a:xfrm>
+          <a:prstGeom prst="roundRect">
+            <a:avLst>
+              <a:gd name="adj" fmla="val 31395"/>
+            </a:avLst>
+          </a:prstGeom>
+          <a:solidFill>
+            <a:srgbClr val="EBDDC5"/>
+          </a:solidFill>
+          <a:ln/>
+        </p:spPr>
+      </p:sp>
+      <p:sp>
+        <p:nvSpPr>
+          <p:cNvPr id="17" name="Shape 12"/>
+          <p:cNvSpPr/>
+          <p:nvPr/>
+        </p:nvSpPr>
+        <p:spPr>
+          <a:xfrm>
+            <a:off x="1276350" y="9033570"/>
+            <a:ext cx="133350" cy="133350"/>
+          </a:xfrm>
+          <a:prstGeom prst="ellipse">
+            <a:avLst/>
+          </a:prstGeom>
+          <a:solidFill>
+            <a:srgbClr val="7A8A5E"/>
+          </a:solidFill>
+          <a:ln/>
+        </p:spPr>
+      </p:sp>
+      <p:sp>
+        <p:nvSpPr>
+          <p:cNvPr id="18" name="Text 13"/>
+          <p:cNvSpPr/>
+          <p:nvPr/>
+        </p:nvSpPr>
+        <p:spPr>
+          <a:xfrm>
+            <a:off x="1619250" y="8923139"/>
+            <a:ext cx="13935894" cy="392311"/>
           </a:xfrm>
           <a:prstGeom prst="rect">
             <a:avLst/>
@@ -9610,7 +10314,7 @@
             <a:r>
               <a:rPr lang="en-US" sz="1800" i="1" dirty="0">
                 <a:solidFill>
-                  <a:srgbClr val="82796A"/>
+                  <a:srgbClr val="645C50"/>
                 </a:solidFill>
                 <a:latin typeface="Arial" pitchFamily="34" charset="0"/>
                 <a:ea typeface="Arial" pitchFamily="34" charset="-122"/>
@@ -9684,7 +10388,7 @@
         </p:nvSpPr>
         <p:spPr>
           <a:xfrm>
-            <a:off x="952500" y="2980432"/>
+            <a:off x="952500" y="2384227"/>
             <a:ext cx="18021300" cy="421928"/>
           </a:xfrm>
           <a:prstGeom prst="rect">
@@ -9728,7 +10432,7 @@
         </p:nvSpPr>
         <p:spPr>
           <a:xfrm>
-            <a:off x="952500" y="3535710"/>
+            <a:off x="952500" y="2939504"/>
             <a:ext cx="16764000" cy="1062186"/>
           </a:xfrm>
           <a:prstGeom prst="rect">
@@ -9772,7 +10476,7 @@
         </p:nvSpPr>
         <p:spPr>
           <a:xfrm>
-            <a:off x="952500" y="4883646"/>
+            <a:off x="952500" y="4287441"/>
             <a:ext cx="12753975" cy="1181100"/>
           </a:xfrm>
           <a:prstGeom prst="rect">
@@ -9816,13 +10520,11 @@
         </p:nvSpPr>
         <p:spPr>
           <a:xfrm>
-            <a:off x="952500" y="6685657"/>
-            <a:ext cx="1955304" cy="620911"/>
-          </a:xfrm>
-          <a:prstGeom prst="roundRect">
-            <a:avLst>
-              <a:gd name="adj" fmla="val 50000"/>
-            </a:avLst>
+            <a:off x="1600200" y="6590407"/>
+            <a:ext cx="609600" cy="609600"/>
+          </a:xfrm>
+          <a:prstGeom prst="ellipse">
+            <a:avLst/>
           </a:prstGeom>
           <a:solidFill>
             <a:srgbClr val="F5EAD8"/>
@@ -9838,8 +10540,8 @@
         </p:nvSpPr>
         <p:spPr>
           <a:xfrm>
-            <a:off x="1219200" y="6819007"/>
-            <a:ext cx="1498104" cy="392311"/>
+            <a:off x="1562100" y="6590407"/>
+            <a:ext cx="685800" cy="647700"/>
           </a:xfrm>
           <a:prstGeom prst="rect">
             <a:avLst/>
@@ -9853,16 +10555,60 @@
           </a:bodyPr>
           <a:lstStyle/>
           <a:p>
-            <a:pPr algn="l" indent="0" marL="0">
+            <a:pPr algn="ctr" indent="0" marL="0">
+              <a:lnSpc>
+                <a:spcPct val="135625"/>
+              </a:lnSpc>
+              <a:buNone/>
+            </a:pPr>
+            <a:r>
+              <a:rPr lang="en-US" sz="2100" dirty="0">
+                <a:solidFill>
+                  <a:srgbClr val="8C491A"/>
+                </a:solidFill>
+                <a:latin typeface="Arial" pitchFamily="34" charset="0"/>
+                <a:ea typeface="Arial" pitchFamily="34" charset="-122"/>
+                <a:cs typeface="Arial" pitchFamily="34" charset="-120"/>
+              </a:rPr>
+              <a:t>1</a:t>
+            </a:r>
+            <a:endParaRPr lang="en-US" sz="2100" dirty="0"/>
+          </a:p>
+        </p:txBody>
+      </p:sp>
+      <p:sp>
+        <p:nvSpPr>
+          <p:cNvPr id="8" name="Text 6"/>
+          <p:cNvSpPr/>
+          <p:nvPr/>
+        </p:nvSpPr>
+        <p:spPr>
+          <a:xfrm>
+            <a:off x="1051582" y="7371457"/>
+            <a:ext cx="1706687" cy="392311"/>
+          </a:xfrm>
+          <a:prstGeom prst="rect">
+            <a:avLst/>
+          </a:prstGeom>
+          <a:noFill/>
+          <a:ln/>
+        </p:spPr>
+        <p:txBody>
+          <a:bodyPr wrap="square" lIns="25400" tIns="25400" rIns="25400" bIns="25400" rtlCol="0" anchor="t">
+            <a:normAutofit/>
+          </a:bodyPr>
+          <a:lstStyle/>
+          <a:p>
+            <a:pPr algn="ctr" indent="0" marL="0">
               <a:lnSpc>
                 <a:spcPct val="132857"/>
               </a:lnSpc>
               <a:buNone/>
             </a:pPr>
             <a:r>
-              <a:rPr lang="en-US" sz="1800" spc="36" kern="0" dirty="0">
-                <a:solidFill>
-                  <a:srgbClr val="8C491A"/>
+              <a:rPr lang="en-US" sz="1800" dirty="0">
+                <a:solidFill>
+                  <a:srgbClr val="F5EAD8"/>
                 </a:solidFill>
                 <a:latin typeface="Arial" pitchFamily="34" charset="0"/>
                 <a:ea typeface="Arial" pitchFamily="34" charset="-122"/>
@@ -9876,19 +10622,37 @@
       </p:sp>
       <p:sp>
         <p:nvSpPr>
-          <p:cNvPr id="8" name="Shape 6"/>
-          <p:cNvSpPr/>
-          <p:nvPr/>
-        </p:nvSpPr>
-        <p:spPr>
-          <a:xfrm>
-            <a:off x="3079254" y="6685657"/>
-            <a:ext cx="2314426" cy="620911"/>
-          </a:xfrm>
-          <a:prstGeom prst="roundRect">
-            <a:avLst>
-              <a:gd name="adj" fmla="val 50000"/>
-            </a:avLst>
+          <p:cNvPr id="9" name="Shape 7"/>
+          <p:cNvSpPr/>
+          <p:nvPr/>
+        </p:nvSpPr>
+        <p:spPr>
+          <a:xfrm>
+            <a:off x="2762250" y="6953250"/>
+            <a:ext cx="1905000" cy="28575"/>
+          </a:xfrm>
+          <a:prstGeom prst="rect">
+            <a:avLst/>
+          </a:prstGeom>
+          <a:solidFill>
+            <a:srgbClr val="D67F48"/>
+          </a:solidFill>
+          <a:ln/>
+        </p:spPr>
+      </p:sp>
+      <p:sp>
+        <p:nvSpPr>
+          <p:cNvPr id="10" name="Shape 8"/>
+          <p:cNvSpPr/>
+          <p:nvPr/>
+        </p:nvSpPr>
+        <p:spPr>
+          <a:xfrm>
+            <a:off x="5219700" y="6413302"/>
+            <a:ext cx="609600" cy="609600"/>
+          </a:xfrm>
+          <a:prstGeom prst="ellipse">
+            <a:avLst/>
           </a:prstGeom>
           <a:solidFill>
             <a:srgbClr val="F5EAD8"/>
@@ -9898,14 +10662,14 @@
       </p:sp>
       <p:sp>
         <p:nvSpPr>
-          <p:cNvPr id="9" name="Text 7"/>
-          <p:cNvSpPr/>
-          <p:nvPr/>
-        </p:nvSpPr>
-        <p:spPr>
-          <a:xfrm>
-            <a:off x="3345954" y="6819007"/>
-            <a:ext cx="1857226" cy="392311"/>
+          <p:cNvPr id="11" name="Text 9"/>
+          <p:cNvSpPr/>
+          <p:nvPr/>
+        </p:nvSpPr>
+        <p:spPr>
+          <a:xfrm>
+            <a:off x="5181600" y="6413302"/>
+            <a:ext cx="685800" cy="647700"/>
           </a:xfrm>
           <a:prstGeom prst="rect">
             <a:avLst/>
@@ -9919,16 +10683,60 @@
           </a:bodyPr>
           <a:lstStyle/>
           <a:p>
-            <a:pPr algn="l" indent="0" marL="0">
+            <a:pPr algn="ctr" indent="0" marL="0">
+              <a:lnSpc>
+                <a:spcPct val="135625"/>
+              </a:lnSpc>
+              <a:buNone/>
+            </a:pPr>
+            <a:r>
+              <a:rPr lang="en-US" sz="2100" dirty="0">
+                <a:solidFill>
+                  <a:srgbClr val="8C491A"/>
+                </a:solidFill>
+                <a:latin typeface="Arial" pitchFamily="34" charset="0"/>
+                <a:ea typeface="Arial" pitchFamily="34" charset="-122"/>
+                <a:cs typeface="Arial" pitchFamily="34" charset="-120"/>
+              </a:rPr>
+              <a:t>2</a:t>
+            </a:r>
+            <a:endParaRPr lang="en-US" sz="2100" dirty="0"/>
+          </a:p>
+        </p:txBody>
+      </p:sp>
+      <p:sp>
+        <p:nvSpPr>
+          <p:cNvPr id="12" name="Text 10"/>
+          <p:cNvSpPr/>
+          <p:nvPr/>
+        </p:nvSpPr>
+        <p:spPr>
+          <a:xfrm>
+            <a:off x="4533900" y="7194352"/>
+            <a:ext cx="1981200" cy="746522"/>
+          </a:xfrm>
+          <a:prstGeom prst="rect">
+            <a:avLst/>
+          </a:prstGeom>
+          <a:noFill/>
+          <a:ln/>
+        </p:spPr>
+        <p:txBody>
+          <a:bodyPr wrap="square" lIns="25400" tIns="25400" rIns="25400" bIns="25400" rtlCol="0" anchor="t">
+            <a:normAutofit/>
+          </a:bodyPr>
+          <a:lstStyle/>
+          <a:p>
+            <a:pPr algn="ctr" indent="0" marL="0">
               <a:lnSpc>
                 <a:spcPct val="132857"/>
               </a:lnSpc>
               <a:buNone/>
             </a:pPr>
             <a:r>
-              <a:rPr lang="en-US" sz="1800" spc="36" kern="0" dirty="0">
-                <a:solidFill>
-                  <a:srgbClr val="8C491A"/>
+              <a:rPr lang="en-US" sz="1800" dirty="0">
+                <a:solidFill>
+                  <a:srgbClr val="F5EAD8"/>
                 </a:solidFill>
                 <a:latin typeface="Arial" pitchFamily="34" charset="0"/>
                 <a:ea typeface="Arial" pitchFamily="34" charset="-122"/>
@@ -9942,19 +10750,37 @@
       </p:sp>
       <p:sp>
         <p:nvSpPr>
-          <p:cNvPr id="10" name="Shape 8"/>
-          <p:cNvSpPr/>
-          <p:nvPr/>
-        </p:nvSpPr>
-        <p:spPr>
-          <a:xfrm>
-            <a:off x="5565130" y="6685657"/>
-            <a:ext cx="1971526" cy="620911"/>
-          </a:xfrm>
-          <a:prstGeom prst="roundRect">
-            <a:avLst>
-              <a:gd name="adj" fmla="val 50000"/>
-            </a:avLst>
+          <p:cNvPr id="13" name="Shape 11"/>
+          <p:cNvSpPr/>
+          <p:nvPr/>
+        </p:nvSpPr>
+        <p:spPr>
+          <a:xfrm>
+            <a:off x="6381750" y="6953250"/>
+            <a:ext cx="1905000" cy="28575"/>
+          </a:xfrm>
+          <a:prstGeom prst="rect">
+            <a:avLst/>
+          </a:prstGeom>
+          <a:solidFill>
+            <a:srgbClr val="D67F48"/>
+          </a:solidFill>
+          <a:ln/>
+        </p:spPr>
+      </p:sp>
+      <p:sp>
+        <p:nvSpPr>
+          <p:cNvPr id="14" name="Shape 12"/>
+          <p:cNvSpPr/>
+          <p:nvPr/>
+        </p:nvSpPr>
+        <p:spPr>
+          <a:xfrm>
+            <a:off x="8839200" y="6590407"/>
+            <a:ext cx="609600" cy="609600"/>
+          </a:xfrm>
+          <a:prstGeom prst="ellipse">
+            <a:avLst/>
           </a:prstGeom>
           <a:solidFill>
             <a:srgbClr val="F5EAD8"/>
@@ -9964,14 +10790,14 @@
       </p:sp>
       <p:sp>
         <p:nvSpPr>
-          <p:cNvPr id="11" name="Text 9"/>
-          <p:cNvSpPr/>
-          <p:nvPr/>
-        </p:nvSpPr>
-        <p:spPr>
-          <a:xfrm>
-            <a:off x="5831830" y="6819007"/>
-            <a:ext cx="1514326" cy="392311"/>
+          <p:cNvPr id="15" name="Text 13"/>
+          <p:cNvSpPr/>
+          <p:nvPr/>
+        </p:nvSpPr>
+        <p:spPr>
+          <a:xfrm>
+            <a:off x="8801100" y="6590407"/>
+            <a:ext cx="685800" cy="647700"/>
           </a:xfrm>
           <a:prstGeom prst="rect">
             <a:avLst/>
@@ -9985,16 +10811,60 @@
           </a:bodyPr>
           <a:lstStyle/>
           <a:p>
-            <a:pPr algn="l" indent="0" marL="0">
+            <a:pPr algn="ctr" indent="0" marL="0">
+              <a:lnSpc>
+                <a:spcPct val="135625"/>
+              </a:lnSpc>
+              <a:buNone/>
+            </a:pPr>
+            <a:r>
+              <a:rPr lang="en-US" sz="2100" dirty="0">
+                <a:solidFill>
+                  <a:srgbClr val="8C491A"/>
+                </a:solidFill>
+                <a:latin typeface="Arial" pitchFamily="34" charset="0"/>
+                <a:ea typeface="Arial" pitchFamily="34" charset="-122"/>
+                <a:cs typeface="Arial" pitchFamily="34" charset="-120"/>
+              </a:rPr>
+              <a:t>3</a:t>
+            </a:r>
+            <a:endParaRPr lang="en-US" sz="2100" dirty="0"/>
+          </a:p>
+        </p:txBody>
+      </p:sp>
+      <p:sp>
+        <p:nvSpPr>
+          <p:cNvPr id="16" name="Text 14"/>
+          <p:cNvSpPr/>
+          <p:nvPr/>
+        </p:nvSpPr>
+        <p:spPr>
+          <a:xfrm>
+            <a:off x="8284525" y="7371457"/>
+            <a:ext cx="1718801" cy="392311"/>
+          </a:xfrm>
+          <a:prstGeom prst="rect">
+            <a:avLst/>
+          </a:prstGeom>
+          <a:noFill/>
+          <a:ln/>
+        </p:spPr>
+        <p:txBody>
+          <a:bodyPr wrap="square" lIns="25400" tIns="25400" rIns="25400" bIns="25400" rtlCol="0" anchor="t">
+            <a:normAutofit/>
+          </a:bodyPr>
+          <a:lstStyle/>
+          <a:p>
+            <a:pPr algn="ctr" indent="0" marL="0">
               <a:lnSpc>
                 <a:spcPct val="132857"/>
               </a:lnSpc>
               <a:buNone/>
             </a:pPr>
             <a:r>
-              <a:rPr lang="en-US" sz="1800" spc="36" kern="0" dirty="0">
-                <a:solidFill>
-                  <a:srgbClr val="8C491A"/>
+              <a:rPr lang="en-US" sz="1800" dirty="0">
+                <a:solidFill>
+                  <a:srgbClr val="F5EAD8"/>
                 </a:solidFill>
                 <a:latin typeface="Arial" pitchFamily="34" charset="0"/>
                 <a:ea typeface="Arial" pitchFamily="34" charset="-122"/>
@@ -10008,19 +10878,37 @@
       </p:sp>
       <p:sp>
         <p:nvSpPr>
-          <p:cNvPr id="12" name="Shape 10"/>
-          <p:cNvSpPr/>
-          <p:nvPr/>
-        </p:nvSpPr>
-        <p:spPr>
-          <a:xfrm>
-            <a:off x="7708106" y="6685657"/>
-            <a:ext cx="1383655" cy="620911"/>
-          </a:xfrm>
-          <a:prstGeom prst="roundRect">
-            <a:avLst>
-              <a:gd name="adj" fmla="val 50000"/>
-            </a:avLst>
+          <p:cNvPr id="17" name="Shape 15"/>
+          <p:cNvSpPr/>
+          <p:nvPr/>
+        </p:nvSpPr>
+        <p:spPr>
+          <a:xfrm>
+            <a:off x="10001250" y="6953250"/>
+            <a:ext cx="1905000" cy="28575"/>
+          </a:xfrm>
+          <a:prstGeom prst="rect">
+            <a:avLst/>
+          </a:prstGeom>
+          <a:solidFill>
+            <a:srgbClr val="D67F48"/>
+          </a:solidFill>
+          <a:ln/>
+        </p:spPr>
+      </p:sp>
+      <p:sp>
+        <p:nvSpPr>
+          <p:cNvPr id="18" name="Shape 16"/>
+          <p:cNvSpPr/>
+          <p:nvPr/>
+        </p:nvSpPr>
+        <p:spPr>
+          <a:xfrm>
+            <a:off x="12458700" y="6590407"/>
+            <a:ext cx="609600" cy="609600"/>
+          </a:xfrm>
+          <a:prstGeom prst="ellipse">
+            <a:avLst/>
           </a:prstGeom>
           <a:solidFill>
             <a:srgbClr val="F5EAD8"/>
@@ -10030,14 +10918,14 @@
       </p:sp>
       <p:sp>
         <p:nvSpPr>
-          <p:cNvPr id="13" name="Text 11"/>
-          <p:cNvSpPr/>
-          <p:nvPr/>
-        </p:nvSpPr>
-        <p:spPr>
-          <a:xfrm>
-            <a:off x="7974806" y="6819007"/>
-            <a:ext cx="926455" cy="392311"/>
+          <p:cNvPr id="19" name="Text 17"/>
+          <p:cNvSpPr/>
+          <p:nvPr/>
+        </p:nvSpPr>
+        <p:spPr>
+          <a:xfrm>
+            <a:off x="12420600" y="6590407"/>
+            <a:ext cx="685800" cy="647700"/>
           </a:xfrm>
           <a:prstGeom prst="rect">
             <a:avLst/>
@@ -10051,16 +10939,60 @@
           </a:bodyPr>
           <a:lstStyle/>
           <a:p>
-            <a:pPr algn="l" indent="0" marL="0">
+            <a:pPr algn="ctr" indent="0" marL="0">
+              <a:lnSpc>
+                <a:spcPct val="135625"/>
+              </a:lnSpc>
+              <a:buNone/>
+            </a:pPr>
+            <a:r>
+              <a:rPr lang="en-US" sz="2100" dirty="0">
+                <a:solidFill>
+                  <a:srgbClr val="8C491A"/>
+                </a:solidFill>
+                <a:latin typeface="Arial" pitchFamily="34" charset="0"/>
+                <a:ea typeface="Arial" pitchFamily="34" charset="-122"/>
+                <a:cs typeface="Arial" pitchFamily="34" charset="-120"/>
+              </a:rPr>
+              <a:t>4</a:t>
+            </a:r>
+            <a:endParaRPr lang="en-US" sz="2100" dirty="0"/>
+          </a:p>
+        </p:txBody>
+      </p:sp>
+      <p:sp>
+        <p:nvSpPr>
+          <p:cNvPr id="20" name="Text 18"/>
+          <p:cNvSpPr/>
+          <p:nvPr/>
+        </p:nvSpPr>
+        <p:spPr>
+          <a:xfrm>
+            <a:off x="12255847" y="7371457"/>
+            <a:ext cx="1015305" cy="392311"/>
+          </a:xfrm>
+          <a:prstGeom prst="rect">
+            <a:avLst/>
+          </a:prstGeom>
+          <a:noFill/>
+          <a:ln/>
+        </p:spPr>
+        <p:txBody>
+          <a:bodyPr wrap="square" lIns="25400" tIns="25400" rIns="25400" bIns="25400" rtlCol="0" anchor="t">
+            <a:normAutofit/>
+          </a:bodyPr>
+          <a:lstStyle/>
+          <a:p>
+            <a:pPr algn="ctr" indent="0" marL="0">
               <a:lnSpc>
                 <a:spcPct val="132857"/>
               </a:lnSpc>
               <a:buNone/>
             </a:pPr>
             <a:r>
-              <a:rPr lang="en-US" sz="1800" spc="36" kern="0" dirty="0">
-                <a:solidFill>
-                  <a:srgbClr val="8C491A"/>
+              <a:rPr lang="en-US" sz="1800" dirty="0">
+                <a:solidFill>
+                  <a:srgbClr val="F5EAD8"/>
                 </a:solidFill>
                 <a:latin typeface="Arial" pitchFamily="34" charset="0"/>
                 <a:ea typeface="Arial" pitchFamily="34" charset="-122"/>
@@ -10074,19 +11006,37 @@
       </p:sp>
       <p:sp>
         <p:nvSpPr>
-          <p:cNvPr id="14" name="Shape 12"/>
-          <p:cNvSpPr/>
-          <p:nvPr/>
-        </p:nvSpPr>
-        <p:spPr>
-          <a:xfrm>
-            <a:off x="9263211" y="6685657"/>
-            <a:ext cx="2250430" cy="620911"/>
-          </a:xfrm>
-          <a:prstGeom prst="roundRect">
-            <a:avLst>
-              <a:gd name="adj" fmla="val 50000"/>
-            </a:avLst>
+          <p:cNvPr id="21" name="Shape 19"/>
+          <p:cNvSpPr/>
+          <p:nvPr/>
+        </p:nvSpPr>
+        <p:spPr>
+          <a:xfrm>
+            <a:off x="13620750" y="6953250"/>
+            <a:ext cx="1905000" cy="28575"/>
+          </a:xfrm>
+          <a:prstGeom prst="rect">
+            <a:avLst/>
+          </a:prstGeom>
+          <a:solidFill>
+            <a:srgbClr val="D67F48"/>
+          </a:solidFill>
+          <a:ln/>
+        </p:spPr>
+      </p:sp>
+      <p:sp>
+        <p:nvSpPr>
+          <p:cNvPr id="22" name="Shape 20"/>
+          <p:cNvSpPr/>
+          <p:nvPr/>
+        </p:nvSpPr>
+        <p:spPr>
+          <a:xfrm>
+            <a:off x="16078200" y="6590407"/>
+            <a:ext cx="609600" cy="609600"/>
+          </a:xfrm>
+          <a:prstGeom prst="ellipse">
+            <a:avLst/>
           </a:prstGeom>
           <a:solidFill>
             <a:srgbClr val="F5EAD8"/>
@@ -10096,14 +11046,14 @@
       </p:sp>
       <p:sp>
         <p:nvSpPr>
-          <p:cNvPr id="15" name="Text 13"/>
-          <p:cNvSpPr/>
-          <p:nvPr/>
-        </p:nvSpPr>
-        <p:spPr>
-          <a:xfrm>
-            <a:off x="9529911" y="6819007"/>
-            <a:ext cx="1793230" cy="392311"/>
+          <p:cNvPr id="23" name="Text 21"/>
+          <p:cNvSpPr/>
+          <p:nvPr/>
+        </p:nvSpPr>
+        <p:spPr>
+          <a:xfrm>
+            <a:off x="16040100" y="6590407"/>
+            <a:ext cx="685800" cy="647700"/>
           </a:xfrm>
           <a:prstGeom prst="rect">
             <a:avLst/>
@@ -10117,16 +11067,60 @@
           </a:bodyPr>
           <a:lstStyle/>
           <a:p>
-            <a:pPr algn="l" indent="0" marL="0">
+            <a:pPr algn="ctr" indent="0" marL="0">
+              <a:lnSpc>
+                <a:spcPct val="135625"/>
+              </a:lnSpc>
+              <a:buNone/>
+            </a:pPr>
+            <a:r>
+              <a:rPr lang="en-US" sz="2100" dirty="0">
+                <a:solidFill>
+                  <a:srgbClr val="8C491A"/>
+                </a:solidFill>
+                <a:latin typeface="Arial" pitchFamily="34" charset="0"/>
+                <a:ea typeface="Arial" pitchFamily="34" charset="-122"/>
+                <a:cs typeface="Arial" pitchFamily="34" charset="-120"/>
+              </a:rPr>
+              <a:t>5</a:t>
+            </a:r>
+            <a:endParaRPr lang="en-US" sz="2100" dirty="0"/>
+          </a:p>
+        </p:txBody>
+      </p:sp>
+      <p:sp>
+        <p:nvSpPr>
+          <p:cNvPr id="24" name="Text 22"/>
+          <p:cNvSpPr/>
+          <p:nvPr/>
+        </p:nvSpPr>
+        <p:spPr>
+          <a:xfrm>
+            <a:off x="15340325" y="7371457"/>
+            <a:ext cx="2085350" cy="392311"/>
+          </a:xfrm>
+          <a:prstGeom prst="rect">
+            <a:avLst/>
+          </a:prstGeom>
+          <a:noFill/>
+          <a:ln/>
+        </p:spPr>
+        <p:txBody>
+          <a:bodyPr wrap="square" lIns="25400" tIns="25400" rIns="25400" bIns="25400" rtlCol="0" anchor="t">
+            <a:normAutofit/>
+          </a:bodyPr>
+          <a:lstStyle/>
+          <a:p>
+            <a:pPr algn="ctr" indent="0" marL="0">
               <a:lnSpc>
                 <a:spcPct val="132857"/>
               </a:lnSpc>
               <a:buNone/>
             </a:pPr>
             <a:r>
-              <a:rPr lang="en-US" sz="1800" spc="36" kern="0" dirty="0">
-                <a:solidFill>
-                  <a:srgbClr val="8C491A"/>
+              <a:rPr lang="en-US" sz="1800" dirty="0">
+                <a:solidFill>
+                  <a:srgbClr val="F5EAD8"/>
                 </a:solidFill>
                 <a:latin typeface="Arial" pitchFamily="34" charset="0"/>
                 <a:ea typeface="Arial" pitchFamily="34" charset="-122"/>
@@ -10267,6 +11261,28 @@
         <p:spPr>
           <a:xfrm>
             <a:off x="952500" y="2614166"/>
+            <a:ext cx="5206901" cy="6910834"/>
+          </a:xfrm>
+          <a:prstGeom prst="roundRect">
+            <a:avLst>
+              <a:gd name="adj" fmla="val 5122"/>
+            </a:avLst>
+          </a:prstGeom>
+          <a:solidFill>
+            <a:srgbClr val="EBDDC5"/>
+          </a:solidFill>
+          <a:ln/>
+        </p:spPr>
+      </p:sp>
+      <p:sp>
+        <p:nvSpPr>
+          <p:cNvPr id="5" name="Shape 3"/>
+          <p:cNvSpPr/>
+          <p:nvPr/>
+        </p:nvSpPr>
+        <p:spPr>
+          <a:xfrm>
+            <a:off x="952500" y="2614166"/>
             <a:ext cx="5206901" cy="38100"/>
           </a:xfrm>
           <a:prstGeom prst="rect">
@@ -10278,16 +11294,46 @@
           <a:ln/>
         </p:spPr>
       </p:sp>
-      <p:sp>
-        <p:nvSpPr>
-          <p:cNvPr id="5" name="Text 3"/>
-          <p:cNvSpPr/>
-          <p:nvPr/>
-        </p:nvSpPr>
-        <p:spPr>
-          <a:xfrm>
-            <a:off x="952500" y="2899916"/>
-            <a:ext cx="5727591" cy="464790"/>
+      <p:pic>
+        <p:nvPicPr>
+          <p:cNvPr id="6" name="Image 0" descr="preencoded.png">    </p:cNvPr>
+          <p:cNvPicPr>
+            <a:picLocks noChangeAspect="1"/>
+          </p:cNvPicPr>
+          <p:nvPr/>
+        </p:nvPicPr>
+        <p:blipFill>
+          <a:blip r:embed="rId1">
+            <a:extLst>
+              <a:ext uri="{96DAC541-7B7A-43D3-8B79-37D633B846F1}">
+                <asvg:svgBlip xmlns:asvg="http://schemas.microsoft.com/office/drawing/2016/SVG/main" r:embed="rId2"/>
+              </a:ext>
+            </a:extLst>
+          </a:blip>
+          <a:stretch>
+            <a:fillRect/>
+          </a:stretch>
+        </p:blipFill>
+        <p:spPr>
+          <a:xfrm>
+            <a:off x="1257300" y="4469457"/>
+            <a:ext cx="457200" cy="457200"/>
+          </a:xfrm>
+          <a:prstGeom prst="rect">
+            <a:avLst/>
+          </a:prstGeom>
+        </p:spPr>
+      </p:pic>
+      <p:sp>
+        <p:nvSpPr>
+          <p:cNvPr id="7" name="Text 4"/>
+          <p:cNvSpPr/>
+          <p:nvPr/>
+        </p:nvSpPr>
+        <p:spPr>
+          <a:xfrm>
+            <a:off x="1257300" y="5136207"/>
+            <a:ext cx="5057031" cy="464790"/>
           </a:xfrm>
           <a:prstGeom prst="rect">
             <a:avLst/>
@@ -10324,14 +11370,14 @@
       </p:sp>
       <p:sp>
         <p:nvSpPr>
-          <p:cNvPr id="6" name="Text 4"/>
-          <p:cNvSpPr/>
-          <p:nvPr/>
-        </p:nvSpPr>
-        <p:spPr>
-          <a:xfrm>
-            <a:off x="952500" y="3479006"/>
-            <a:ext cx="5363108" cy="1066800"/>
+          <p:cNvPr id="8" name="Text 5"/>
+          <p:cNvSpPr/>
+          <p:nvPr/>
+        </p:nvSpPr>
+        <p:spPr>
+          <a:xfrm>
+            <a:off x="1257300" y="5772448"/>
+            <a:ext cx="4735220" cy="1409700"/>
           </a:xfrm>
           <a:prstGeom prst="rect">
             <a:avLst/>
@@ -10368,7 +11414,73 @@
       </p:sp>
       <p:sp>
         <p:nvSpPr>
-          <p:cNvPr id="7" name="Shape 5"/>
+          <p:cNvPr id="9" name="Text 6"/>
+          <p:cNvSpPr/>
+          <p:nvPr/>
+        </p:nvSpPr>
+        <p:spPr>
+          <a:xfrm>
+            <a:off x="1257300" y="7353598"/>
+            <a:ext cx="5057031" cy="392311"/>
+          </a:xfrm>
+          <a:prstGeom prst="rect">
+            <a:avLst/>
+          </a:prstGeom>
+          <a:noFill/>
+          <a:ln/>
+        </p:spPr>
+        <p:txBody>
+          <a:bodyPr wrap="square" lIns="25400" tIns="25400" rIns="25400" bIns="25400" rtlCol="0" anchor="t">
+            <a:normAutofit/>
+          </a:bodyPr>
+          <a:lstStyle/>
+          <a:p>
+            <a:pPr algn="l" indent="0" marL="0">
+              <a:lnSpc>
+                <a:spcPct val="132857"/>
+              </a:lnSpc>
+              <a:buNone/>
+            </a:pPr>
+            <a:r>
+              <a:rPr lang="en-US" sz="1800" dirty="0">
+                <a:solidFill>
+                  <a:srgbClr val="8C491A"/>
+                </a:solidFill>
+                <a:latin typeface="Arial" pitchFamily="34" charset="0"/>
+                <a:ea typeface="Arial" pitchFamily="34" charset="-122"/>
+                <a:cs typeface="Arial" pitchFamily="34" charset="-120"/>
+              </a:rPr>
+              <a:t>Base: procesos de negocio conocidos</a:t>
+            </a:r>
+            <a:endParaRPr lang="en-US" sz="1800" dirty="0"/>
+          </a:p>
+        </p:txBody>
+      </p:sp>
+      <p:sp>
+        <p:nvSpPr>
+          <p:cNvPr id="10" name="Shape 7"/>
+          <p:cNvSpPr/>
+          <p:nvPr/>
+        </p:nvSpPr>
+        <p:spPr>
+          <a:xfrm>
+            <a:off x="6540401" y="2614166"/>
+            <a:ext cx="5207050" cy="6910834"/>
+          </a:xfrm>
+          <a:prstGeom prst="roundRect">
+            <a:avLst>
+              <a:gd name="adj" fmla="val 5122"/>
+            </a:avLst>
+          </a:prstGeom>
+          <a:solidFill>
+            <a:srgbClr val="EBDDC5"/>
+          </a:solidFill>
+          <a:ln/>
+        </p:spPr>
+      </p:sp>
+      <p:sp>
+        <p:nvSpPr>
+          <p:cNvPr id="11" name="Shape 8"/>
           <p:cNvSpPr/>
           <p:nvPr/>
         </p:nvSpPr>
@@ -10386,16 +11498,46 @@
           <a:ln/>
         </p:spPr>
       </p:sp>
-      <p:sp>
-        <p:nvSpPr>
-          <p:cNvPr id="8" name="Text 6"/>
-          <p:cNvSpPr/>
-          <p:nvPr/>
-        </p:nvSpPr>
-        <p:spPr>
-          <a:xfrm>
-            <a:off x="6540401" y="2899916"/>
-            <a:ext cx="5727755" cy="464790"/>
+      <p:pic>
+        <p:nvPicPr>
+          <p:cNvPr id="12" name="Image 1" descr="preencoded.png">    </p:cNvPr>
+          <p:cNvPicPr>
+            <a:picLocks noChangeAspect="1"/>
+          </p:cNvPicPr>
+          <p:nvPr/>
+        </p:nvPicPr>
+        <p:blipFill>
+          <a:blip r:embed="rId3">
+            <a:extLst>
+              <a:ext uri="{96DAC541-7B7A-43D3-8B79-37D633B846F1}">
+                <asvg:svgBlip xmlns:asvg="http://schemas.microsoft.com/office/drawing/2016/SVG/main" r:embed="rId4"/>
+              </a:ext>
+            </a:extLst>
+          </a:blip>
+          <a:stretch>
+            <a:fillRect/>
+          </a:stretch>
+        </p:blipFill>
+        <p:spPr>
+          <a:xfrm>
+            <a:off x="6845201" y="4640907"/>
+            <a:ext cx="457200" cy="457200"/>
+          </a:xfrm>
+          <a:prstGeom prst="rect">
+            <a:avLst/>
+          </a:prstGeom>
+        </p:spPr>
+      </p:pic>
+      <p:sp>
+        <p:nvSpPr>
+          <p:cNvPr id="13" name="Text 9"/>
+          <p:cNvSpPr/>
+          <p:nvPr/>
+        </p:nvSpPr>
+        <p:spPr>
+          <a:xfrm>
+            <a:off x="6845201" y="5307657"/>
+            <a:ext cx="5057195" cy="464790"/>
           </a:xfrm>
           <a:prstGeom prst="rect">
             <a:avLst/>
@@ -10432,14 +11574,14 @@
       </p:sp>
       <p:sp>
         <p:nvSpPr>
-          <p:cNvPr id="9" name="Text 7"/>
-          <p:cNvSpPr/>
-          <p:nvPr/>
-        </p:nvSpPr>
-        <p:spPr>
-          <a:xfrm>
-            <a:off x="6540401" y="3479006"/>
-            <a:ext cx="5363261" cy="1066800"/>
+          <p:cNvPr id="14" name="Text 10"/>
+          <p:cNvSpPr/>
+          <p:nvPr/>
+        </p:nvSpPr>
+        <p:spPr>
+          <a:xfrm>
+            <a:off x="6845201" y="5943898"/>
+            <a:ext cx="4735373" cy="1066800"/>
           </a:xfrm>
           <a:prstGeom prst="rect">
             <a:avLst/>
@@ -10468,7 +11610,7 @@
                 <a:ea typeface="Arial" pitchFamily="34" charset="-122"/>
                 <a:cs typeface="Arial" pitchFamily="34" charset="-120"/>
               </a:rPr>
-              <a:t>Cinco módulos exactos, definidos desde el día uno — la arquitectura completa puede planificarse sin improvisar.</a:t>
+              <a:t>Ocho módulos exactos, definidos desde el día uno — la arquitectura completa puede planificarse sin improvisar.</a:t>
             </a:r>
             <a:endParaRPr lang="en-US" sz="1800" dirty="0"/>
           </a:p>
@@ -10476,7 +11618,73 @@
       </p:sp>
       <p:sp>
         <p:nvSpPr>
-          <p:cNvPr id="10" name="Shape 8"/>
+          <p:cNvPr id="15" name="Text 11"/>
+          <p:cNvSpPr/>
+          <p:nvPr/>
+        </p:nvSpPr>
+        <p:spPr>
+          <a:xfrm>
+            <a:off x="6845201" y="7182148"/>
+            <a:ext cx="5057195" cy="392311"/>
+          </a:xfrm>
+          <a:prstGeom prst="rect">
+            <a:avLst/>
+          </a:prstGeom>
+          <a:noFill/>
+          <a:ln/>
+        </p:spPr>
+        <p:txBody>
+          <a:bodyPr wrap="square" lIns="25400" tIns="25400" rIns="25400" bIns="25400" rtlCol="0" anchor="t">
+            <a:normAutofit/>
+          </a:bodyPr>
+          <a:lstStyle/>
+          <a:p>
+            <a:pPr algn="l" indent="0" marL="0">
+              <a:lnSpc>
+                <a:spcPct val="132857"/>
+              </a:lnSpc>
+              <a:buNone/>
+            </a:pPr>
+            <a:r>
+              <a:rPr lang="en-US" sz="1800" dirty="0">
+                <a:solidFill>
+                  <a:srgbClr val="8C491A"/>
+                </a:solidFill>
+                <a:latin typeface="Arial" pitchFamily="34" charset="0"/>
+                <a:ea typeface="Arial" pitchFamily="34" charset="-122"/>
+                <a:cs typeface="Arial" pitchFamily="34" charset="-120"/>
+              </a:rPr>
+              <a:t>Cierre: SRS congelado antes del diseño</a:t>
+            </a:r>
+            <a:endParaRPr lang="en-US" sz="1800" dirty="0"/>
+          </a:p>
+        </p:txBody>
+      </p:sp>
+      <p:sp>
+        <p:nvSpPr>
+          <p:cNvPr id="16" name="Shape 12"/>
+          <p:cNvSpPr/>
+          <p:nvPr/>
+        </p:nvSpPr>
+        <p:spPr>
+          <a:xfrm>
+            <a:off x="12128450" y="2614166"/>
+            <a:ext cx="5207050" cy="6910834"/>
+          </a:xfrm>
+          <a:prstGeom prst="roundRect">
+            <a:avLst>
+              <a:gd name="adj" fmla="val 5122"/>
+            </a:avLst>
+          </a:prstGeom>
+          <a:solidFill>
+            <a:srgbClr val="EBDDC5"/>
+          </a:solidFill>
+          <a:ln/>
+        </p:spPr>
+      </p:sp>
+      <p:sp>
+        <p:nvSpPr>
+          <p:cNvPr id="17" name="Shape 13"/>
           <p:cNvSpPr/>
           <p:nvPr/>
         </p:nvSpPr>
@@ -10494,16 +11702,46 @@
           <a:ln/>
         </p:spPr>
       </p:sp>
-      <p:sp>
-        <p:nvSpPr>
-          <p:cNvPr id="11" name="Text 9"/>
-          <p:cNvSpPr/>
-          <p:nvPr/>
-        </p:nvSpPr>
-        <p:spPr>
-          <a:xfrm>
-            <a:off x="12128450" y="2899916"/>
-            <a:ext cx="5727755" cy="464790"/>
+      <p:pic>
+        <p:nvPicPr>
+          <p:cNvPr id="18" name="Image 2" descr="preencoded.png">    </p:cNvPr>
+          <p:cNvPicPr>
+            <a:picLocks noChangeAspect="1"/>
+          </p:cNvPicPr>
+          <p:nvPr/>
+        </p:nvPicPr>
+        <p:blipFill>
+          <a:blip r:embed="rId5">
+            <a:extLst>
+              <a:ext uri="{96DAC541-7B7A-43D3-8B79-37D633B846F1}">
+                <asvg:svgBlip xmlns:asvg="http://schemas.microsoft.com/office/drawing/2016/SVG/main" r:embed="rId6"/>
+              </a:ext>
+            </a:extLst>
+          </a:blip>
+          <a:stretch>
+            <a:fillRect/>
+          </a:stretch>
+        </p:blipFill>
+        <p:spPr>
+          <a:xfrm>
+            <a:off x="12433250" y="4427488"/>
+            <a:ext cx="457200" cy="457200"/>
+          </a:xfrm>
+          <a:prstGeom prst="rect">
+            <a:avLst/>
+          </a:prstGeom>
+        </p:spPr>
+      </p:pic>
+      <p:sp>
+        <p:nvSpPr>
+          <p:cNvPr id="19" name="Text 14"/>
+          <p:cNvSpPr/>
+          <p:nvPr/>
+        </p:nvSpPr>
+        <p:spPr>
+          <a:xfrm>
+            <a:off x="12433250" y="5094238"/>
+            <a:ext cx="4735373" cy="891480"/>
           </a:xfrm>
           <a:prstGeom prst="rect">
             <a:avLst/>
@@ -10540,14 +11778,14 @@
       </p:sp>
       <p:sp>
         <p:nvSpPr>
-          <p:cNvPr id="12" name="Text 10"/>
-          <p:cNvSpPr/>
-          <p:nvPr/>
-        </p:nvSpPr>
-        <p:spPr>
-          <a:xfrm>
-            <a:off x="12128450" y="3479006"/>
-            <a:ext cx="5363261" cy="1066800"/>
+          <p:cNvPr id="20" name="Text 15"/>
+          <p:cNvSpPr/>
+          <p:nvPr/>
+        </p:nvSpPr>
+        <p:spPr>
+          <a:xfrm>
+            <a:off x="12433250" y="6157168"/>
+            <a:ext cx="4735373" cy="1066800"/>
           </a:xfrm>
           <a:prstGeom prst="rect">
             <a:avLst/>
@@ -10577,6 +11815,50 @@
                 <a:cs typeface="Arial" pitchFamily="34" charset="-120"/>
               </a:rPr>
               <a:t>18 artefactos formales exigen que cada fase produzca entregables que sirven de base obligatoria para la siguiente.</a:t>
+            </a:r>
+            <a:endParaRPr lang="en-US" sz="1800" dirty="0"/>
+          </a:p>
+        </p:txBody>
+      </p:sp>
+      <p:sp>
+        <p:nvSpPr>
+          <p:cNvPr id="21" name="Text 16"/>
+          <p:cNvSpPr/>
+          <p:nvPr/>
+        </p:nvSpPr>
+        <p:spPr>
+          <a:xfrm>
+            <a:off x="12433250" y="7395418"/>
+            <a:ext cx="5057195" cy="392311"/>
+          </a:xfrm>
+          <a:prstGeom prst="rect">
+            <a:avLst/>
+          </a:prstGeom>
+          <a:noFill/>
+          <a:ln/>
+        </p:spPr>
+        <p:txBody>
+          <a:bodyPr wrap="square" lIns="25400" tIns="25400" rIns="25400" bIns="25400" rtlCol="0" anchor="t">
+            <a:normAutofit/>
+          </a:bodyPr>
+          <a:lstStyle/>
+          <a:p>
+            <a:pPr algn="l" indent="0" marL="0">
+              <a:lnSpc>
+                <a:spcPct val="132857"/>
+              </a:lnSpc>
+              <a:buNone/>
+            </a:pPr>
+            <a:r>
+              <a:rPr lang="en-US" sz="1800" dirty="0">
+                <a:solidFill>
+                  <a:srgbClr val="8C491A"/>
+                </a:solidFill>
+                <a:latin typeface="Arial" pitchFamily="34" charset="0"/>
+                <a:ea typeface="Arial" pitchFamily="34" charset="-122"/>
+                <a:cs typeface="Arial" pitchFamily="34" charset="-120"/>
+              </a:rPr>
+              <a:t>Trazabilidad: fase a fase, sin vacíos</a:t>
             </a:r>
             <a:endParaRPr lang="en-US" sz="1800" dirty="0"/>
           </a:p>
@@ -10710,8 +11992,8 @@
         </p:nvSpPr>
         <p:spPr>
           <a:xfrm>
-            <a:off x="1276350" y="3853904"/>
-            <a:ext cx="15735300" cy="38100"/>
+            <a:off x="1524000" y="4177754"/>
+            <a:ext cx="15240000" cy="38100"/>
           </a:xfrm>
           <a:prstGeom prst="rect">
             <a:avLst/>
@@ -10731,6 +12013,28 @@
         <p:spPr>
           <a:xfrm>
             <a:off x="952500" y="3530054"/>
+            <a:ext cx="3093690" cy="5994946"/>
+          </a:xfrm>
+          <a:prstGeom prst="roundRect">
+            <a:avLst>
+              <a:gd name="adj" fmla="val 8621"/>
+            </a:avLst>
+          </a:prstGeom>
+          <a:solidFill>
+            <a:srgbClr val="EBDDC5"/>
+          </a:solidFill>
+          <a:ln/>
+        </p:spPr>
+      </p:sp>
+      <p:sp>
+        <p:nvSpPr>
+          <p:cNvPr id="6" name="Shape 4"/>
+          <p:cNvSpPr/>
+          <p:nvPr/>
+        </p:nvSpPr>
+        <p:spPr>
+          <a:xfrm>
+            <a:off x="1200150" y="3853904"/>
             <a:ext cx="647700" cy="647700"/>
           </a:xfrm>
           <a:prstGeom prst="ellipse">
@@ -10744,13 +12048,13 @@
       </p:sp>
       <p:sp>
         <p:nvSpPr>
-          <p:cNvPr id="6" name="Text 4"/>
-          <p:cNvSpPr/>
-          <p:nvPr/>
-        </p:nvSpPr>
-        <p:spPr>
-          <a:xfrm>
-            <a:off x="914400" y="3530054"/>
+          <p:cNvPr id="7" name="Text 5"/>
+          <p:cNvSpPr/>
+          <p:nvPr/>
+        </p:nvSpPr>
+        <p:spPr>
+          <a:xfrm>
+            <a:off x="1162050" y="3853904"/>
             <a:ext cx="723900" cy="685800"/>
           </a:xfrm>
           <a:prstGeom prst="rect">
@@ -10788,14 +12092,14 @@
       </p:sp>
       <p:sp>
         <p:nvSpPr>
-          <p:cNvPr id="7" name="Text 5"/>
-          <p:cNvSpPr/>
-          <p:nvPr/>
-        </p:nvSpPr>
-        <p:spPr>
-          <a:xfrm>
-            <a:off x="952500" y="4387304"/>
-            <a:ext cx="3386197" cy="315367"/>
+          <p:cNvPr id="8" name="Text 6"/>
+          <p:cNvSpPr/>
+          <p:nvPr/>
+        </p:nvSpPr>
+        <p:spPr>
+          <a:xfrm>
+            <a:off x="1200150" y="4711154"/>
+            <a:ext cx="2858229" cy="315367"/>
           </a:xfrm>
           <a:prstGeom prst="rect">
             <a:avLst/>
@@ -10832,35 +12136,35 @@
       </p:sp>
       <p:sp>
         <p:nvSpPr>
-          <p:cNvPr id="8" name="Text 6"/>
-          <p:cNvSpPr/>
-          <p:nvPr/>
-        </p:nvSpPr>
-        <p:spPr>
-          <a:xfrm>
-            <a:off x="952500" y="4874121"/>
-            <a:ext cx="3170712" cy="907852"/>
-          </a:xfrm>
-          <a:prstGeom prst="rect">
-            <a:avLst/>
-          </a:prstGeom>
-          <a:noFill/>
-          <a:ln/>
-        </p:spPr>
-        <p:txBody>
-          <a:bodyPr wrap="square" lIns="25400" tIns="25400" rIns="25400" bIns="25400" rtlCol="0" anchor="t">
-            <a:normAutofit/>
-          </a:bodyPr>
-          <a:lstStyle/>
-          <a:p>
-            <a:pPr algn="l" indent="0" marL="0">
-              <a:lnSpc>
-                <a:spcPct val="126875"/>
-              </a:lnSpc>
-              <a:buNone/>
-            </a:pPr>
-            <a:r>
-              <a:rPr lang="en-US" sz="1575" dirty="0">
+          <p:cNvPr id="9" name="Text 7"/>
+          <p:cNvSpPr/>
+          <p:nvPr/>
+        </p:nvSpPr>
+        <p:spPr>
+          <a:xfrm>
+            <a:off x="1200150" y="5197971"/>
+            <a:ext cx="2676342" cy="678061"/>
+          </a:xfrm>
+          <a:prstGeom prst="rect">
+            <a:avLst/>
+          </a:prstGeom>
+          <a:noFill/>
+          <a:ln/>
+        </p:spPr>
+        <p:txBody>
+          <a:bodyPr wrap="square" lIns="25400" tIns="25400" rIns="25400" bIns="25400" rtlCol="0" anchor="t">
+            <a:normAutofit/>
+          </a:bodyPr>
+          <a:lstStyle/>
+          <a:p>
+            <a:pPr algn="l" indent="0" marL="0">
+              <a:lnSpc>
+                <a:spcPct val="120000"/>
+              </a:lnSpc>
+              <a:buNone/>
+            </a:pPr>
+            <a:r>
+              <a:rPr lang="en-US" sz="1800" dirty="0">
                 <a:solidFill>
                   <a:srgbClr val="645C50"/>
                 </a:solidFill>
@@ -10868,21 +12172,87 @@
                 <a:ea typeface="Arial" pitchFamily="34" charset="-122"/>
                 <a:cs typeface="Arial" pitchFamily="34" charset="-120"/>
               </a:rPr>
-              <a:t>Levantamiento del SRS y modelado de procesos: casos de uso y DFD.</a:t>
-            </a:r>
-            <a:endParaRPr lang="en-US" sz="1575" dirty="0"/>
-          </a:p>
-        </p:txBody>
-      </p:sp>
-      <p:sp>
-        <p:nvSpPr>
-          <p:cNvPr id="9" name="Shape 7"/>
-          <p:cNvSpPr/>
-          <p:nvPr/>
-        </p:nvSpPr>
-        <p:spPr>
-          <a:xfrm>
-            <a:off x="4278511" y="3530054"/>
+              <a:t>Levantamiento del SRS: casos de uso y DFD.</a:t>
+            </a:r>
+            <a:endParaRPr lang="en-US" sz="1800" dirty="0"/>
+          </a:p>
+        </p:txBody>
+      </p:sp>
+      <p:sp>
+        <p:nvSpPr>
+          <p:cNvPr id="10" name="Text 8"/>
+          <p:cNvSpPr/>
+          <p:nvPr/>
+        </p:nvSpPr>
+        <p:spPr>
+          <a:xfrm>
+            <a:off x="1200150" y="8492728"/>
+            <a:ext cx="2676342" cy="746522"/>
+          </a:xfrm>
+          <a:prstGeom prst="rect">
+            <a:avLst/>
+          </a:prstGeom>
+          <a:noFill/>
+          <a:ln/>
+        </p:spPr>
+        <p:txBody>
+          <a:bodyPr wrap="square" lIns="25400" tIns="25400" rIns="25400" bIns="25400" rtlCol="0" anchor="t">
+            <a:normAutofit/>
+          </a:bodyPr>
+          <a:lstStyle/>
+          <a:p>
+            <a:pPr algn="l" indent="0" marL="0">
+              <a:lnSpc>
+                <a:spcPct val="132857"/>
+              </a:lnSpc>
+              <a:buNone/>
+            </a:pPr>
+            <a:r>
+              <a:rPr lang="en-US" sz="1800" dirty="0">
+                <a:solidFill>
+                  <a:srgbClr val="8C491A"/>
+                </a:solidFill>
+                <a:latin typeface="Arial" pitchFamily="34" charset="0"/>
+                <a:ea typeface="Arial" pitchFamily="34" charset="-122"/>
+                <a:cs typeface="Arial" pitchFamily="34" charset="-120"/>
+              </a:rPr>
+              <a:t>Entregable: SRS + DFD</a:t>
+            </a:r>
+            <a:endParaRPr lang="en-US" sz="1800" dirty="0"/>
+          </a:p>
+        </p:txBody>
+      </p:sp>
+      <p:sp>
+        <p:nvSpPr>
+          <p:cNvPr id="11" name="Shape 9"/>
+          <p:cNvSpPr/>
+          <p:nvPr/>
+        </p:nvSpPr>
+        <p:spPr>
+          <a:xfrm>
+            <a:off x="4274790" y="3530054"/>
+            <a:ext cx="3093690" cy="5994946"/>
+          </a:xfrm>
+          <a:prstGeom prst="roundRect">
+            <a:avLst>
+              <a:gd name="adj" fmla="val 8621"/>
+            </a:avLst>
+          </a:prstGeom>
+          <a:solidFill>
+            <a:srgbClr val="EBDDC5"/>
+          </a:solidFill>
+          <a:ln/>
+        </p:spPr>
+      </p:sp>
+      <p:sp>
+        <p:nvSpPr>
+          <p:cNvPr id="12" name="Shape 10"/>
+          <p:cNvSpPr/>
+          <p:nvPr/>
+        </p:nvSpPr>
+        <p:spPr>
+          <a:xfrm>
+            <a:off x="4522440" y="3853904"/>
             <a:ext cx="647700" cy="647700"/>
           </a:xfrm>
           <a:prstGeom prst="ellipse">
@@ -10896,13 +12266,13 @@
       </p:sp>
       <p:sp>
         <p:nvSpPr>
-          <p:cNvPr id="10" name="Text 8"/>
-          <p:cNvSpPr/>
-          <p:nvPr/>
-        </p:nvSpPr>
-        <p:spPr>
-          <a:xfrm>
-            <a:off x="4240411" y="3530054"/>
+          <p:cNvPr id="13" name="Text 11"/>
+          <p:cNvSpPr/>
+          <p:nvPr/>
+        </p:nvSpPr>
+        <p:spPr>
+          <a:xfrm>
+            <a:off x="4484340" y="3853904"/>
             <a:ext cx="723900" cy="685800"/>
           </a:xfrm>
           <a:prstGeom prst="rect">
@@ -10940,14 +12310,14 @@
       </p:sp>
       <p:sp>
         <p:nvSpPr>
-          <p:cNvPr id="11" name="Text 9"/>
-          <p:cNvSpPr/>
-          <p:nvPr/>
-        </p:nvSpPr>
-        <p:spPr>
-          <a:xfrm>
-            <a:off x="4278511" y="4387304"/>
-            <a:ext cx="3386361" cy="315367"/>
+          <p:cNvPr id="14" name="Text 12"/>
+          <p:cNvSpPr/>
+          <p:nvPr/>
+        </p:nvSpPr>
+        <p:spPr>
+          <a:xfrm>
+            <a:off x="4522440" y="4711154"/>
+            <a:ext cx="2858229" cy="315367"/>
           </a:xfrm>
           <a:prstGeom prst="rect">
             <a:avLst/>
@@ -10984,35 +12354,35 @@
       </p:sp>
       <p:sp>
         <p:nvSpPr>
-          <p:cNvPr id="12" name="Text 10"/>
-          <p:cNvSpPr/>
-          <p:nvPr/>
-        </p:nvSpPr>
-        <p:spPr>
-          <a:xfrm>
-            <a:off x="4278511" y="4874121"/>
-            <a:ext cx="3170865" cy="907852"/>
-          </a:xfrm>
-          <a:prstGeom prst="rect">
-            <a:avLst/>
-          </a:prstGeom>
-          <a:noFill/>
-          <a:ln/>
-        </p:spPr>
-        <p:txBody>
-          <a:bodyPr wrap="square" lIns="25400" tIns="25400" rIns="25400" bIns="25400" rtlCol="0" anchor="t">
-            <a:normAutofit/>
-          </a:bodyPr>
-          <a:lstStyle/>
-          <a:p>
-            <a:pPr algn="l" indent="0" marL="0">
-              <a:lnSpc>
-                <a:spcPct val="126875"/>
-              </a:lnSpc>
-              <a:buNone/>
-            </a:pPr>
-            <a:r>
-              <a:rPr lang="en-US" sz="1575" dirty="0">
+          <p:cNvPr id="15" name="Text 13"/>
+          <p:cNvSpPr/>
+          <p:nvPr/>
+        </p:nvSpPr>
+        <p:spPr>
+          <a:xfrm>
+            <a:off x="4522440" y="5197971"/>
+            <a:ext cx="2676342" cy="678061"/>
+          </a:xfrm>
+          <a:prstGeom prst="rect">
+            <a:avLst/>
+          </a:prstGeom>
+          <a:noFill/>
+          <a:ln/>
+        </p:spPr>
+        <p:txBody>
+          <a:bodyPr wrap="square" lIns="25400" tIns="25400" rIns="25400" bIns="25400" rtlCol="0" anchor="t">
+            <a:normAutofit/>
+          </a:bodyPr>
+          <a:lstStyle/>
+          <a:p>
+            <a:pPr algn="l" indent="0" marL="0">
+              <a:lnSpc>
+                <a:spcPct val="120000"/>
+              </a:lnSpc>
+              <a:buNone/>
+            </a:pPr>
+            <a:r>
+              <a:rPr lang="en-US" sz="1800" dirty="0">
                 <a:solidFill>
                   <a:srgbClr val="645C50"/>
                 </a:solidFill>
@@ -11020,21 +12390,87 @@
                 <a:ea typeface="Arial" pitchFamily="34" charset="-122"/>
                 <a:cs typeface="Arial" pitchFamily="34" charset="-120"/>
               </a:rPr>
-              <a:t>Arquitectura, interfaces, clases/secuencias, modelos conceptual, lógico y físico de BD.</a:t>
-            </a:r>
-            <a:endParaRPr lang="en-US" sz="1575" dirty="0"/>
-          </a:p>
-        </p:txBody>
-      </p:sp>
-      <p:sp>
-        <p:nvSpPr>
-          <p:cNvPr id="13" name="Shape 11"/>
-          <p:cNvSpPr/>
-          <p:nvPr/>
-        </p:nvSpPr>
-        <p:spPr>
-          <a:xfrm>
-            <a:off x="7604671" y="3530054"/>
+              <a:t>Arquitectura, interfaces y modelos de BD.</a:t>
+            </a:r>
+            <a:endParaRPr lang="en-US" sz="1800" dirty="0"/>
+          </a:p>
+        </p:txBody>
+      </p:sp>
+      <p:sp>
+        <p:nvSpPr>
+          <p:cNvPr id="16" name="Text 14"/>
+          <p:cNvSpPr/>
+          <p:nvPr/>
+        </p:nvSpPr>
+        <p:spPr>
+          <a:xfrm>
+            <a:off x="4522440" y="8492728"/>
+            <a:ext cx="2676342" cy="746522"/>
+          </a:xfrm>
+          <a:prstGeom prst="rect">
+            <a:avLst/>
+          </a:prstGeom>
+          <a:noFill/>
+          <a:ln/>
+        </p:spPr>
+        <p:txBody>
+          <a:bodyPr wrap="square" lIns="25400" tIns="25400" rIns="25400" bIns="25400" rtlCol="0" anchor="t">
+            <a:normAutofit/>
+          </a:bodyPr>
+          <a:lstStyle/>
+          <a:p>
+            <a:pPr algn="l" indent="0" marL="0">
+              <a:lnSpc>
+                <a:spcPct val="132857"/>
+              </a:lnSpc>
+              <a:buNone/>
+            </a:pPr>
+            <a:r>
+              <a:rPr lang="en-US" sz="1800" dirty="0">
+                <a:solidFill>
+                  <a:srgbClr val="8C491A"/>
+                </a:solidFill>
+                <a:latin typeface="Arial" pitchFamily="34" charset="0"/>
+                <a:ea typeface="Arial" pitchFamily="34" charset="-122"/>
+                <a:cs typeface="Arial" pitchFamily="34" charset="-120"/>
+              </a:rPr>
+              <a:t>Entregable: Modelos de BD</a:t>
+            </a:r>
+            <a:endParaRPr lang="en-US" sz="1800" dirty="0"/>
+          </a:p>
+        </p:txBody>
+      </p:sp>
+      <p:sp>
+        <p:nvSpPr>
+          <p:cNvPr id="17" name="Shape 15"/>
+          <p:cNvSpPr/>
+          <p:nvPr/>
+        </p:nvSpPr>
+        <p:spPr>
+          <a:xfrm>
+            <a:off x="7597080" y="3530054"/>
+            <a:ext cx="3093690" cy="5994946"/>
+          </a:xfrm>
+          <a:prstGeom prst="roundRect">
+            <a:avLst>
+              <a:gd name="adj" fmla="val 8621"/>
+            </a:avLst>
+          </a:prstGeom>
+          <a:solidFill>
+            <a:srgbClr val="EBDDC5"/>
+          </a:solidFill>
+          <a:ln/>
+        </p:spPr>
+      </p:sp>
+      <p:sp>
+        <p:nvSpPr>
+          <p:cNvPr id="18" name="Shape 16"/>
+          <p:cNvSpPr/>
+          <p:nvPr/>
+        </p:nvSpPr>
+        <p:spPr>
+          <a:xfrm>
+            <a:off x="7844730" y="3853904"/>
             <a:ext cx="647700" cy="647700"/>
           </a:xfrm>
           <a:prstGeom prst="ellipse">
@@ -11048,13 +12484,13 @@
       </p:sp>
       <p:sp>
         <p:nvSpPr>
-          <p:cNvPr id="14" name="Text 12"/>
-          <p:cNvSpPr/>
-          <p:nvPr/>
-        </p:nvSpPr>
-        <p:spPr>
-          <a:xfrm>
-            <a:off x="7566571" y="3530054"/>
+          <p:cNvPr id="19" name="Text 17"/>
+          <p:cNvSpPr/>
+          <p:nvPr/>
+        </p:nvSpPr>
+        <p:spPr>
+          <a:xfrm>
+            <a:off x="7806630" y="3853904"/>
             <a:ext cx="723900" cy="685800"/>
           </a:xfrm>
           <a:prstGeom prst="rect">
@@ -11092,14 +12528,14 @@
       </p:sp>
       <p:sp>
         <p:nvSpPr>
-          <p:cNvPr id="15" name="Text 13"/>
-          <p:cNvSpPr/>
-          <p:nvPr/>
-        </p:nvSpPr>
-        <p:spPr>
-          <a:xfrm>
-            <a:off x="7604671" y="4387304"/>
-            <a:ext cx="3386361" cy="315367"/>
+          <p:cNvPr id="20" name="Text 18"/>
+          <p:cNvSpPr/>
+          <p:nvPr/>
+        </p:nvSpPr>
+        <p:spPr>
+          <a:xfrm>
+            <a:off x="7844730" y="4711154"/>
+            <a:ext cx="2858229" cy="315367"/>
           </a:xfrm>
           <a:prstGeom prst="rect">
             <a:avLst/>
@@ -11136,35 +12572,35 @@
       </p:sp>
       <p:sp>
         <p:nvSpPr>
-          <p:cNvPr id="16" name="Text 14"/>
-          <p:cNvSpPr/>
-          <p:nvPr/>
-        </p:nvSpPr>
-        <p:spPr>
-          <a:xfrm>
-            <a:off x="7604671" y="4874121"/>
-            <a:ext cx="3170865" cy="907852"/>
-          </a:xfrm>
-          <a:prstGeom prst="rect">
-            <a:avLst/>
-          </a:prstGeom>
-          <a:noFill/>
-          <a:ln/>
-        </p:spPr>
-        <p:txBody>
-          <a:bodyPr wrap="square" lIns="25400" tIns="25400" rIns="25400" bIns="25400" rtlCol="0" anchor="t">
-            <a:normAutofit/>
-          </a:bodyPr>
-          <a:lstStyle/>
-          <a:p>
-            <a:pPr algn="l" indent="0" marL="0">
-              <a:lnSpc>
-                <a:spcPct val="126875"/>
-              </a:lnSpc>
-              <a:buNone/>
-            </a:pPr>
-            <a:r>
-              <a:rPr lang="en-US" sz="1575" dirty="0">
+          <p:cNvPr id="21" name="Text 19"/>
+          <p:cNvSpPr/>
+          <p:nvPr/>
+        </p:nvSpPr>
+        <p:spPr>
+          <a:xfrm>
+            <a:off x="7844730" y="5197971"/>
+            <a:ext cx="2676342" cy="678061"/>
+          </a:xfrm>
+          <a:prstGeom prst="rect">
+            <a:avLst/>
+          </a:prstGeom>
+          <a:noFill/>
+          <a:ln/>
+        </p:spPr>
+        <p:txBody>
+          <a:bodyPr wrap="square" lIns="25400" tIns="25400" rIns="25400" bIns="25400" rtlCol="0" anchor="t">
+            <a:normAutofit/>
+          </a:bodyPr>
+          <a:lstStyle/>
+          <a:p>
+            <a:pPr algn="l" indent="0" marL="0">
+              <a:lnSpc>
+                <a:spcPct val="120000"/>
+              </a:lnSpc>
+              <a:buNone/>
+            </a:pPr>
+            <a:r>
+              <a:rPr lang="en-US" sz="1800" dirty="0">
                 <a:solidFill>
                   <a:srgbClr val="645C50"/>
                 </a:solidFill>
@@ -11172,21 +12608,87 @@
                 <a:ea typeface="Arial" pitchFamily="34" charset="-122"/>
                 <a:cs typeface="Arial" pitchFamily="34" charset="-120"/>
               </a:rPr>
-              <a:t>Codificación continua de los cinco módulos, exclusivamente sobre lo aprobado.</a:t>
-            </a:r>
-            <a:endParaRPr lang="en-US" sz="1575" dirty="0"/>
-          </a:p>
-        </p:txBody>
-      </p:sp>
-      <p:sp>
-        <p:nvSpPr>
-          <p:cNvPr id="17" name="Shape 15"/>
-          <p:cNvSpPr/>
-          <p:nvPr/>
-        </p:nvSpPr>
-        <p:spPr>
-          <a:xfrm>
-            <a:off x="10930830" y="3530054"/>
+              <a:t>Codificación de los ocho módulos aprobados.</a:t>
+            </a:r>
+            <a:endParaRPr lang="en-US" sz="1800" dirty="0"/>
+          </a:p>
+        </p:txBody>
+      </p:sp>
+      <p:sp>
+        <p:nvSpPr>
+          <p:cNvPr id="22" name="Text 20"/>
+          <p:cNvSpPr/>
+          <p:nvPr/>
+        </p:nvSpPr>
+        <p:spPr>
+          <a:xfrm>
+            <a:off x="7844730" y="8492728"/>
+            <a:ext cx="2676342" cy="746522"/>
+          </a:xfrm>
+          <a:prstGeom prst="rect">
+            <a:avLst/>
+          </a:prstGeom>
+          <a:noFill/>
+          <a:ln/>
+        </p:spPr>
+        <p:txBody>
+          <a:bodyPr wrap="square" lIns="25400" tIns="25400" rIns="25400" bIns="25400" rtlCol="0" anchor="t">
+            <a:normAutofit/>
+          </a:bodyPr>
+          <a:lstStyle/>
+          <a:p>
+            <a:pPr algn="l" indent="0" marL="0">
+              <a:lnSpc>
+                <a:spcPct val="132857"/>
+              </a:lnSpc>
+              <a:buNone/>
+            </a:pPr>
+            <a:r>
+              <a:rPr lang="en-US" sz="1800" dirty="0">
+                <a:solidFill>
+                  <a:srgbClr val="8C491A"/>
+                </a:solidFill>
+                <a:latin typeface="Arial" pitchFamily="34" charset="0"/>
+                <a:ea typeface="Arial" pitchFamily="34" charset="-122"/>
+                <a:cs typeface="Arial" pitchFamily="34" charset="-120"/>
+              </a:rPr>
+              <a:t>Entregable: Código fuente</a:t>
+            </a:r>
+            <a:endParaRPr lang="en-US" sz="1800" dirty="0"/>
+          </a:p>
+        </p:txBody>
+      </p:sp>
+      <p:sp>
+        <p:nvSpPr>
+          <p:cNvPr id="23" name="Shape 21"/>
+          <p:cNvSpPr/>
+          <p:nvPr/>
+        </p:nvSpPr>
+        <p:spPr>
+          <a:xfrm>
+            <a:off x="10919371" y="3530054"/>
+            <a:ext cx="3093690" cy="5994946"/>
+          </a:xfrm>
+          <a:prstGeom prst="roundRect">
+            <a:avLst>
+              <a:gd name="adj" fmla="val 8621"/>
+            </a:avLst>
+          </a:prstGeom>
+          <a:solidFill>
+            <a:srgbClr val="EBDDC5"/>
+          </a:solidFill>
+          <a:ln/>
+        </p:spPr>
+      </p:sp>
+      <p:sp>
+        <p:nvSpPr>
+          <p:cNvPr id="24" name="Shape 22"/>
+          <p:cNvSpPr/>
+          <p:nvPr/>
+        </p:nvSpPr>
+        <p:spPr>
+          <a:xfrm>
+            <a:off x="11167021" y="3853904"/>
             <a:ext cx="647700" cy="647700"/>
           </a:xfrm>
           <a:prstGeom prst="ellipse">
@@ -11200,13 +12702,13 @@
       </p:sp>
       <p:sp>
         <p:nvSpPr>
-          <p:cNvPr id="18" name="Text 16"/>
-          <p:cNvSpPr/>
-          <p:nvPr/>
-        </p:nvSpPr>
-        <p:spPr>
-          <a:xfrm>
-            <a:off x="10892730" y="3530054"/>
+          <p:cNvPr id="25" name="Text 23"/>
+          <p:cNvSpPr/>
+          <p:nvPr/>
+        </p:nvSpPr>
+        <p:spPr>
+          <a:xfrm>
+            <a:off x="11128921" y="3853904"/>
             <a:ext cx="723900" cy="685800"/>
           </a:xfrm>
           <a:prstGeom prst="rect">
@@ -11244,14 +12746,14 @@
       </p:sp>
       <p:sp>
         <p:nvSpPr>
-          <p:cNvPr id="19" name="Text 17"/>
-          <p:cNvSpPr/>
-          <p:nvPr/>
-        </p:nvSpPr>
-        <p:spPr>
-          <a:xfrm>
-            <a:off x="10930830" y="4387304"/>
-            <a:ext cx="3386361" cy="315367"/>
+          <p:cNvPr id="26" name="Text 24"/>
+          <p:cNvSpPr/>
+          <p:nvPr/>
+        </p:nvSpPr>
+        <p:spPr>
+          <a:xfrm>
+            <a:off x="11167021" y="4711154"/>
+            <a:ext cx="2858229" cy="315367"/>
           </a:xfrm>
           <a:prstGeom prst="rect">
             <a:avLst/>
@@ -11288,35 +12790,35 @@
       </p:sp>
       <p:sp>
         <p:nvSpPr>
-          <p:cNvPr id="20" name="Text 18"/>
-          <p:cNvSpPr/>
-          <p:nvPr/>
-        </p:nvSpPr>
-        <p:spPr>
-          <a:xfrm>
-            <a:off x="10930830" y="4874121"/>
-            <a:ext cx="3170865" cy="907852"/>
-          </a:xfrm>
-          <a:prstGeom prst="rect">
-            <a:avLst/>
-          </a:prstGeom>
-          <a:noFill/>
-          <a:ln/>
-        </p:spPr>
-        <p:txBody>
-          <a:bodyPr wrap="square" lIns="25400" tIns="25400" rIns="25400" bIns="25400" rtlCol="0" anchor="t">
-            <a:normAutofit/>
-          </a:bodyPr>
-          <a:lstStyle/>
-          <a:p>
-            <a:pPr algn="l" indent="0" marL="0">
-              <a:lnSpc>
-                <a:spcPct val="126875"/>
-              </a:lnSpc>
-              <a:buNone/>
-            </a:pPr>
-            <a:r>
-              <a:rPr lang="en-US" sz="1575" dirty="0">
+          <p:cNvPr id="27" name="Text 25"/>
+          <p:cNvSpPr/>
+          <p:nvPr/>
+        </p:nvSpPr>
+        <p:spPr>
+          <a:xfrm>
+            <a:off x="11167021" y="5197971"/>
+            <a:ext cx="2676342" cy="678061"/>
+          </a:xfrm>
+          <a:prstGeom prst="rect">
+            <a:avLst/>
+          </a:prstGeom>
+          <a:noFill/>
+          <a:ln/>
+        </p:spPr>
+        <p:txBody>
+          <a:bodyPr wrap="square" lIns="25400" tIns="25400" rIns="25400" bIns="25400" rtlCol="0" anchor="t">
+            <a:normAutofit/>
+          </a:bodyPr>
+          <a:lstStyle/>
+          <a:p>
+            <a:pPr algn="l" indent="0" marL="0">
+              <a:lnSpc>
+                <a:spcPct val="120000"/>
+              </a:lnSpc>
+              <a:buNone/>
+            </a:pPr>
+            <a:r>
+              <a:rPr lang="en-US" sz="1800" dirty="0">
                 <a:solidFill>
                   <a:srgbClr val="645C50"/>
                 </a:solidFill>
@@ -11324,21 +12826,87 @@
                 <a:ea typeface="Arial" pitchFamily="34" charset="-122"/>
                 <a:cs typeface="Arial" pitchFamily="34" charset="-120"/>
               </a:rPr>
-              <a:t>Pruebas unitarias, integrales y de regresión al cierre de la construcción.</a:t>
-            </a:r>
-            <a:endParaRPr lang="en-US" sz="1575" dirty="0"/>
-          </a:p>
-        </p:txBody>
-      </p:sp>
-      <p:sp>
-        <p:nvSpPr>
-          <p:cNvPr id="21" name="Shape 19"/>
-          <p:cNvSpPr/>
-          <p:nvPr/>
-        </p:nvSpPr>
-        <p:spPr>
-          <a:xfrm>
-            <a:off x="14256990" y="3530054"/>
+              <a:t>Pruebas unitarias, integrales y de regresión.</a:t>
+            </a:r>
+            <a:endParaRPr lang="en-US" sz="1800" dirty="0"/>
+          </a:p>
+        </p:txBody>
+      </p:sp>
+      <p:sp>
+        <p:nvSpPr>
+          <p:cNvPr id="28" name="Text 26"/>
+          <p:cNvSpPr/>
+          <p:nvPr/>
+        </p:nvSpPr>
+        <p:spPr>
+          <a:xfrm>
+            <a:off x="11167021" y="8492728"/>
+            <a:ext cx="2676342" cy="746522"/>
+          </a:xfrm>
+          <a:prstGeom prst="rect">
+            <a:avLst/>
+          </a:prstGeom>
+          <a:noFill/>
+          <a:ln/>
+        </p:spPr>
+        <p:txBody>
+          <a:bodyPr wrap="square" lIns="25400" tIns="25400" rIns="25400" bIns="25400" rtlCol="0" anchor="t">
+            <a:normAutofit/>
+          </a:bodyPr>
+          <a:lstStyle/>
+          <a:p>
+            <a:pPr algn="l" indent="0" marL="0">
+              <a:lnSpc>
+                <a:spcPct val="132857"/>
+              </a:lnSpc>
+              <a:buNone/>
+            </a:pPr>
+            <a:r>
+              <a:rPr lang="en-US" sz="1800" dirty="0">
+                <a:solidFill>
+                  <a:srgbClr val="8C491A"/>
+                </a:solidFill>
+                <a:latin typeface="Arial" pitchFamily="34" charset="0"/>
+                <a:ea typeface="Arial" pitchFamily="34" charset="-122"/>
+                <a:cs typeface="Arial" pitchFamily="34" charset="-120"/>
+              </a:rPr>
+              <a:t>Entregable: Informe de pruebas</a:t>
+            </a:r>
+            <a:endParaRPr lang="en-US" sz="1800" dirty="0"/>
+          </a:p>
+        </p:txBody>
+      </p:sp>
+      <p:sp>
+        <p:nvSpPr>
+          <p:cNvPr id="29" name="Shape 27"/>
+          <p:cNvSpPr/>
+          <p:nvPr/>
+        </p:nvSpPr>
+        <p:spPr>
+          <a:xfrm>
+            <a:off x="14241661" y="3530054"/>
+            <a:ext cx="3093690" cy="5994946"/>
+          </a:xfrm>
+          <a:prstGeom prst="roundRect">
+            <a:avLst>
+              <a:gd name="adj" fmla="val 8621"/>
+            </a:avLst>
+          </a:prstGeom>
+          <a:solidFill>
+            <a:srgbClr val="EBDDC5"/>
+          </a:solidFill>
+          <a:ln/>
+        </p:spPr>
+      </p:sp>
+      <p:sp>
+        <p:nvSpPr>
+          <p:cNvPr id="30" name="Shape 28"/>
+          <p:cNvSpPr/>
+          <p:nvPr/>
+        </p:nvSpPr>
+        <p:spPr>
+          <a:xfrm>
+            <a:off x="14489311" y="3853904"/>
             <a:ext cx="647700" cy="647700"/>
           </a:xfrm>
           <a:prstGeom prst="ellipse">
@@ -11352,13 +12920,13 @@
       </p:sp>
       <p:sp>
         <p:nvSpPr>
-          <p:cNvPr id="22" name="Text 20"/>
-          <p:cNvSpPr/>
-          <p:nvPr/>
-        </p:nvSpPr>
-        <p:spPr>
-          <a:xfrm>
-            <a:off x="14218890" y="3530054"/>
+          <p:cNvPr id="31" name="Text 29"/>
+          <p:cNvSpPr/>
+          <p:nvPr/>
+        </p:nvSpPr>
+        <p:spPr>
+          <a:xfrm>
+            <a:off x="14451211" y="3853904"/>
             <a:ext cx="723900" cy="685800"/>
           </a:xfrm>
           <a:prstGeom prst="rect">
@@ -11396,14 +12964,14 @@
       </p:sp>
       <p:sp>
         <p:nvSpPr>
-          <p:cNvPr id="23" name="Text 21"/>
-          <p:cNvSpPr/>
-          <p:nvPr/>
-        </p:nvSpPr>
-        <p:spPr>
-          <a:xfrm>
-            <a:off x="14256990" y="4387304"/>
-            <a:ext cx="3386361" cy="315367"/>
+          <p:cNvPr id="32" name="Text 30"/>
+          <p:cNvSpPr/>
+          <p:nvPr/>
+        </p:nvSpPr>
+        <p:spPr>
+          <a:xfrm>
+            <a:off x="14489311" y="4711154"/>
+            <a:ext cx="2858229" cy="315367"/>
           </a:xfrm>
           <a:prstGeom prst="rect">
             <a:avLst/>
@@ -11440,35 +13008,35 @@
       </p:sp>
       <p:sp>
         <p:nvSpPr>
-          <p:cNvPr id="24" name="Text 22"/>
-          <p:cNvSpPr/>
-          <p:nvPr/>
-        </p:nvSpPr>
-        <p:spPr>
-          <a:xfrm>
-            <a:off x="14256990" y="4874121"/>
-            <a:ext cx="3170865" cy="617934"/>
-          </a:xfrm>
-          <a:prstGeom prst="rect">
-            <a:avLst/>
-          </a:prstGeom>
-          <a:noFill/>
-          <a:ln/>
-        </p:spPr>
-        <p:txBody>
-          <a:bodyPr wrap="square" lIns="25400" tIns="25400" rIns="25400" bIns="25400" rtlCol="0" anchor="t">
-            <a:normAutofit/>
-          </a:bodyPr>
-          <a:lstStyle/>
-          <a:p>
-            <a:pPr algn="l" indent="0" marL="0">
-              <a:lnSpc>
-                <a:spcPct val="126875"/>
-              </a:lnSpc>
-              <a:buNone/>
-            </a:pPr>
-            <a:r>
-              <a:rPr lang="en-US" sz="1575" dirty="0">
+          <p:cNvPr id="33" name="Text 31"/>
+          <p:cNvSpPr/>
+          <p:nvPr/>
+        </p:nvSpPr>
+        <p:spPr>
+          <a:xfrm>
+            <a:off x="14489311" y="5197971"/>
+            <a:ext cx="2676342" cy="678061"/>
+          </a:xfrm>
+          <a:prstGeom prst="rect">
+            <a:avLst/>
+          </a:prstGeom>
+          <a:noFill/>
+          <a:ln/>
+        </p:spPr>
+        <p:txBody>
+          <a:bodyPr wrap="square" lIns="25400" tIns="25400" rIns="25400" bIns="25400" rtlCol="0" anchor="t">
+            <a:normAutofit/>
+          </a:bodyPr>
+          <a:lstStyle/>
+          <a:p>
+            <a:pPr algn="l" indent="0" marL="0">
+              <a:lnSpc>
+                <a:spcPct val="120000"/>
+              </a:lnSpc>
+              <a:buNone/>
+            </a:pPr>
+            <a:r>
+              <a:rPr lang="en-US" sz="1800" dirty="0">
                 <a:solidFill>
                   <a:srgbClr val="645C50"/>
                 </a:solidFill>
@@ -11476,9 +13044,53 @@
                 <a:ea typeface="Arial" pitchFamily="34" charset="-122"/>
                 <a:cs typeface="Arial" pitchFamily="34" charset="-120"/>
               </a:rPr>
-              <a:t>Despliegue final, manual de usuario y capacitación.</a:t>
-            </a:r>
-            <a:endParaRPr lang="en-US" sz="1575" dirty="0"/>
+              <a:t>Despliegue final y capacitación.</a:t>
+            </a:r>
+            <a:endParaRPr lang="en-US" sz="1800" dirty="0"/>
+          </a:p>
+        </p:txBody>
+      </p:sp>
+      <p:sp>
+        <p:nvSpPr>
+          <p:cNvPr id="34" name="Text 32"/>
+          <p:cNvSpPr/>
+          <p:nvPr/>
+        </p:nvSpPr>
+        <p:spPr>
+          <a:xfrm>
+            <a:off x="14489311" y="8492728"/>
+            <a:ext cx="2676342" cy="746522"/>
+          </a:xfrm>
+          <a:prstGeom prst="rect">
+            <a:avLst/>
+          </a:prstGeom>
+          <a:noFill/>
+          <a:ln/>
+        </p:spPr>
+        <p:txBody>
+          <a:bodyPr wrap="square" lIns="25400" tIns="25400" rIns="25400" bIns="25400" rtlCol="0" anchor="t">
+            <a:normAutofit/>
+          </a:bodyPr>
+          <a:lstStyle/>
+          <a:p>
+            <a:pPr algn="l" indent="0" marL="0">
+              <a:lnSpc>
+                <a:spcPct val="132857"/>
+              </a:lnSpc>
+              <a:buNone/>
+            </a:pPr>
+            <a:r>
+              <a:rPr lang="en-US" sz="1800" dirty="0">
+                <a:solidFill>
+                  <a:srgbClr val="8C491A"/>
+                </a:solidFill>
+                <a:latin typeface="Arial" pitchFamily="34" charset="0"/>
+                <a:ea typeface="Arial" pitchFamily="34" charset="-122"/>
+                <a:cs typeface="Arial" pitchFamily="34" charset="-120"/>
+              </a:rPr>
+              <a:t>Entregable: Manual de usuario</a:t>
+            </a:r>
+            <a:endParaRPr lang="en-US" sz="1800" dirty="0"/>
           </a:p>
         </p:txBody>
       </p:sp>
@@ -11611,11 +13223,11 @@
         <p:spPr>
           <a:xfrm>
             <a:off x="952500" y="3339554"/>
-            <a:ext cx="5206901" cy="2445990"/>
+            <a:ext cx="5206901" cy="6185446"/>
           </a:xfrm>
           <a:prstGeom prst="roundRect">
             <a:avLst>
-              <a:gd name="adj" fmla="val 10904"/>
+              <a:gd name="adj" fmla="val 5122"/>
             </a:avLst>
           </a:prstGeom>
           <a:solidFill>
@@ -11631,15 +13243,45 @@
           </a:effectLst>
         </p:spPr>
       </p:sp>
-      <p:sp>
-        <p:nvSpPr>
-          <p:cNvPr id="5" name="Text 3"/>
-          <p:cNvSpPr/>
-          <p:nvPr/>
-        </p:nvSpPr>
-        <p:spPr>
-          <a:xfrm>
-            <a:off x="1314450" y="3758654"/>
+      <p:pic>
+        <p:nvPicPr>
+          <p:cNvPr id="5" name="Image 0" descr="preencoded.png">    </p:cNvPr>
+          <p:cNvPicPr>
+            <a:picLocks noChangeAspect="1"/>
+          </p:cNvPicPr>
+          <p:nvPr/>
+        </p:nvPicPr>
+        <p:blipFill>
+          <a:blip r:embed="rId1">
+            <a:extLst>
+              <a:ext uri="{96DAC541-7B7A-43D3-8B79-37D633B846F1}">
+                <asvg:svgBlip xmlns:asvg="http://schemas.microsoft.com/office/drawing/2016/SVG/main" r:embed="rId2"/>
+              </a:ext>
+            </a:extLst>
+          </a:blip>
+          <a:stretch>
+            <a:fillRect/>
+          </a:stretch>
+        </p:blipFill>
+        <p:spPr>
+          <a:xfrm>
+            <a:off x="1314450" y="5256907"/>
+            <a:ext cx="476250" cy="476250"/>
+          </a:xfrm>
+          <a:prstGeom prst="rect">
+            <a:avLst/>
+          </a:prstGeom>
+        </p:spPr>
+      </p:pic>
+      <p:sp>
+        <p:nvSpPr>
+          <p:cNvPr id="6" name="Text 3"/>
+          <p:cNvSpPr/>
+          <p:nvPr/>
+        </p:nvSpPr>
+        <p:spPr>
+          <a:xfrm>
+            <a:off x="1314450" y="5942707"/>
             <a:ext cx="4931301" cy="464790"/>
           </a:xfrm>
           <a:prstGeom prst="rect">
@@ -11677,13 +13319,13 @@
       </p:sp>
       <p:sp>
         <p:nvSpPr>
-          <p:cNvPr id="6" name="Text 4"/>
-          <p:cNvSpPr/>
-          <p:nvPr/>
-        </p:nvSpPr>
-        <p:spPr>
-          <a:xfrm>
-            <a:off x="1314450" y="4337745"/>
+          <p:cNvPr id="7" name="Text 4"/>
+          <p:cNvSpPr/>
+          <p:nvPr/>
+        </p:nvSpPr>
+        <p:spPr>
+          <a:xfrm>
+            <a:off x="1314450" y="6578947"/>
             <a:ext cx="4617491" cy="1066800"/>
           </a:xfrm>
           <a:prstGeom prst="rect">
@@ -11721,18 +13363,18 @@
       </p:sp>
       <p:sp>
         <p:nvSpPr>
-          <p:cNvPr id="7" name="Shape 5"/>
+          <p:cNvPr id="8" name="Shape 5"/>
           <p:cNvSpPr/>
           <p:nvPr/>
         </p:nvSpPr>
         <p:spPr>
           <a:xfrm>
             <a:off x="6540401" y="3339554"/>
-            <a:ext cx="5207050" cy="2445990"/>
+            <a:ext cx="5207050" cy="6185446"/>
           </a:xfrm>
           <a:prstGeom prst="roundRect">
             <a:avLst>
-              <a:gd name="adj" fmla="val 10904"/>
+              <a:gd name="adj" fmla="val 5122"/>
             </a:avLst>
           </a:prstGeom>
           <a:solidFill>
@@ -11748,15 +13390,45 @@
           </a:effectLst>
         </p:spPr>
       </p:sp>
-      <p:sp>
-        <p:nvSpPr>
-          <p:cNvPr id="8" name="Text 6"/>
-          <p:cNvSpPr/>
-          <p:nvPr/>
-        </p:nvSpPr>
-        <p:spPr>
-          <a:xfrm>
-            <a:off x="6902351" y="3758654"/>
+      <p:pic>
+        <p:nvPicPr>
+          <p:cNvPr id="9" name="Image 1" descr="preencoded.png">    </p:cNvPr>
+          <p:cNvPicPr>
+            <a:picLocks noChangeAspect="1"/>
+          </p:cNvPicPr>
+          <p:nvPr/>
+        </p:nvPicPr>
+        <p:blipFill>
+          <a:blip r:embed="rId3">
+            <a:extLst>
+              <a:ext uri="{96DAC541-7B7A-43D3-8B79-37D633B846F1}">
+                <asvg:svgBlip xmlns:asvg="http://schemas.microsoft.com/office/drawing/2016/SVG/main" r:embed="rId4"/>
+              </a:ext>
+            </a:extLst>
+          </a:blip>
+          <a:stretch>
+            <a:fillRect/>
+          </a:stretch>
+        </p:blipFill>
+        <p:spPr>
+          <a:xfrm>
+            <a:off x="6902351" y="5256907"/>
+            <a:ext cx="476250" cy="476250"/>
+          </a:xfrm>
+          <a:prstGeom prst="rect">
+            <a:avLst/>
+          </a:prstGeom>
+        </p:spPr>
+      </p:pic>
+      <p:sp>
+        <p:nvSpPr>
+          <p:cNvPr id="10" name="Text 6"/>
+          <p:cNvSpPr/>
+          <p:nvPr/>
+        </p:nvSpPr>
+        <p:spPr>
+          <a:xfrm>
+            <a:off x="6902351" y="5942707"/>
             <a:ext cx="4931465" cy="464790"/>
           </a:xfrm>
           <a:prstGeom prst="rect">
@@ -11794,13 +13466,13 @@
       </p:sp>
       <p:sp>
         <p:nvSpPr>
-          <p:cNvPr id="9" name="Text 7"/>
-          <p:cNvSpPr/>
-          <p:nvPr/>
-        </p:nvSpPr>
-        <p:spPr>
-          <a:xfrm>
-            <a:off x="6902351" y="4337745"/>
+          <p:cNvPr id="11" name="Text 7"/>
+          <p:cNvSpPr/>
+          <p:nvPr/>
+        </p:nvSpPr>
+        <p:spPr>
+          <a:xfrm>
+            <a:off x="6902351" y="6578947"/>
             <a:ext cx="4617644" cy="1066800"/>
           </a:xfrm>
           <a:prstGeom prst="rect">
@@ -11838,18 +13510,18 @@
       </p:sp>
       <p:sp>
         <p:nvSpPr>
-          <p:cNvPr id="10" name="Shape 8"/>
+          <p:cNvPr id="12" name="Shape 8"/>
           <p:cNvSpPr/>
           <p:nvPr/>
         </p:nvSpPr>
         <p:spPr>
           <a:xfrm>
             <a:off x="12128450" y="3339554"/>
-            <a:ext cx="5207050" cy="2445990"/>
+            <a:ext cx="5207050" cy="6185446"/>
           </a:xfrm>
           <a:prstGeom prst="roundRect">
             <a:avLst>
-              <a:gd name="adj" fmla="val 10904"/>
+              <a:gd name="adj" fmla="val 5122"/>
             </a:avLst>
           </a:prstGeom>
           <a:solidFill>
@@ -11865,15 +13537,45 @@
           </a:effectLst>
         </p:spPr>
       </p:sp>
-      <p:sp>
-        <p:nvSpPr>
-          <p:cNvPr id="11" name="Text 9"/>
-          <p:cNvSpPr/>
-          <p:nvPr/>
-        </p:nvSpPr>
-        <p:spPr>
-          <a:xfrm>
-            <a:off x="12490400" y="3758654"/>
+      <p:pic>
+        <p:nvPicPr>
+          <p:cNvPr id="13" name="Image 2" descr="preencoded.png">    </p:cNvPr>
+          <p:cNvPicPr>
+            <a:picLocks noChangeAspect="1"/>
+          </p:cNvPicPr>
+          <p:nvPr/>
+        </p:nvPicPr>
+        <p:blipFill>
+          <a:blip r:embed="rId5">
+            <a:extLst>
+              <a:ext uri="{96DAC541-7B7A-43D3-8B79-37D633B846F1}">
+                <asvg:svgBlip xmlns:asvg="http://schemas.microsoft.com/office/drawing/2016/SVG/main" r:embed="rId6"/>
+              </a:ext>
+            </a:extLst>
+          </a:blip>
+          <a:stretch>
+            <a:fillRect/>
+          </a:stretch>
+        </p:blipFill>
+        <p:spPr>
+          <a:xfrm>
+            <a:off x="12490400" y="5256907"/>
+            <a:ext cx="476250" cy="476250"/>
+          </a:xfrm>
+          <a:prstGeom prst="rect">
+            <a:avLst/>
+          </a:prstGeom>
+        </p:spPr>
+      </p:pic>
+      <p:sp>
+        <p:nvSpPr>
+          <p:cNvPr id="14" name="Text 9"/>
+          <p:cNvSpPr/>
+          <p:nvPr/>
+        </p:nvSpPr>
+        <p:spPr>
+          <a:xfrm>
+            <a:off x="12490400" y="5942707"/>
             <a:ext cx="4931465" cy="464790"/>
           </a:xfrm>
           <a:prstGeom prst="rect">
@@ -11911,13 +13613,13 @@
       </p:sp>
       <p:sp>
         <p:nvSpPr>
-          <p:cNvPr id="12" name="Text 10"/>
-          <p:cNvSpPr/>
-          <p:nvPr/>
-        </p:nvSpPr>
-        <p:spPr>
-          <a:xfrm>
-            <a:off x="12490400" y="4337745"/>
+          <p:cNvPr id="15" name="Text 10"/>
+          <p:cNvSpPr/>
+          <p:nvPr/>
+        </p:nvSpPr>
+        <p:spPr>
+          <a:xfrm>
+            <a:off x="12490400" y="6578947"/>
             <a:ext cx="4617644" cy="1066800"/>
           </a:xfrm>
           <a:prstGeom prst="rect">
